--- a/docs/fmva/packs/day1-slides.pptx
+++ b/docs/fmva/packs/day1-slides.pptx
@@ -16,9 +16,17 @@
     <p:sldId id="264" r:id="rId10"/>
     <p:sldId id="265" r:id="rId11"/>
     <p:sldId id="266" r:id="rId12"/>
+    <p:sldId id="267" r:id="rId13"/>
+    <p:sldId id="268" r:id="rId14"/>
+    <p:sldId id="269" r:id="rId15"/>
+    <p:sldId id="270" r:id="rId16"/>
+    <p:sldId id="271" r:id="rId17"/>
+    <p:sldId id="272" r:id="rId18"/>
+    <p:sldId id="273" r:id="rId19"/>
+    <p:sldId id="274" r:id="rId20"/>
   </p:sldIdLst>
   <p:notesMasterIdLst>
-    <p:notesMasterId r:id="rId13"/>
+    <p:notesMasterId r:id="rId21"/>
   </p:notesMasterIdLst>
   <p:sldSz cx="9144000" cy="5148072"/>
   <p:notesSz cx="5148072" cy="9144000"/>
@@ -712,6 +720,710 @@
             <a:fld id="{F7021451-1387-4CA6-816F-3879F97B5CBC}" type="slidenum">
               <a:rPr lang="en-US"/>
               <a:t>11</a:t>
+            </a:fld>
+            <a:endParaRPr lang="en-US"/>
+          </a:p>
+        </p:txBody>
+      </p:sp>
+    </p:spTree>
+    <p:extLst>
+      <p:ext uri="{BB962C8B-B14F-4D97-AF65-F5344CB8AC3E}">
+        <p14:creationId xmlns:p14="http://schemas.microsoft.com/office/powerpoint/2010/main" val="1024086991"/>
+      </p:ext>
+    </p:extLst>
+  </p:cSld>
+  <p:clrMapOvr>
+    <a:masterClrMapping/>
+  </p:clrMapOvr>
+</p:notes>
+</file>
+
+<file path=ppt/notesSlides/notesSlide12.xml><?xml version="1.0" encoding="utf-8"?>
+<p:notes xmlns:a="http://schemas.openxmlformats.org/drawingml/2006/main" xmlns:r="http://schemas.openxmlformats.org/officeDocument/2006/relationships" xmlns:p="http://schemas.openxmlformats.org/presentationml/2006/main">
+  <p:cSld>
+    <p:spTree>
+      <p:nvGrpSpPr>
+        <p:cNvPr id="1" name=""/>
+        <p:cNvGrpSpPr/>
+        <p:nvPr/>
+      </p:nvGrpSpPr>
+      <p:grpSpPr>
+        <a:xfrm>
+          <a:off x="0" y="0"/>
+          <a:ext cx="0" cy="0"/>
+          <a:chOff x="0" y="0"/>
+          <a:chExt cx="0" cy="0"/>
+        </a:xfrm>
+      </p:grpSpPr>
+      <p:sp>
+        <p:nvSpPr>
+          <p:cNvPr id="2" name="Slide Image Placeholder 1"/>
+          <p:cNvSpPr>
+            <a:spLocks noGrp="1" noRot="1" noChangeAspect="1"/>
+          </p:cNvSpPr>
+          <p:nvPr>
+            <p:ph type="sldImg"/>
+          </p:nvPr>
+        </p:nvSpPr>
+        <p:spPr/>
+      </p:sp>
+      <p:sp>
+        <p:nvSpPr>
+          <p:cNvPr id="3" name="Notes Placeholder 2"/>
+          <p:cNvSpPr>
+            <a:spLocks noGrp="1"/>
+          </p:cNvSpPr>
+          <p:nvPr>
+            <p:ph type="body" idx="1"/>
+          </p:nvPr>
+        </p:nvSpPr>
+        <p:spPr/>
+        <p:txBody>
+          <a:bodyPr/>
+          <a:lstStyle/>
+          <a:p>
+            <a:r>
+              <a:rPr lang="en-US" dirty="0"/>
+              <a:t/>
+            </a:r>
+            <a:endParaRPr lang="en-US" dirty="0"/>
+          </a:p>
+        </p:txBody>
+      </p:sp>
+      <p:sp>
+        <p:nvSpPr>
+          <p:cNvPr id="4" name="Slide Number Placeholder 3"/>
+          <p:cNvSpPr>
+            <a:spLocks noGrp="1"/>
+          </p:cNvSpPr>
+          <p:nvPr>
+            <p:ph type="sldNum" sz="quarter" idx="10"/>
+          </p:nvPr>
+        </p:nvSpPr>
+        <p:spPr/>
+        <p:txBody>
+          <a:bodyPr/>
+          <a:lstStyle/>
+          <a:p>
+            <a:fld id="{F7021451-1387-4CA6-816F-3879F97B5CBC}" type="slidenum">
+              <a:rPr lang="en-US"/>
+              <a:t>12</a:t>
+            </a:fld>
+            <a:endParaRPr lang="en-US"/>
+          </a:p>
+        </p:txBody>
+      </p:sp>
+    </p:spTree>
+    <p:extLst>
+      <p:ext uri="{BB962C8B-B14F-4D97-AF65-F5344CB8AC3E}">
+        <p14:creationId xmlns:p14="http://schemas.microsoft.com/office/powerpoint/2010/main" val="1024086991"/>
+      </p:ext>
+    </p:extLst>
+  </p:cSld>
+  <p:clrMapOvr>
+    <a:masterClrMapping/>
+  </p:clrMapOvr>
+</p:notes>
+</file>
+
+<file path=ppt/notesSlides/notesSlide13.xml><?xml version="1.0" encoding="utf-8"?>
+<p:notes xmlns:a="http://schemas.openxmlformats.org/drawingml/2006/main" xmlns:r="http://schemas.openxmlformats.org/officeDocument/2006/relationships" xmlns:p="http://schemas.openxmlformats.org/presentationml/2006/main">
+  <p:cSld>
+    <p:spTree>
+      <p:nvGrpSpPr>
+        <p:cNvPr id="1" name=""/>
+        <p:cNvGrpSpPr/>
+        <p:nvPr/>
+      </p:nvGrpSpPr>
+      <p:grpSpPr>
+        <a:xfrm>
+          <a:off x="0" y="0"/>
+          <a:ext cx="0" cy="0"/>
+          <a:chOff x="0" y="0"/>
+          <a:chExt cx="0" cy="0"/>
+        </a:xfrm>
+      </p:grpSpPr>
+      <p:sp>
+        <p:nvSpPr>
+          <p:cNvPr id="2" name="Slide Image Placeholder 1"/>
+          <p:cNvSpPr>
+            <a:spLocks noGrp="1" noRot="1" noChangeAspect="1"/>
+          </p:cNvSpPr>
+          <p:nvPr>
+            <p:ph type="sldImg"/>
+          </p:nvPr>
+        </p:nvSpPr>
+        <p:spPr/>
+      </p:sp>
+      <p:sp>
+        <p:nvSpPr>
+          <p:cNvPr id="3" name="Notes Placeholder 2"/>
+          <p:cNvSpPr>
+            <a:spLocks noGrp="1"/>
+          </p:cNvSpPr>
+          <p:nvPr>
+            <p:ph type="body" idx="1"/>
+          </p:nvPr>
+        </p:nvSpPr>
+        <p:spPr/>
+        <p:txBody>
+          <a:bodyPr/>
+          <a:lstStyle/>
+          <a:p>
+            <a:r>
+              <a:rPr lang="en-US" dirty="0"/>
+              <a:t/>
+            </a:r>
+            <a:endParaRPr lang="en-US" dirty="0"/>
+          </a:p>
+        </p:txBody>
+      </p:sp>
+      <p:sp>
+        <p:nvSpPr>
+          <p:cNvPr id="4" name="Slide Number Placeholder 3"/>
+          <p:cNvSpPr>
+            <a:spLocks noGrp="1"/>
+          </p:cNvSpPr>
+          <p:nvPr>
+            <p:ph type="sldNum" sz="quarter" idx="10"/>
+          </p:nvPr>
+        </p:nvSpPr>
+        <p:spPr/>
+        <p:txBody>
+          <a:bodyPr/>
+          <a:lstStyle/>
+          <a:p>
+            <a:fld id="{F7021451-1387-4CA6-816F-3879F97B5CBC}" type="slidenum">
+              <a:rPr lang="en-US"/>
+              <a:t>13</a:t>
+            </a:fld>
+            <a:endParaRPr lang="en-US"/>
+          </a:p>
+        </p:txBody>
+      </p:sp>
+    </p:spTree>
+    <p:extLst>
+      <p:ext uri="{BB962C8B-B14F-4D97-AF65-F5344CB8AC3E}">
+        <p14:creationId xmlns:p14="http://schemas.microsoft.com/office/powerpoint/2010/main" val="1024086991"/>
+      </p:ext>
+    </p:extLst>
+  </p:cSld>
+  <p:clrMapOvr>
+    <a:masterClrMapping/>
+  </p:clrMapOvr>
+</p:notes>
+</file>
+
+<file path=ppt/notesSlides/notesSlide14.xml><?xml version="1.0" encoding="utf-8"?>
+<p:notes xmlns:a="http://schemas.openxmlformats.org/drawingml/2006/main" xmlns:r="http://schemas.openxmlformats.org/officeDocument/2006/relationships" xmlns:p="http://schemas.openxmlformats.org/presentationml/2006/main">
+  <p:cSld>
+    <p:spTree>
+      <p:nvGrpSpPr>
+        <p:cNvPr id="1" name=""/>
+        <p:cNvGrpSpPr/>
+        <p:nvPr/>
+      </p:nvGrpSpPr>
+      <p:grpSpPr>
+        <a:xfrm>
+          <a:off x="0" y="0"/>
+          <a:ext cx="0" cy="0"/>
+          <a:chOff x="0" y="0"/>
+          <a:chExt cx="0" cy="0"/>
+        </a:xfrm>
+      </p:grpSpPr>
+      <p:sp>
+        <p:nvSpPr>
+          <p:cNvPr id="2" name="Slide Image Placeholder 1"/>
+          <p:cNvSpPr>
+            <a:spLocks noGrp="1" noRot="1" noChangeAspect="1"/>
+          </p:cNvSpPr>
+          <p:nvPr>
+            <p:ph type="sldImg"/>
+          </p:nvPr>
+        </p:nvSpPr>
+        <p:spPr/>
+      </p:sp>
+      <p:sp>
+        <p:nvSpPr>
+          <p:cNvPr id="3" name="Notes Placeholder 2"/>
+          <p:cNvSpPr>
+            <a:spLocks noGrp="1"/>
+          </p:cNvSpPr>
+          <p:nvPr>
+            <p:ph type="body" idx="1"/>
+          </p:nvPr>
+        </p:nvSpPr>
+        <p:spPr/>
+        <p:txBody>
+          <a:bodyPr/>
+          <a:lstStyle/>
+          <a:p>
+            <a:r>
+              <a:rPr lang="en-US" dirty="0"/>
+              <a:t/>
+            </a:r>
+            <a:endParaRPr lang="en-US" dirty="0"/>
+          </a:p>
+        </p:txBody>
+      </p:sp>
+      <p:sp>
+        <p:nvSpPr>
+          <p:cNvPr id="4" name="Slide Number Placeholder 3"/>
+          <p:cNvSpPr>
+            <a:spLocks noGrp="1"/>
+          </p:cNvSpPr>
+          <p:nvPr>
+            <p:ph type="sldNum" sz="quarter" idx="10"/>
+          </p:nvPr>
+        </p:nvSpPr>
+        <p:spPr/>
+        <p:txBody>
+          <a:bodyPr/>
+          <a:lstStyle/>
+          <a:p>
+            <a:fld id="{F7021451-1387-4CA6-816F-3879F97B5CBC}" type="slidenum">
+              <a:rPr lang="en-US"/>
+              <a:t>14</a:t>
+            </a:fld>
+            <a:endParaRPr lang="en-US"/>
+          </a:p>
+        </p:txBody>
+      </p:sp>
+    </p:spTree>
+    <p:extLst>
+      <p:ext uri="{BB962C8B-B14F-4D97-AF65-F5344CB8AC3E}">
+        <p14:creationId xmlns:p14="http://schemas.microsoft.com/office/powerpoint/2010/main" val="1024086991"/>
+      </p:ext>
+    </p:extLst>
+  </p:cSld>
+  <p:clrMapOvr>
+    <a:masterClrMapping/>
+  </p:clrMapOvr>
+</p:notes>
+</file>
+
+<file path=ppt/notesSlides/notesSlide15.xml><?xml version="1.0" encoding="utf-8"?>
+<p:notes xmlns:a="http://schemas.openxmlformats.org/drawingml/2006/main" xmlns:r="http://schemas.openxmlformats.org/officeDocument/2006/relationships" xmlns:p="http://schemas.openxmlformats.org/presentationml/2006/main">
+  <p:cSld>
+    <p:spTree>
+      <p:nvGrpSpPr>
+        <p:cNvPr id="1" name=""/>
+        <p:cNvGrpSpPr/>
+        <p:nvPr/>
+      </p:nvGrpSpPr>
+      <p:grpSpPr>
+        <a:xfrm>
+          <a:off x="0" y="0"/>
+          <a:ext cx="0" cy="0"/>
+          <a:chOff x="0" y="0"/>
+          <a:chExt cx="0" cy="0"/>
+        </a:xfrm>
+      </p:grpSpPr>
+      <p:sp>
+        <p:nvSpPr>
+          <p:cNvPr id="2" name="Slide Image Placeholder 1"/>
+          <p:cNvSpPr>
+            <a:spLocks noGrp="1" noRot="1" noChangeAspect="1"/>
+          </p:cNvSpPr>
+          <p:nvPr>
+            <p:ph type="sldImg"/>
+          </p:nvPr>
+        </p:nvSpPr>
+        <p:spPr/>
+      </p:sp>
+      <p:sp>
+        <p:nvSpPr>
+          <p:cNvPr id="3" name="Notes Placeholder 2"/>
+          <p:cNvSpPr>
+            <a:spLocks noGrp="1"/>
+          </p:cNvSpPr>
+          <p:nvPr>
+            <p:ph type="body" idx="1"/>
+          </p:nvPr>
+        </p:nvSpPr>
+        <p:spPr/>
+        <p:txBody>
+          <a:bodyPr/>
+          <a:lstStyle/>
+          <a:p>
+            <a:r>
+              <a:rPr lang="en-US" dirty="0"/>
+              <a:t/>
+            </a:r>
+            <a:endParaRPr lang="en-US" dirty="0"/>
+          </a:p>
+        </p:txBody>
+      </p:sp>
+      <p:sp>
+        <p:nvSpPr>
+          <p:cNvPr id="4" name="Slide Number Placeholder 3"/>
+          <p:cNvSpPr>
+            <a:spLocks noGrp="1"/>
+          </p:cNvSpPr>
+          <p:nvPr>
+            <p:ph type="sldNum" sz="quarter" idx="10"/>
+          </p:nvPr>
+        </p:nvSpPr>
+        <p:spPr/>
+        <p:txBody>
+          <a:bodyPr/>
+          <a:lstStyle/>
+          <a:p>
+            <a:fld id="{F7021451-1387-4CA6-816F-3879F97B5CBC}" type="slidenum">
+              <a:rPr lang="en-US"/>
+              <a:t>15</a:t>
+            </a:fld>
+            <a:endParaRPr lang="en-US"/>
+          </a:p>
+        </p:txBody>
+      </p:sp>
+    </p:spTree>
+    <p:extLst>
+      <p:ext uri="{BB962C8B-B14F-4D97-AF65-F5344CB8AC3E}">
+        <p14:creationId xmlns:p14="http://schemas.microsoft.com/office/powerpoint/2010/main" val="1024086991"/>
+      </p:ext>
+    </p:extLst>
+  </p:cSld>
+  <p:clrMapOvr>
+    <a:masterClrMapping/>
+  </p:clrMapOvr>
+</p:notes>
+</file>
+
+<file path=ppt/notesSlides/notesSlide16.xml><?xml version="1.0" encoding="utf-8"?>
+<p:notes xmlns:a="http://schemas.openxmlformats.org/drawingml/2006/main" xmlns:r="http://schemas.openxmlformats.org/officeDocument/2006/relationships" xmlns:p="http://schemas.openxmlformats.org/presentationml/2006/main">
+  <p:cSld>
+    <p:spTree>
+      <p:nvGrpSpPr>
+        <p:cNvPr id="1" name=""/>
+        <p:cNvGrpSpPr/>
+        <p:nvPr/>
+      </p:nvGrpSpPr>
+      <p:grpSpPr>
+        <a:xfrm>
+          <a:off x="0" y="0"/>
+          <a:ext cx="0" cy="0"/>
+          <a:chOff x="0" y="0"/>
+          <a:chExt cx="0" cy="0"/>
+        </a:xfrm>
+      </p:grpSpPr>
+      <p:sp>
+        <p:nvSpPr>
+          <p:cNvPr id="2" name="Slide Image Placeholder 1"/>
+          <p:cNvSpPr>
+            <a:spLocks noGrp="1" noRot="1" noChangeAspect="1"/>
+          </p:cNvSpPr>
+          <p:nvPr>
+            <p:ph type="sldImg"/>
+          </p:nvPr>
+        </p:nvSpPr>
+        <p:spPr/>
+      </p:sp>
+      <p:sp>
+        <p:nvSpPr>
+          <p:cNvPr id="3" name="Notes Placeholder 2"/>
+          <p:cNvSpPr>
+            <a:spLocks noGrp="1"/>
+          </p:cNvSpPr>
+          <p:nvPr>
+            <p:ph type="body" idx="1"/>
+          </p:nvPr>
+        </p:nvSpPr>
+        <p:spPr/>
+        <p:txBody>
+          <a:bodyPr/>
+          <a:lstStyle/>
+          <a:p>
+            <a:r>
+              <a:rPr lang="en-US" dirty="0"/>
+              <a:t/>
+            </a:r>
+            <a:endParaRPr lang="en-US" dirty="0"/>
+          </a:p>
+        </p:txBody>
+      </p:sp>
+      <p:sp>
+        <p:nvSpPr>
+          <p:cNvPr id="4" name="Slide Number Placeholder 3"/>
+          <p:cNvSpPr>
+            <a:spLocks noGrp="1"/>
+          </p:cNvSpPr>
+          <p:nvPr>
+            <p:ph type="sldNum" sz="quarter" idx="10"/>
+          </p:nvPr>
+        </p:nvSpPr>
+        <p:spPr/>
+        <p:txBody>
+          <a:bodyPr/>
+          <a:lstStyle/>
+          <a:p>
+            <a:fld id="{F7021451-1387-4CA6-816F-3879F97B5CBC}" type="slidenum">
+              <a:rPr lang="en-US"/>
+              <a:t>16</a:t>
+            </a:fld>
+            <a:endParaRPr lang="en-US"/>
+          </a:p>
+        </p:txBody>
+      </p:sp>
+    </p:spTree>
+    <p:extLst>
+      <p:ext uri="{BB962C8B-B14F-4D97-AF65-F5344CB8AC3E}">
+        <p14:creationId xmlns:p14="http://schemas.microsoft.com/office/powerpoint/2010/main" val="1024086991"/>
+      </p:ext>
+    </p:extLst>
+  </p:cSld>
+  <p:clrMapOvr>
+    <a:masterClrMapping/>
+  </p:clrMapOvr>
+</p:notes>
+</file>
+
+<file path=ppt/notesSlides/notesSlide17.xml><?xml version="1.0" encoding="utf-8"?>
+<p:notes xmlns:a="http://schemas.openxmlformats.org/drawingml/2006/main" xmlns:r="http://schemas.openxmlformats.org/officeDocument/2006/relationships" xmlns:p="http://schemas.openxmlformats.org/presentationml/2006/main">
+  <p:cSld>
+    <p:spTree>
+      <p:nvGrpSpPr>
+        <p:cNvPr id="1" name=""/>
+        <p:cNvGrpSpPr/>
+        <p:nvPr/>
+      </p:nvGrpSpPr>
+      <p:grpSpPr>
+        <a:xfrm>
+          <a:off x="0" y="0"/>
+          <a:ext cx="0" cy="0"/>
+          <a:chOff x="0" y="0"/>
+          <a:chExt cx="0" cy="0"/>
+        </a:xfrm>
+      </p:grpSpPr>
+      <p:sp>
+        <p:nvSpPr>
+          <p:cNvPr id="2" name="Slide Image Placeholder 1"/>
+          <p:cNvSpPr>
+            <a:spLocks noGrp="1" noRot="1" noChangeAspect="1"/>
+          </p:cNvSpPr>
+          <p:nvPr>
+            <p:ph type="sldImg"/>
+          </p:nvPr>
+        </p:nvSpPr>
+        <p:spPr/>
+      </p:sp>
+      <p:sp>
+        <p:nvSpPr>
+          <p:cNvPr id="3" name="Notes Placeholder 2"/>
+          <p:cNvSpPr>
+            <a:spLocks noGrp="1"/>
+          </p:cNvSpPr>
+          <p:nvPr>
+            <p:ph type="body" idx="1"/>
+          </p:nvPr>
+        </p:nvSpPr>
+        <p:spPr/>
+        <p:txBody>
+          <a:bodyPr/>
+          <a:lstStyle/>
+          <a:p>
+            <a:r>
+              <a:rPr lang="en-US" dirty="0"/>
+              <a:t/>
+            </a:r>
+            <a:endParaRPr lang="en-US" dirty="0"/>
+          </a:p>
+        </p:txBody>
+      </p:sp>
+      <p:sp>
+        <p:nvSpPr>
+          <p:cNvPr id="4" name="Slide Number Placeholder 3"/>
+          <p:cNvSpPr>
+            <a:spLocks noGrp="1"/>
+          </p:cNvSpPr>
+          <p:nvPr>
+            <p:ph type="sldNum" sz="quarter" idx="10"/>
+          </p:nvPr>
+        </p:nvSpPr>
+        <p:spPr/>
+        <p:txBody>
+          <a:bodyPr/>
+          <a:lstStyle/>
+          <a:p>
+            <a:fld id="{F7021451-1387-4CA6-816F-3879F97B5CBC}" type="slidenum">
+              <a:rPr lang="en-US"/>
+              <a:t>17</a:t>
+            </a:fld>
+            <a:endParaRPr lang="en-US"/>
+          </a:p>
+        </p:txBody>
+      </p:sp>
+    </p:spTree>
+    <p:extLst>
+      <p:ext uri="{BB962C8B-B14F-4D97-AF65-F5344CB8AC3E}">
+        <p14:creationId xmlns:p14="http://schemas.microsoft.com/office/powerpoint/2010/main" val="1024086991"/>
+      </p:ext>
+    </p:extLst>
+  </p:cSld>
+  <p:clrMapOvr>
+    <a:masterClrMapping/>
+  </p:clrMapOvr>
+</p:notes>
+</file>
+
+<file path=ppt/notesSlides/notesSlide18.xml><?xml version="1.0" encoding="utf-8"?>
+<p:notes xmlns:a="http://schemas.openxmlformats.org/drawingml/2006/main" xmlns:r="http://schemas.openxmlformats.org/officeDocument/2006/relationships" xmlns:p="http://schemas.openxmlformats.org/presentationml/2006/main">
+  <p:cSld>
+    <p:spTree>
+      <p:nvGrpSpPr>
+        <p:cNvPr id="1" name=""/>
+        <p:cNvGrpSpPr/>
+        <p:nvPr/>
+      </p:nvGrpSpPr>
+      <p:grpSpPr>
+        <a:xfrm>
+          <a:off x="0" y="0"/>
+          <a:ext cx="0" cy="0"/>
+          <a:chOff x="0" y="0"/>
+          <a:chExt cx="0" cy="0"/>
+        </a:xfrm>
+      </p:grpSpPr>
+      <p:sp>
+        <p:nvSpPr>
+          <p:cNvPr id="2" name="Slide Image Placeholder 1"/>
+          <p:cNvSpPr>
+            <a:spLocks noGrp="1" noRot="1" noChangeAspect="1"/>
+          </p:cNvSpPr>
+          <p:nvPr>
+            <p:ph type="sldImg"/>
+          </p:nvPr>
+        </p:nvSpPr>
+        <p:spPr/>
+      </p:sp>
+      <p:sp>
+        <p:nvSpPr>
+          <p:cNvPr id="3" name="Notes Placeholder 2"/>
+          <p:cNvSpPr>
+            <a:spLocks noGrp="1"/>
+          </p:cNvSpPr>
+          <p:nvPr>
+            <p:ph type="body" idx="1"/>
+          </p:nvPr>
+        </p:nvSpPr>
+        <p:spPr/>
+        <p:txBody>
+          <a:bodyPr/>
+          <a:lstStyle/>
+          <a:p>
+            <a:r>
+              <a:rPr lang="en-US" dirty="0"/>
+              <a:t/>
+            </a:r>
+            <a:endParaRPr lang="en-US" dirty="0"/>
+          </a:p>
+        </p:txBody>
+      </p:sp>
+      <p:sp>
+        <p:nvSpPr>
+          <p:cNvPr id="4" name="Slide Number Placeholder 3"/>
+          <p:cNvSpPr>
+            <a:spLocks noGrp="1"/>
+          </p:cNvSpPr>
+          <p:nvPr>
+            <p:ph type="sldNum" sz="quarter" idx="10"/>
+          </p:nvPr>
+        </p:nvSpPr>
+        <p:spPr/>
+        <p:txBody>
+          <a:bodyPr/>
+          <a:lstStyle/>
+          <a:p>
+            <a:fld id="{F7021451-1387-4CA6-816F-3879F97B5CBC}" type="slidenum">
+              <a:rPr lang="en-US"/>
+              <a:t>18</a:t>
+            </a:fld>
+            <a:endParaRPr lang="en-US"/>
+          </a:p>
+        </p:txBody>
+      </p:sp>
+    </p:spTree>
+    <p:extLst>
+      <p:ext uri="{BB962C8B-B14F-4D97-AF65-F5344CB8AC3E}">
+        <p14:creationId xmlns:p14="http://schemas.microsoft.com/office/powerpoint/2010/main" val="1024086991"/>
+      </p:ext>
+    </p:extLst>
+  </p:cSld>
+  <p:clrMapOvr>
+    <a:masterClrMapping/>
+  </p:clrMapOvr>
+</p:notes>
+</file>
+
+<file path=ppt/notesSlides/notesSlide19.xml><?xml version="1.0" encoding="utf-8"?>
+<p:notes xmlns:a="http://schemas.openxmlformats.org/drawingml/2006/main" xmlns:r="http://schemas.openxmlformats.org/officeDocument/2006/relationships" xmlns:p="http://schemas.openxmlformats.org/presentationml/2006/main">
+  <p:cSld>
+    <p:spTree>
+      <p:nvGrpSpPr>
+        <p:cNvPr id="1" name=""/>
+        <p:cNvGrpSpPr/>
+        <p:nvPr/>
+      </p:nvGrpSpPr>
+      <p:grpSpPr>
+        <a:xfrm>
+          <a:off x="0" y="0"/>
+          <a:ext cx="0" cy="0"/>
+          <a:chOff x="0" y="0"/>
+          <a:chExt cx="0" cy="0"/>
+        </a:xfrm>
+      </p:grpSpPr>
+      <p:sp>
+        <p:nvSpPr>
+          <p:cNvPr id="2" name="Slide Image Placeholder 1"/>
+          <p:cNvSpPr>
+            <a:spLocks noGrp="1" noRot="1" noChangeAspect="1"/>
+          </p:cNvSpPr>
+          <p:nvPr>
+            <p:ph type="sldImg"/>
+          </p:nvPr>
+        </p:nvSpPr>
+        <p:spPr/>
+      </p:sp>
+      <p:sp>
+        <p:nvSpPr>
+          <p:cNvPr id="3" name="Notes Placeholder 2"/>
+          <p:cNvSpPr>
+            <a:spLocks noGrp="1"/>
+          </p:cNvSpPr>
+          <p:nvPr>
+            <p:ph type="body" idx="1"/>
+          </p:nvPr>
+        </p:nvSpPr>
+        <p:spPr/>
+        <p:txBody>
+          <a:bodyPr/>
+          <a:lstStyle/>
+          <a:p>
+            <a:r>
+              <a:rPr lang="en-US" dirty="0"/>
+              <a:t/>
+            </a:r>
+            <a:endParaRPr lang="en-US" dirty="0"/>
+          </a:p>
+        </p:txBody>
+      </p:sp>
+      <p:sp>
+        <p:nvSpPr>
+          <p:cNvPr id="4" name="Slide Number Placeholder 3"/>
+          <p:cNvSpPr>
+            <a:spLocks noGrp="1"/>
+          </p:cNvSpPr>
+          <p:nvPr>
+            <p:ph type="sldNum" sz="quarter" idx="10"/>
+          </p:nvPr>
+        </p:nvSpPr>
+        <p:spPr/>
+        <p:txBody>
+          <a:bodyPr/>
+          <a:lstStyle/>
+          <a:p>
+            <a:fld id="{F7021451-1387-4CA6-816F-3879F97B5CBC}" type="slidenum">
+              <a:rPr lang="en-US"/>
+              <a:t>19</a:t>
             </a:fld>
             <a:endParaRPr lang="en-US"/>
           </a:p>
@@ -1744,6 +2456,13 @@
 <file path=ppt/slides/slide1.xml><?xml version="1.0" encoding="utf-8"?>
 <p:sld xmlns:a="http://schemas.openxmlformats.org/drawingml/2006/main" xmlns:r="http://schemas.openxmlformats.org/officeDocument/2006/relationships" xmlns:p="http://schemas.openxmlformats.org/presentationml/2006/main">
   <p:cSld name="Slide 1">
+    <p:bg>
+      <p:bgPr>
+        <a:solidFill>
+          <a:srgbClr val="FFFFFF"/>
+        </a:solidFill>
+      </p:bgPr>
+    </p:bg>
     <p:spTree>
       <p:nvGrpSpPr>
         <p:cNvPr id="1" name=""/>
@@ -1760,14 +2479,56 @@
       </p:grpSpPr>
       <p:sp>
         <p:nvSpPr>
-          <p:cNvPr id="2" name="Text 0"/>
-          <p:cNvSpPr/>
-          <p:nvPr/>
-        </p:nvSpPr>
-        <p:spPr>
-          <a:xfrm>
-            <a:off x="548640" y="1828800"/>
-            <a:ext cx="8046720" cy="1097280"/>
+          <p:cNvPr id="2" name="Shape 0"/>
+          <p:cNvSpPr/>
+          <p:nvPr/>
+        </p:nvSpPr>
+        <p:spPr>
+          <a:xfrm>
+            <a:off x="0" y="0"/>
+            <a:ext cx="256032" cy="5148072"/>
+          </a:xfrm>
+          <a:prstGeom prst="rect">
+            <a:avLst/>
+          </a:prstGeom>
+          <a:solidFill>
+            <a:srgbClr val="B45309"/>
+          </a:solidFill>
+          <a:ln/>
+        </p:spPr>
+      </p:sp>
+      <p:sp>
+        <p:nvSpPr>
+          <p:cNvPr id="3" name="Shape 1"/>
+          <p:cNvSpPr/>
+          <p:nvPr/>
+        </p:nvSpPr>
+        <p:spPr>
+          <a:xfrm>
+            <a:off x="256032" y="0"/>
+            <a:ext cx="8887968" cy="109728"/>
+          </a:xfrm>
+          <a:prstGeom prst="rect">
+            <a:avLst/>
+          </a:prstGeom>
+          <a:solidFill>
+            <a:srgbClr val="B45309">
+              <a:alpha val="40000"/>
+            </a:srgbClr>
+          </a:solidFill>
+          <a:ln/>
+        </p:spPr>
+      </p:sp>
+      <p:sp>
+        <p:nvSpPr>
+          <p:cNvPr id="4" name="Text 2"/>
+          <p:cNvSpPr/>
+          <p:nvPr/>
+        </p:nvSpPr>
+        <p:spPr>
+          <a:xfrm>
+            <a:off x="685800" y="1051560"/>
+            <a:ext cx="7863840" cy="365760"/>
           </a:xfrm>
           <a:prstGeom prst="rect">
             <a:avLst/>
@@ -1783,27 +2544,30 @@
               <a:buNone/>
             </a:pPr>
             <a:r>
-              <a:rPr lang="en-US" sz="3200" b="1" dirty="0">
+              <a:rPr lang="en-US" sz="1300" b="1" spc="300" kern="0" dirty="0">
                 <a:solidFill>
                   <a:srgbClr val="B45309"/>
                 </a:solidFill>
-              </a:rPr>
-              <a:t>Introduction to Financial Modeling</a:t>
-            </a:r>
-            <a:endParaRPr lang="en-US" sz="3200" dirty="0"/>
-          </a:p>
-        </p:txBody>
-      </p:sp>
-      <p:sp>
-        <p:nvSpPr>
-          <p:cNvPr id="3" name="Text 1"/>
-          <p:cNvSpPr/>
-          <p:nvPr/>
-        </p:nvSpPr>
-        <p:spPr>
-          <a:xfrm>
-            <a:off x="548640" y="3017520"/>
-            <a:ext cx="8046720" cy="457200"/>
+                <a:latin typeface="Arial" pitchFamily="34" charset="0"/>
+                <a:ea typeface="Arial" pitchFamily="34" charset="-122"/>
+                <a:cs typeface="Arial" pitchFamily="34" charset="-120"/>
+              </a:rPr>
+              <a:t>DAY 1</a:t>
+            </a:r>
+            <a:endParaRPr lang="en-US" sz="1300" dirty="0"/>
+          </a:p>
+        </p:txBody>
+      </p:sp>
+      <p:sp>
+        <p:nvSpPr>
+          <p:cNvPr id="5" name="Text 3"/>
+          <p:cNvSpPr/>
+          <p:nvPr/>
+        </p:nvSpPr>
+        <p:spPr>
+          <a:xfrm>
+            <a:off x="685800" y="1417320"/>
+            <a:ext cx="7863840" cy="1463040"/>
           </a:xfrm>
           <a:prstGeom prst="rect">
             <a:avLst/>
@@ -1819,27 +2583,30 @@
               <a:buNone/>
             </a:pPr>
             <a:r>
-              <a:rPr lang="en-US" sz="1400" dirty="0">
-                <a:solidFill>
-                  <a:srgbClr val="666666"/>
-                </a:solidFill>
-              </a:rPr>
-              <a:t>Lesson Forge Pro (owner)</a:t>
-            </a:r>
-            <a:endParaRPr lang="en-US" sz="1400" dirty="0"/>
-          </a:p>
-        </p:txBody>
-      </p:sp>
-      <p:sp>
-        <p:nvSpPr>
-          <p:cNvPr id="4" name="Text 2"/>
-          <p:cNvSpPr/>
-          <p:nvPr/>
-        </p:nvSpPr>
-        <p:spPr>
-          <a:xfrm>
-            <a:off x="548640" y="4389120"/>
-            <a:ext cx="8046720" cy="548640"/>
+              <a:rPr lang="en-US" sz="3300" b="1" dirty="0">
+                <a:solidFill>
+                  <a:srgbClr val="1C1917"/>
+                </a:solidFill>
+                <a:latin typeface="Arial" pitchFamily="34" charset="0"/>
+                <a:ea typeface="Arial" pitchFamily="34" charset="-122"/>
+                <a:cs typeface="Arial" pitchFamily="34" charset="-120"/>
+              </a:rPr>
+              <a:t>Introduction to Financial Modeling</a:t>
+            </a:r>
+            <a:endParaRPr lang="en-US" sz="3300" dirty="0"/>
+          </a:p>
+        </p:txBody>
+      </p:sp>
+      <p:sp>
+        <p:nvSpPr>
+          <p:cNvPr id="6" name="Text 4"/>
+          <p:cNvSpPr/>
+          <p:nvPr/>
+        </p:nvSpPr>
+        <p:spPr>
+          <a:xfrm>
+            <a:off x="685800" y="2971800"/>
+            <a:ext cx="7863840" cy="411480"/>
           </a:xfrm>
           <a:prstGeom prst="rect">
             <a:avLst/>
@@ -1855,14 +2622,95 @@
               <a:buNone/>
             </a:pPr>
             <a:r>
-              <a:rPr lang="en-US" sz="1000" dirty="0">
-                <a:solidFill>
-                  <a:srgbClr val="888888"/>
-                </a:solidFill>
+              <a:rPr lang="en-US" sz="1400" dirty="0">
+                <a:solidFill>
+                  <a:srgbClr val="78716C"/>
+                </a:solidFill>
+                <a:latin typeface="Arial" pitchFamily="34" charset="0"/>
+                <a:ea typeface="Arial" pitchFamily="34" charset="-122"/>
+                <a:cs typeface="Arial" pitchFamily="34" charset="-120"/>
+              </a:rPr>
+              <a:t>FMVA Certification Prep: Financial Modeling and Valuation Bootcamp</a:t>
+            </a:r>
+            <a:endParaRPr lang="en-US" sz="1400" dirty="0"/>
+          </a:p>
+        </p:txBody>
+      </p:sp>
+      <p:sp>
+        <p:nvSpPr>
+          <p:cNvPr id="7" name="Text 5"/>
+          <p:cNvSpPr/>
+          <p:nvPr/>
+        </p:nvSpPr>
+        <p:spPr>
+          <a:xfrm>
+            <a:off x="685800" y="4343400"/>
+            <a:ext cx="7863840" cy="365760"/>
+          </a:xfrm>
+          <a:prstGeom prst="rect">
+            <a:avLst/>
+          </a:prstGeom>
+          <a:noFill/>
+          <a:ln/>
+        </p:spPr>
+        <p:txBody>
+          <a:bodyPr wrap="square" rtlCol="0" anchor="ctr"/>
+          <a:lstStyle/>
+          <a:p>
+            <a:pPr indent="0" marL="0">
+              <a:buNone/>
+            </a:pPr>
+            <a:r>
+              <a:rPr lang="en-US" sz="1200" b="1" dirty="0">
+                <a:solidFill>
+                  <a:srgbClr val="B45309"/>
+                </a:solidFill>
+                <a:latin typeface="Arial" pitchFamily="34" charset="0"/>
+                <a:ea typeface="Arial" pitchFamily="34" charset="-122"/>
+                <a:cs typeface="Arial" pitchFamily="34" charset="-120"/>
+              </a:rPr>
+              <a:t>Lesson Forge Pro (owner)</a:t>
+            </a:r>
+            <a:endParaRPr lang="en-US" sz="1200" dirty="0"/>
+          </a:p>
+        </p:txBody>
+      </p:sp>
+      <p:sp>
+        <p:nvSpPr>
+          <p:cNvPr id="8" name="Text 6"/>
+          <p:cNvSpPr/>
+          <p:nvPr/>
+        </p:nvSpPr>
+        <p:spPr>
+          <a:xfrm>
+            <a:off x="685800" y="4709160"/>
+            <a:ext cx="7863840" cy="320040"/>
+          </a:xfrm>
+          <a:prstGeom prst="rect">
+            <a:avLst/>
+          </a:prstGeom>
+          <a:noFill/>
+          <a:ln/>
+        </p:spPr>
+        <p:txBody>
+          <a:bodyPr wrap="square" rtlCol="0" anchor="ctr"/>
+          <a:lstStyle/>
+          <a:p>
+            <a:pPr indent="0" marL="0">
+              <a:buNone/>
+            </a:pPr>
+            <a:r>
+              <a:rPr lang="en-US" sz="850" dirty="0">
+                <a:solidFill>
+                  <a:srgbClr val="AAAAAA"/>
+                </a:solidFill>
+                <a:latin typeface="Arial" pitchFamily="34" charset="0"/>
+                <a:ea typeface="Arial" pitchFamily="34" charset="-122"/>
+                <a:cs typeface="Arial" pitchFamily="34" charset="-120"/>
               </a:rPr>
               <a:t>This content is educational material only and does not constitute financial, investment, or trading advice.</a:t>
             </a:r>
-            <a:endParaRPr lang="en-US" sz="1000" dirty="0"/>
+            <a:endParaRPr lang="en-US" sz="850" dirty="0"/>
           </a:p>
         </p:txBody>
       </p:sp>
@@ -1877,6 +2725,13 @@
 <file path=ppt/slides/slide10.xml><?xml version="1.0" encoding="utf-8"?>
 <p:sld xmlns:a="http://schemas.openxmlformats.org/drawingml/2006/main" xmlns:r="http://schemas.openxmlformats.org/officeDocument/2006/relationships" xmlns:p="http://schemas.openxmlformats.org/presentationml/2006/main">
   <p:cSld name="Slide 10">
+    <p:bg>
+      <p:bgPr>
+        <a:solidFill>
+          <a:srgbClr val="FFFFFF"/>
+        </a:solidFill>
+      </p:bgPr>
+    </p:bg>
     <p:spTree>
       <p:nvGrpSpPr>
         <p:cNvPr id="1" name=""/>
@@ -1893,14 +2748,34 @@
       </p:grpSpPr>
       <p:sp>
         <p:nvSpPr>
-          <p:cNvPr id="2" name="Text 0"/>
-          <p:cNvSpPr/>
-          <p:nvPr/>
-        </p:nvSpPr>
-        <p:spPr>
-          <a:xfrm>
-            <a:off x="457200" y="320040"/>
-            <a:ext cx="8229600" cy="731520"/>
+          <p:cNvPr id="2" name="Shape 0"/>
+          <p:cNvSpPr/>
+          <p:nvPr/>
+        </p:nvSpPr>
+        <p:spPr>
+          <a:xfrm>
+            <a:off x="411480" y="402336"/>
+            <a:ext cx="82296" cy="329184"/>
+          </a:xfrm>
+          <a:prstGeom prst="rect">
+            <a:avLst/>
+          </a:prstGeom>
+          <a:solidFill>
+            <a:srgbClr val="B45309"/>
+          </a:solidFill>
+          <a:ln/>
+        </p:spPr>
+      </p:sp>
+      <p:sp>
+        <p:nvSpPr>
+          <p:cNvPr id="3" name="Text 1"/>
+          <p:cNvSpPr/>
+          <p:nvPr/>
+        </p:nvSpPr>
+        <p:spPr>
+          <a:xfrm>
+            <a:off x="566928" y="292608"/>
+            <a:ext cx="8138160" cy="548640"/>
           </a:xfrm>
           <a:prstGeom prst="rect">
             <a:avLst/>
@@ -1916,27 +2791,92 @@
               <a:buNone/>
             </a:pPr>
             <a:r>
-              <a:rPr lang="en-US" sz="2400" b="1" dirty="0">
-                <a:solidFill>
-                  <a:srgbClr val="B45309"/>
-                </a:solidFill>
-              </a:rPr>
-              <a:t>Conclusion and Q&amp;A (1:05-1:25)</a:t>
-            </a:r>
-            <a:endParaRPr lang="en-US" sz="2400" dirty="0"/>
-          </a:p>
-        </p:txBody>
-      </p:sp>
-      <p:sp>
-        <p:nvSpPr>
-          <p:cNvPr id="3" name="Text 1"/>
-          <p:cNvSpPr/>
-          <p:nvPr/>
-        </p:nvSpPr>
-        <p:spPr>
-          <a:xfrm>
-            <a:off x="640080" y="1188720"/>
-            <a:ext cx="7863840" cy="3291840"/>
+              <a:rPr lang="en-US" sz="2100" b="1" dirty="0">
+                <a:solidFill>
+                  <a:srgbClr val="1C1917"/>
+                </a:solidFill>
+                <a:latin typeface="Arial" pitchFamily="34" charset="0"/>
+                <a:ea typeface="Arial" pitchFamily="34" charset="-122"/>
+                <a:cs typeface="Arial" pitchFamily="34" charset="-120"/>
+              </a:rPr>
+              <a:t>The Standard Modeling Procedure</a:t>
+            </a:r>
+            <a:endParaRPr lang="en-US" sz="2100" dirty="0"/>
+          </a:p>
+        </p:txBody>
+      </p:sp>
+      <p:sp>
+        <p:nvSpPr>
+          <p:cNvPr id="4" name="Shape 2"/>
+          <p:cNvSpPr/>
+          <p:nvPr/>
+        </p:nvSpPr>
+        <p:spPr>
+          <a:xfrm>
+            <a:off x="411480" y="960120"/>
+            <a:ext cx="8321040" cy="0"/>
+          </a:xfrm>
+          <a:prstGeom prst="line">
+            <a:avLst/>
+          </a:prstGeom>
+          <a:noFill/>
+          <a:ln w="12700">
+            <a:solidFill>
+              <a:srgbClr val="E7E5E4"/>
+            </a:solidFill>
+            <a:prstDash val="solid"/>
+          </a:ln>
+        </p:spPr>
+      </p:sp>
+      <p:sp>
+        <p:nvSpPr>
+          <p:cNvPr id="5" name="Text 3"/>
+          <p:cNvSpPr/>
+          <p:nvPr/>
+        </p:nvSpPr>
+        <p:spPr>
+          <a:xfrm>
+            <a:off x="411480" y="4864608"/>
+            <a:ext cx="8321040" cy="237744"/>
+          </a:xfrm>
+          <a:prstGeom prst="rect">
+            <a:avLst/>
+          </a:prstGeom>
+          <a:noFill/>
+          <a:ln/>
+        </p:spPr>
+        <p:txBody>
+          <a:bodyPr wrap="square" rtlCol="0" anchor="ctr"/>
+          <a:lstStyle/>
+          <a:p>
+            <a:pPr indent="0" marL="0">
+              <a:buNone/>
+            </a:pPr>
+            <a:r>
+              <a:rPr lang="en-US" sz="750" dirty="0">
+                <a:solidFill>
+                  <a:srgbClr val="AAAAAA"/>
+                </a:solidFill>
+                <a:latin typeface="Arial" pitchFamily="34" charset="0"/>
+                <a:ea typeface="Arial" pitchFamily="34" charset="-122"/>
+                <a:cs typeface="Arial" pitchFamily="34" charset="-120"/>
+              </a:rPr>
+              <a:t>Lesson Forge Pro (owner) — This content is educational material only and does not constitute financial, investment, or trading advice.</a:t>
+            </a:r>
+            <a:endParaRPr lang="en-US" sz="750" dirty="0"/>
+          </a:p>
+        </p:txBody>
+      </p:sp>
+      <p:sp>
+        <p:nvSpPr>
+          <p:cNvPr id="6" name="Text 4"/>
+          <p:cNvSpPr/>
+          <p:nvPr/>
+        </p:nvSpPr>
+        <p:spPr>
+          <a:xfrm>
+            <a:off x="731520" y="1188720"/>
+            <a:ext cx="7680960" cy="2743200"/>
           </a:xfrm>
           <a:prstGeom prst="rect">
             <a:avLst/>
@@ -1948,32 +2888,130 @@
           <a:bodyPr wrap="square" rtlCol="0" anchor="t"/>
           <a:lstStyle/>
           <a:p>
-            <a:pPr marL="342900" indent="-342900">
+            <a:pPr marL="152400" indent="-152400">
+              <a:spcAft>
+                <a:spcPts val="800"/>
+              </a:spcAft>
               <a:buSzPct val="100000"/>
               <a:buChar char="•"/>
             </a:pPr>
             <a:r>
-              <a:rPr lang="en-US" sz="1600" dirty="0">
-                <a:solidFill>
-                  <a:srgbClr val="333333"/>
-                </a:solidFill>
-              </a:rPr>
-              <a:t>Summarize the key points covered in the session and ask learners to reflect on what they have learned. Encourage learners to ask questions and engage in a discu</a:t>
-            </a:r>
-            <a:endParaRPr lang="en-US" sz="1600" dirty="0"/>
-          </a:p>
-        </p:txBody>
-      </p:sp>
-      <p:sp>
-        <p:nvSpPr>
-          <p:cNvPr id="4" name="Text 2"/>
-          <p:cNvSpPr/>
-          <p:nvPr/>
-        </p:nvSpPr>
-        <p:spPr>
-          <a:xfrm>
-            <a:off x="457200" y="4709160"/>
-            <a:ext cx="8229600" cy="320040"/>
+              <a:rPr lang="en-US" sz="1500" dirty="0">
+                <a:solidFill>
+                  <a:srgbClr val="1C1917"/>
+                </a:solidFill>
+                <a:latin typeface="Arial" pitchFamily="34" charset="0"/>
+                <a:ea typeface="Arial" pitchFamily="34" charset="-122"/>
+                <a:cs typeface="Arial" pitchFamily="34" charset="-120"/>
+              </a:rPr>
+              <a:t>Every professional model follows a disciplined, repeatable build sequence.</a:t>
+            </a:r>
+            <a:endParaRPr lang="en-US" sz="1500" dirty="0"/>
+          </a:p>
+          <a:p>
+            <a:pPr marL="152400" indent="-152400">
+              <a:spcAft>
+                <a:spcPts val="800"/>
+              </a:spcAft>
+              <a:buSzPct val="100000"/>
+              <a:buChar char="•"/>
+            </a:pPr>
+            <a:r>
+              <a:rPr lang="en-US" sz="1500" dirty="0">
+                <a:solidFill>
+                  <a:srgbClr val="1C1917"/>
+                </a:solidFill>
+                <a:latin typeface="Arial" pitchFamily="34" charset="0"/>
+                <a:ea typeface="Arial" pitchFamily="34" charset="-122"/>
+                <a:cs typeface="Arial" pitchFamily="34" charset="-120"/>
+              </a:rPr>
+              <a:t>Raw assumptions are transformed into outputs through defined, auditable steps.</a:t>
+            </a:r>
+            <a:endParaRPr lang="en-US" sz="1500" dirty="0"/>
+          </a:p>
+          <a:p>
+            <a:pPr marL="152400" indent="-152400">
+              <a:spcAft>
+                <a:spcPts val="800"/>
+              </a:spcAft>
+              <a:buSzPct val="100000"/>
+              <a:buChar char="•"/>
+            </a:pPr>
+            <a:r>
+              <a:rPr lang="en-US" sz="1500" dirty="0">
+                <a:solidFill>
+                  <a:srgbClr val="1C1917"/>
+                </a:solidFill>
+                <a:latin typeface="Arial" pitchFamily="34" charset="0"/>
+                <a:ea typeface="Arial" pitchFamily="34" charset="-122"/>
+                <a:cs typeface="Arial" pitchFamily="34" charset="-120"/>
+              </a:rPr>
+              <a:t>Inputs, calculations, outputs, and checks each occupy distinct model layers.</a:t>
+            </a:r>
+            <a:endParaRPr lang="en-US" sz="1500" dirty="0"/>
+          </a:p>
+          <a:p>
+            <a:pPr marL="152400" indent="-152400">
+              <a:spcAft>
+                <a:spcPts val="800"/>
+              </a:spcAft>
+              <a:buSzPct val="100000"/>
+              <a:buChar char="•"/>
+            </a:pPr>
+            <a:r>
+              <a:rPr lang="en-US" sz="1500" dirty="0">
+                <a:solidFill>
+                  <a:srgbClr val="1C1917"/>
+                </a:solidFill>
+                <a:latin typeface="Arial" pitchFamily="34" charset="0"/>
+                <a:ea typeface="Arial" pitchFamily="34" charset="-122"/>
+                <a:cs typeface="Arial" pitchFamily="34" charset="-120"/>
+              </a:rPr>
+              <a:t>Mastering this procedure is the foundation of professional modeling practice.</a:t>
+            </a:r>
+            <a:endParaRPr lang="en-US" sz="1500" dirty="0"/>
+          </a:p>
+        </p:txBody>
+      </p:sp>
+      <p:sp>
+        <p:nvSpPr>
+          <p:cNvPr id="7" name="Shape 5"/>
+          <p:cNvSpPr/>
+          <p:nvPr/>
+        </p:nvSpPr>
+        <p:spPr>
+          <a:xfrm>
+            <a:off x="731520" y="4041648"/>
+            <a:ext cx="7680960" cy="566928"/>
+          </a:xfrm>
+          <a:prstGeom prst="roundRect">
+            <a:avLst>
+              <a:gd name="adj" fmla="val 12903"/>
+            </a:avLst>
+          </a:prstGeom>
+          <a:solidFill>
+            <a:srgbClr val="B45309">
+              <a:alpha val="12000"/>
+            </a:srgbClr>
+          </a:solidFill>
+          <a:ln w="12700">
+            <a:solidFill>
+              <a:srgbClr val="B45309"/>
+            </a:solidFill>
+            <a:prstDash val="solid"/>
+          </a:ln>
+        </p:spPr>
+      </p:sp>
+      <p:sp>
+        <p:nvSpPr>
+          <p:cNvPr id="8" name="Text 6"/>
+          <p:cNvSpPr/>
+          <p:nvPr/>
+        </p:nvSpPr>
+        <p:spPr>
+          <a:xfrm>
+            <a:off x="868680" y="4087368"/>
+            <a:ext cx="7406640" cy="475488"/>
           </a:xfrm>
           <a:prstGeom prst="rect">
             <a:avLst/>
@@ -1989,14 +3027,31 @@
               <a:buNone/>
             </a:pPr>
             <a:r>
-              <a:rPr lang="en-US" sz="800" dirty="0">
-                <a:solidFill>
-                  <a:srgbClr val="AAAAAA"/>
-                </a:solidFill>
-              </a:rPr>
-              <a:t>Lesson Forge Pro (owner) — This content is educational material only and does not constitute financial, investment, or trading advice.</a:t>
-            </a:r>
-            <a:endParaRPr lang="en-US" sz="800" dirty="0"/>
+              <a:rPr lang="en-US" sz="1100" b="1" dirty="0">
+                <a:solidFill>
+                  <a:srgbClr val="B45309"/>
+                </a:solidFill>
+                <a:latin typeface="Arial" pitchFamily="34" charset="0"/>
+                <a:ea typeface="Arial" pitchFamily="34" charset="-122"/>
+                <a:cs typeface="Arial" pitchFamily="34" charset="-120"/>
+              </a:rPr>
+              <a:t>Takeaway  </a:t>
+            </a:r>
+            <a:pPr indent="0" marL="0">
+              <a:buNone/>
+            </a:pPr>
+            <a:r>
+              <a:rPr lang="en-US" sz="1150" dirty="0">
+                <a:solidFill>
+                  <a:srgbClr val="1C1917"/>
+                </a:solidFill>
+                <a:latin typeface="Arial" pitchFamily="34" charset="0"/>
+                <a:ea typeface="Arial" pitchFamily="34" charset="-122"/>
+                <a:cs typeface="Arial" pitchFamily="34" charset="-120"/>
+              </a:rPr>
+              <a:t>A repeatable procedure turns financial modeling from art into a reliable, auditable discipline.</a:t>
+            </a:r>
+            <a:endParaRPr lang="en-US" sz="1100" dirty="0"/>
           </a:p>
         </p:txBody>
       </p:sp>
@@ -2011,6 +3066,13 @@
 <file path=ppt/slides/slide11.xml><?xml version="1.0" encoding="utf-8"?>
 <p:sld xmlns:a="http://schemas.openxmlformats.org/drawingml/2006/main" xmlns:r="http://schemas.openxmlformats.org/officeDocument/2006/relationships" xmlns:p="http://schemas.openxmlformats.org/presentationml/2006/main">
   <p:cSld name="Slide 11">
+    <p:bg>
+      <p:bgPr>
+        <a:solidFill>
+          <a:srgbClr val="FFFFFF"/>
+        </a:solidFill>
+      </p:bgPr>
+    </p:bg>
     <p:spTree>
       <p:nvGrpSpPr>
         <p:cNvPr id="1" name=""/>
@@ -2027,14 +3089,34 @@
       </p:grpSpPr>
       <p:sp>
         <p:nvSpPr>
-          <p:cNvPr id="2" name="Text 0"/>
-          <p:cNvSpPr/>
-          <p:nvPr/>
-        </p:nvSpPr>
-        <p:spPr>
-          <a:xfrm>
-            <a:off x="457200" y="320040"/>
-            <a:ext cx="8229600" cy="731520"/>
+          <p:cNvPr id="2" name="Shape 0"/>
+          <p:cNvSpPr/>
+          <p:nvPr/>
+        </p:nvSpPr>
+        <p:spPr>
+          <a:xfrm>
+            <a:off x="411480" y="384048"/>
+            <a:ext cx="82296" cy="310896"/>
+          </a:xfrm>
+          <a:prstGeom prst="rect">
+            <a:avLst/>
+          </a:prstGeom>
+          <a:solidFill>
+            <a:srgbClr val="B45309"/>
+          </a:solidFill>
+          <a:ln/>
+        </p:spPr>
+      </p:sp>
+      <p:sp>
+        <p:nvSpPr>
+          <p:cNvPr id="3" name="Text 1"/>
+          <p:cNvSpPr/>
+          <p:nvPr/>
+        </p:nvSpPr>
+        <p:spPr>
+          <a:xfrm>
+            <a:off x="566928" y="292608"/>
+            <a:ext cx="8138160" cy="502920"/>
           </a:xfrm>
           <a:prstGeom prst="rect">
             <a:avLst/>
@@ -2050,51 +3132,17 @@
               <a:buNone/>
             </a:pPr>
             <a:r>
-              <a:rPr lang="en-US" sz="2400" b="1" dirty="0">
-                <a:solidFill>
-                  <a:srgbClr val="B45309"/>
-                </a:solidFill>
-              </a:rPr>
-              <a:t>Final Thoughts and Next Steps (1:25-1:30)</a:t>
-            </a:r>
-            <a:endParaRPr lang="en-US" sz="2400" dirty="0"/>
-          </a:p>
-        </p:txBody>
-      </p:sp>
-      <p:sp>
-        <p:nvSpPr>
-          <p:cNvPr id="3" name="Text 1"/>
-          <p:cNvSpPr/>
-          <p:nvPr/>
-        </p:nvSpPr>
-        <p:spPr>
-          <a:xfrm>
-            <a:off x="640080" y="1188720"/>
-            <a:ext cx="7863840" cy="3291840"/>
-          </a:xfrm>
-          <a:prstGeom prst="rect">
-            <a:avLst/>
-          </a:prstGeom>
-          <a:noFill/>
-          <a:ln/>
-        </p:spPr>
-        <p:txBody>
-          <a:bodyPr wrap="square" rtlCol="0" anchor="t"/>
-          <a:lstStyle/>
-          <a:p>
-            <a:pPr marL="342900" indent="-342900">
-              <a:buSzPct val="100000"/>
-              <a:buChar char="•"/>
-            </a:pPr>
-            <a:r>
-              <a:rPr lang="en-US" sz="1600" dirty="0">
-                <a:solidFill>
-                  <a:srgbClr val="333333"/>
-                </a:solidFill>
-              </a:rPr>
-              <a:t>Provide learners with additional resources for further learning, such as books or online courses. Encourage learners to practice building their own financial mo</a:t>
-            </a:r>
-            <a:endParaRPr lang="en-US" sz="1600" dirty="0"/>
+              <a:rPr lang="en-US" sz="2000" b="1" dirty="0">
+                <a:solidFill>
+                  <a:srgbClr val="1C1917"/>
+                </a:solidFill>
+                <a:latin typeface="Arial" pitchFamily="34" charset="0"/>
+                <a:ea typeface="Arial" pitchFamily="34" charset="-122"/>
+                <a:cs typeface="Arial" pitchFamily="34" charset="-120"/>
+              </a:rPr>
+              <a:t>Revenue Sensitivity: Growth Rate Impact</a:t>
+            </a:r>
+            <a:endParaRPr lang="en-US" sz="2000" dirty="0"/>
           </a:p>
         </p:txBody>
       </p:sp>
@@ -2106,8 +3154,8 @@
         </p:nvSpPr>
         <p:spPr>
           <a:xfrm>
-            <a:off x="457200" y="4709160"/>
-            <a:ext cx="8229600" cy="320040"/>
+            <a:off x="566928" y="4681728"/>
+            <a:ext cx="8138160" cy="320040"/>
           </a:xfrm>
           <a:prstGeom prst="rect">
             <a:avLst/>
@@ -2123,14 +3171,373 @@
               <a:buNone/>
             </a:pPr>
             <a:r>
-              <a:rPr lang="en-US" sz="800" dirty="0">
+              <a:rPr lang="en-US" sz="1000" i="1" dirty="0">
+                <a:solidFill>
+                  <a:srgbClr val="78716C"/>
+                </a:solidFill>
+                <a:latin typeface="Arial" pitchFamily="34" charset="0"/>
+                <a:ea typeface="Arial" pitchFamily="34" charset="-122"/>
+                <a:cs typeface="Arial" pitchFamily="34" charset="-120"/>
+              </a:rPr>
+              <a:t>$70K spread across scenarios proves growth rate is the primary model driver</a:t>
+            </a:r>
+            <a:endParaRPr lang="en-US" sz="1000" dirty="0"/>
+          </a:p>
+        </p:txBody>
+      </p:sp>
+      <p:sp>
+        <p:nvSpPr>
+          <p:cNvPr id="5" name="Text 3"/>
+          <p:cNvSpPr/>
+          <p:nvPr/>
+        </p:nvSpPr>
+        <p:spPr>
+          <a:xfrm>
+            <a:off x="411480" y="4919472"/>
+            <a:ext cx="8321040" cy="219456"/>
+          </a:xfrm>
+          <a:prstGeom prst="rect">
+            <a:avLst/>
+          </a:prstGeom>
+          <a:noFill/>
+          <a:ln/>
+        </p:spPr>
+        <p:txBody>
+          <a:bodyPr wrap="square" rtlCol="0" anchor="ctr"/>
+          <a:lstStyle/>
+          <a:p>
+            <a:pPr indent="0" marL="0">
+              <a:buNone/>
+            </a:pPr>
+            <a:r>
+              <a:rPr lang="en-US" sz="750" dirty="0">
                 <a:solidFill>
                   <a:srgbClr val="AAAAAA"/>
                 </a:solidFill>
+                <a:latin typeface="Arial" pitchFamily="34" charset="0"/>
+                <a:ea typeface="Arial" pitchFamily="34" charset="-122"/>
+                <a:cs typeface="Arial" pitchFamily="34" charset="-120"/>
               </a:rPr>
               <a:t>Lesson Forge Pro (owner) — This content is educational material only and does not constitute financial, investment, or trading advice.</a:t>
             </a:r>
-            <a:endParaRPr lang="en-US" sz="800" dirty="0"/>
+            <a:endParaRPr lang="en-US" sz="750" dirty="0"/>
+          </a:p>
+        </p:txBody>
+      </p:sp>
+      <p:sp>
+        <p:nvSpPr>
+          <p:cNvPr id="6" name="Shape 4"/>
+          <p:cNvSpPr/>
+          <p:nvPr/>
+        </p:nvSpPr>
+        <p:spPr>
+          <a:xfrm>
+            <a:off x="685800" y="4206240"/>
+            <a:ext cx="7772400" cy="0"/>
+          </a:xfrm>
+          <a:prstGeom prst="line">
+            <a:avLst/>
+          </a:prstGeom>
+          <a:noFill/>
+          <a:ln w="12700">
+            <a:solidFill>
+              <a:srgbClr val="1C1917"/>
+            </a:solidFill>
+            <a:prstDash val="solid"/>
+          </a:ln>
+        </p:spPr>
+      </p:sp>
+      <p:sp>
+        <p:nvSpPr>
+          <p:cNvPr id="7" name="Shape 5"/>
+          <p:cNvSpPr/>
+          <p:nvPr/>
+        </p:nvSpPr>
+        <p:spPr>
+          <a:xfrm>
+            <a:off x="1684020" y="1587902"/>
+            <a:ext cx="777240" cy="2618338"/>
+          </a:xfrm>
+          <a:prstGeom prst="rect">
+            <a:avLst/>
+          </a:prstGeom>
+          <a:solidFill>
+            <a:srgbClr val="B45309"/>
+          </a:solidFill>
+          <a:ln/>
+        </p:spPr>
+      </p:sp>
+      <p:sp>
+        <p:nvSpPr>
+          <p:cNvPr id="8" name="Text 6"/>
+          <p:cNvSpPr/>
+          <p:nvPr/>
+        </p:nvSpPr>
+        <p:spPr>
+          <a:xfrm>
+            <a:off x="1501140" y="1313582"/>
+            <a:ext cx="1143000" cy="237744"/>
+          </a:xfrm>
+          <a:prstGeom prst="rect">
+            <a:avLst/>
+          </a:prstGeom>
+          <a:noFill/>
+          <a:ln/>
+        </p:spPr>
+        <p:txBody>
+          <a:bodyPr wrap="square" rtlCol="0" anchor="ctr"/>
+          <a:lstStyle/>
+          <a:p>
+            <a:pPr algn="ctr" indent="0" marL="0">
+              <a:buNone/>
+            </a:pPr>
+            <a:r>
+              <a:rPr lang="en-US" sz="950" b="1" dirty="0">
+                <a:solidFill>
+                  <a:srgbClr val="1C1917"/>
+                </a:solidFill>
+                <a:latin typeface="Arial" pitchFamily="34" charset="0"/>
+                <a:ea typeface="Arial" pitchFamily="34" charset="-122"/>
+                <a:cs typeface="Arial" pitchFamily="34" charset="-120"/>
+              </a:rPr>
+              <a:t>595508</a:t>
+            </a:r>
+            <a:endParaRPr lang="en-US" sz="950" dirty="0"/>
+          </a:p>
+        </p:txBody>
+      </p:sp>
+      <p:sp>
+        <p:nvSpPr>
+          <p:cNvPr id="9" name="Text 7"/>
+          <p:cNvSpPr/>
+          <p:nvPr/>
+        </p:nvSpPr>
+        <p:spPr>
+          <a:xfrm>
+            <a:off x="1455420" y="4315968"/>
+            <a:ext cx="1234440" cy="502920"/>
+          </a:xfrm>
+          <a:prstGeom prst="rect">
+            <a:avLst/>
+          </a:prstGeom>
+          <a:noFill/>
+          <a:ln/>
+        </p:spPr>
+        <p:txBody>
+          <a:bodyPr wrap="square" rtlCol="0" anchor="ctr"/>
+          <a:lstStyle/>
+          <a:p>
+            <a:pPr algn="ctr" indent="0" marL="0">
+              <a:buNone/>
+            </a:pPr>
+            <a:r>
+              <a:rPr lang="en-US" sz="850" dirty="0">
+                <a:solidFill>
+                  <a:srgbClr val="78716C"/>
+                </a:solidFill>
+                <a:latin typeface="Arial" pitchFamily="34" charset="0"/>
+                <a:ea typeface="Arial" pitchFamily="34" charset="-122"/>
+                <a:cs typeface="Arial" pitchFamily="34" charset="-120"/>
+              </a:rPr>
+              <a:t>6% Growth</a:t>
+            </a:r>
+            <a:endParaRPr lang="en-US" sz="850" dirty="0"/>
+          </a:p>
+        </p:txBody>
+      </p:sp>
+      <p:sp>
+        <p:nvSpPr>
+          <p:cNvPr id="10" name="Shape 8"/>
+          <p:cNvSpPr/>
+          <p:nvPr/>
+        </p:nvSpPr>
+        <p:spPr>
+          <a:xfrm>
+            <a:off x="4183380" y="1436880"/>
+            <a:ext cx="777240" cy="2769360"/>
+          </a:xfrm>
+          <a:prstGeom prst="rect">
+            <a:avLst/>
+          </a:prstGeom>
+          <a:solidFill>
+            <a:srgbClr val="B45309"/>
+          </a:solidFill>
+          <a:ln/>
+        </p:spPr>
+      </p:sp>
+      <p:sp>
+        <p:nvSpPr>
+          <p:cNvPr id="11" name="Text 9"/>
+          <p:cNvSpPr/>
+          <p:nvPr/>
+        </p:nvSpPr>
+        <p:spPr>
+          <a:xfrm>
+            <a:off x="4000500" y="1162560"/>
+            <a:ext cx="1143000" cy="237744"/>
+          </a:xfrm>
+          <a:prstGeom prst="rect">
+            <a:avLst/>
+          </a:prstGeom>
+          <a:noFill/>
+          <a:ln/>
+        </p:spPr>
+        <p:txBody>
+          <a:bodyPr wrap="square" rtlCol="0" anchor="ctr"/>
+          <a:lstStyle/>
+          <a:p>
+            <a:pPr algn="ctr" indent="0" marL="0">
+              <a:buNone/>
+            </a:pPr>
+            <a:r>
+              <a:rPr lang="en-US" sz="950" b="1" dirty="0">
+                <a:solidFill>
+                  <a:srgbClr val="1C1917"/>
+                </a:solidFill>
+                <a:latin typeface="Arial" pitchFamily="34" charset="0"/>
+                <a:ea typeface="Arial" pitchFamily="34" charset="-122"/>
+                <a:cs typeface="Arial" pitchFamily="34" charset="-120"/>
+              </a:rPr>
+              <a:t>629856</a:t>
+            </a:r>
+            <a:endParaRPr lang="en-US" sz="950" dirty="0"/>
+          </a:p>
+        </p:txBody>
+      </p:sp>
+      <p:sp>
+        <p:nvSpPr>
+          <p:cNvPr id="12" name="Text 10"/>
+          <p:cNvSpPr/>
+          <p:nvPr/>
+        </p:nvSpPr>
+        <p:spPr>
+          <a:xfrm>
+            <a:off x="3954780" y="4315968"/>
+            <a:ext cx="1234440" cy="502920"/>
+          </a:xfrm>
+          <a:prstGeom prst="rect">
+            <a:avLst/>
+          </a:prstGeom>
+          <a:noFill/>
+          <a:ln/>
+        </p:spPr>
+        <p:txBody>
+          <a:bodyPr wrap="square" rtlCol="0" anchor="ctr"/>
+          <a:lstStyle/>
+          <a:p>
+            <a:pPr algn="ctr" indent="0" marL="0">
+              <a:buNone/>
+            </a:pPr>
+            <a:r>
+              <a:rPr lang="en-US" sz="850" dirty="0">
+                <a:solidFill>
+                  <a:srgbClr val="78716C"/>
+                </a:solidFill>
+                <a:latin typeface="Arial" pitchFamily="34" charset="0"/>
+                <a:ea typeface="Arial" pitchFamily="34" charset="-122"/>
+                <a:cs typeface="Arial" pitchFamily="34" charset="-120"/>
+              </a:rPr>
+              <a:t>8% Base Case</a:t>
+            </a:r>
+            <a:endParaRPr lang="en-US" sz="850" dirty="0"/>
+          </a:p>
+        </p:txBody>
+      </p:sp>
+      <p:sp>
+        <p:nvSpPr>
+          <p:cNvPr id="13" name="Shape 11"/>
+          <p:cNvSpPr/>
+          <p:nvPr/>
+        </p:nvSpPr>
+        <p:spPr>
+          <a:xfrm>
+            <a:off x="6682740" y="1280160"/>
+            <a:ext cx="777240" cy="2926080"/>
+          </a:xfrm>
+          <a:prstGeom prst="rect">
+            <a:avLst/>
+          </a:prstGeom>
+          <a:solidFill>
+            <a:srgbClr val="B45309"/>
+          </a:solidFill>
+          <a:ln/>
+        </p:spPr>
+      </p:sp>
+      <p:sp>
+        <p:nvSpPr>
+          <p:cNvPr id="14" name="Text 12"/>
+          <p:cNvSpPr/>
+          <p:nvPr/>
+        </p:nvSpPr>
+        <p:spPr>
+          <a:xfrm>
+            <a:off x="6499860" y="1005840"/>
+            <a:ext cx="1143000" cy="237744"/>
+          </a:xfrm>
+          <a:prstGeom prst="rect">
+            <a:avLst/>
+          </a:prstGeom>
+          <a:noFill/>
+          <a:ln/>
+        </p:spPr>
+        <p:txBody>
+          <a:bodyPr wrap="square" rtlCol="0" anchor="ctr"/>
+          <a:lstStyle/>
+          <a:p>
+            <a:pPr algn="ctr" indent="0" marL="0">
+              <a:buNone/>
+            </a:pPr>
+            <a:r>
+              <a:rPr lang="en-US" sz="950" b="1" dirty="0">
+                <a:solidFill>
+                  <a:srgbClr val="1C1917"/>
+                </a:solidFill>
+                <a:latin typeface="Arial" pitchFamily="34" charset="0"/>
+                <a:ea typeface="Arial" pitchFamily="34" charset="-122"/>
+                <a:cs typeface="Arial" pitchFamily="34" charset="-120"/>
+              </a:rPr>
+              <a:t>665500</a:t>
+            </a:r>
+            <a:endParaRPr lang="en-US" sz="950" dirty="0"/>
+          </a:p>
+        </p:txBody>
+      </p:sp>
+      <p:sp>
+        <p:nvSpPr>
+          <p:cNvPr id="15" name="Text 13"/>
+          <p:cNvSpPr/>
+          <p:nvPr/>
+        </p:nvSpPr>
+        <p:spPr>
+          <a:xfrm>
+            <a:off x="6454140" y="4315968"/>
+            <a:ext cx="1234440" cy="502920"/>
+          </a:xfrm>
+          <a:prstGeom prst="rect">
+            <a:avLst/>
+          </a:prstGeom>
+          <a:noFill/>
+          <a:ln/>
+        </p:spPr>
+        <p:txBody>
+          <a:bodyPr wrap="square" rtlCol="0" anchor="ctr"/>
+          <a:lstStyle/>
+          <a:p>
+            <a:pPr algn="ctr" indent="0" marL="0">
+              <a:buNone/>
+            </a:pPr>
+            <a:r>
+              <a:rPr lang="en-US" sz="850" dirty="0">
+                <a:solidFill>
+                  <a:srgbClr val="78716C"/>
+                </a:solidFill>
+                <a:latin typeface="Arial" pitchFamily="34" charset="0"/>
+                <a:ea typeface="Arial" pitchFamily="34" charset="-122"/>
+                <a:cs typeface="Arial" pitchFamily="34" charset="-120"/>
+              </a:rPr>
+              <a:t>10% Growth</a:t>
+            </a:r>
+            <a:endParaRPr lang="en-US" sz="850" dirty="0"/>
           </a:p>
         </p:txBody>
       </p:sp>
@@ -2142,9 +3549,16 @@
 </p:sld>
 </file>
 
-<file path=ppt/slides/slide2.xml><?xml version="1.0" encoding="utf-8"?>
+<file path=ppt/slides/slide12.xml><?xml version="1.0" encoding="utf-8"?>
 <p:sld xmlns:a="http://schemas.openxmlformats.org/drawingml/2006/main" xmlns:r="http://schemas.openxmlformats.org/officeDocument/2006/relationships" xmlns:p="http://schemas.openxmlformats.org/presentationml/2006/main">
-  <p:cSld name="Slide 2">
+  <p:cSld name="Slide 12">
+    <p:bg>
+      <p:bgPr>
+        <a:solidFill>
+          <a:srgbClr val="FFFFFF"/>
+        </a:solidFill>
+      </p:bgPr>
+    </p:bg>
     <p:spTree>
       <p:nvGrpSpPr>
         <p:cNvPr id="1" name=""/>
@@ -2161,14 +3575,34 @@
       </p:grpSpPr>
       <p:sp>
         <p:nvSpPr>
-          <p:cNvPr id="2" name="Text 0"/>
-          <p:cNvSpPr/>
-          <p:nvPr/>
-        </p:nvSpPr>
-        <p:spPr>
-          <a:xfrm>
-            <a:off x="457200" y="320040"/>
-            <a:ext cx="8229600" cy="731520"/>
+          <p:cNvPr id="2" name="Shape 0"/>
+          <p:cNvSpPr/>
+          <p:nvPr/>
+        </p:nvSpPr>
+        <p:spPr>
+          <a:xfrm>
+            <a:off x="411480" y="402336"/>
+            <a:ext cx="82296" cy="329184"/>
+          </a:xfrm>
+          <a:prstGeom prst="rect">
+            <a:avLst/>
+          </a:prstGeom>
+          <a:solidFill>
+            <a:srgbClr val="B45309"/>
+          </a:solidFill>
+          <a:ln/>
+        </p:spPr>
+      </p:sp>
+      <p:sp>
+        <p:nvSpPr>
+          <p:cNvPr id="3" name="Text 1"/>
+          <p:cNvSpPr/>
+          <p:nvPr/>
+        </p:nvSpPr>
+        <p:spPr>
+          <a:xfrm>
+            <a:off x="566928" y="292608"/>
+            <a:ext cx="8138160" cy="548640"/>
           </a:xfrm>
           <a:prstGeom prst="rect">
             <a:avLst/>
@@ -2184,27 +3618,53 @@
               <a:buNone/>
             </a:pPr>
             <a:r>
-              <a:rPr lang="en-US" sz="2400" b="1" dirty="0">
-                <a:solidFill>
-                  <a:srgbClr val="B45309"/>
-                </a:solidFill>
-              </a:rPr>
-              <a:t>Introduction to Financial Modeling</a:t>
-            </a:r>
-            <a:endParaRPr lang="en-US" sz="2400" dirty="0"/>
-          </a:p>
-        </p:txBody>
-      </p:sp>
-      <p:sp>
-        <p:nvSpPr>
-          <p:cNvPr id="3" name="Text 1"/>
-          <p:cNvSpPr/>
-          <p:nvPr/>
-        </p:nvSpPr>
-        <p:spPr>
-          <a:xfrm>
-            <a:off x="457200" y="4709160"/>
-            <a:ext cx="8229600" cy="320040"/>
+              <a:rPr lang="en-US" sz="2100" b="1" dirty="0">
+                <a:solidFill>
+                  <a:srgbClr val="1C1917"/>
+                </a:solidFill>
+                <a:latin typeface="Arial" pitchFamily="34" charset="0"/>
+                <a:ea typeface="Arial" pitchFamily="34" charset="-122"/>
+                <a:cs typeface="Arial" pitchFamily="34" charset="-120"/>
+              </a:rPr>
+              <a:t>Inputs</a:t>
+            </a:r>
+            <a:endParaRPr lang="en-US" sz="2100" dirty="0"/>
+          </a:p>
+        </p:txBody>
+      </p:sp>
+      <p:sp>
+        <p:nvSpPr>
+          <p:cNvPr id="4" name="Shape 2"/>
+          <p:cNvSpPr/>
+          <p:nvPr/>
+        </p:nvSpPr>
+        <p:spPr>
+          <a:xfrm>
+            <a:off x="411480" y="960120"/>
+            <a:ext cx="8321040" cy="0"/>
+          </a:xfrm>
+          <a:prstGeom prst="line">
+            <a:avLst/>
+          </a:prstGeom>
+          <a:noFill/>
+          <a:ln w="12700">
+            <a:solidFill>
+              <a:srgbClr val="E7E5E4"/>
+            </a:solidFill>
+            <a:prstDash val="solid"/>
+          </a:ln>
+        </p:spPr>
+      </p:sp>
+      <p:sp>
+        <p:nvSpPr>
+          <p:cNvPr id="5" name="Text 3"/>
+          <p:cNvSpPr/>
+          <p:nvPr/>
+        </p:nvSpPr>
+        <p:spPr>
+          <a:xfrm>
+            <a:off x="411480" y="4864608"/>
+            <a:ext cx="8321040" cy="237744"/>
           </a:xfrm>
           <a:prstGeom prst="rect">
             <a:avLst/>
@@ -2220,14 +3680,205 @@
               <a:buNone/>
             </a:pPr>
             <a:r>
-              <a:rPr lang="en-US" sz="800" dirty="0">
+              <a:rPr lang="en-US" sz="750" dirty="0">
                 <a:solidFill>
                   <a:srgbClr val="AAAAAA"/>
                 </a:solidFill>
+                <a:latin typeface="Arial" pitchFamily="34" charset="0"/>
+                <a:ea typeface="Arial" pitchFamily="34" charset="-122"/>
+                <a:cs typeface="Arial" pitchFamily="34" charset="-120"/>
               </a:rPr>
               <a:t>Lesson Forge Pro (owner) — This content is educational material only and does not constitute financial, investment, or trading advice.</a:t>
             </a:r>
-            <a:endParaRPr lang="en-US" sz="800" dirty="0"/>
+            <a:endParaRPr lang="en-US" sz="750" dirty="0"/>
+          </a:p>
+        </p:txBody>
+      </p:sp>
+      <p:sp>
+        <p:nvSpPr>
+          <p:cNvPr id="6" name="Text 4"/>
+          <p:cNvSpPr/>
+          <p:nvPr/>
+        </p:nvSpPr>
+        <p:spPr>
+          <a:xfrm>
+            <a:off x="731520" y="1188720"/>
+            <a:ext cx="7680960" cy="2743200"/>
+          </a:xfrm>
+          <a:prstGeom prst="rect">
+            <a:avLst/>
+          </a:prstGeom>
+          <a:noFill/>
+          <a:ln/>
+        </p:spPr>
+        <p:txBody>
+          <a:bodyPr wrap="square" rtlCol="0" anchor="t"/>
+          <a:lstStyle/>
+          <a:p>
+            <a:pPr marL="152400" indent="-152400">
+              <a:spcAft>
+                <a:spcPts val="800"/>
+              </a:spcAft>
+              <a:buSzPct val="100000"/>
+              <a:buChar char="•"/>
+            </a:pPr>
+            <a:r>
+              <a:rPr lang="en-US" sz="1500" dirty="0">
+                <a:solidFill>
+                  <a:srgbClr val="1C1917"/>
+                </a:solidFill>
+                <a:latin typeface="Arial" pitchFamily="34" charset="0"/>
+                <a:ea typeface="Arial" pitchFamily="34" charset="-122"/>
+                <a:cs typeface="Arial" pitchFamily="34" charset="-120"/>
+              </a:rPr>
+              <a:t>Hard-coded assumptions include growth rates, tax rates, and capital expenditure figures.</a:t>
+            </a:r>
+            <a:endParaRPr lang="en-US" sz="1500" dirty="0"/>
+          </a:p>
+          <a:p>
+            <a:pPr marL="152400" indent="-152400">
+              <a:spcAft>
+                <a:spcPts val="800"/>
+              </a:spcAft>
+              <a:buSzPct val="100000"/>
+              <a:buChar char="•"/>
+            </a:pPr>
+            <a:r>
+              <a:rPr lang="en-US" sz="1500" dirty="0">
+                <a:solidFill>
+                  <a:srgbClr val="1C1917"/>
+                </a:solidFill>
+                <a:latin typeface="Arial" pitchFamily="34" charset="0"/>
+                <a:ea typeface="Arial" pitchFamily="34" charset="-122"/>
+                <a:cs typeface="Arial" pitchFamily="34" charset="-120"/>
+              </a:rPr>
+              <a:t>Linked data pulls in historical statements or market prices dynamically.</a:t>
+            </a:r>
+            <a:endParaRPr lang="en-US" sz="1500" dirty="0"/>
+          </a:p>
+          <a:p>
+            <a:pPr marL="152400" indent="-152400">
+              <a:spcAft>
+                <a:spcPts val="800"/>
+              </a:spcAft>
+              <a:buSzPct val="100000"/>
+              <a:buChar char="•"/>
+            </a:pPr>
+            <a:r>
+              <a:rPr lang="en-US" sz="1500" dirty="0">
+                <a:solidFill>
+                  <a:srgbClr val="1C1917"/>
+                </a:solidFill>
+                <a:latin typeface="Arial" pitchFamily="34" charset="0"/>
+                <a:ea typeface="Arial" pitchFamily="34" charset="-122"/>
+                <a:cs typeface="Arial" pitchFamily="34" charset="-120"/>
+              </a:rPr>
+              <a:t>Inputs must never be buried inside formulas—every assumption must be instantly locatable.</a:t>
+            </a:r>
+            <a:endParaRPr lang="en-US" sz="1500" dirty="0"/>
+          </a:p>
+          <a:p>
+            <a:pPr marL="152400" indent="-152400">
+              <a:spcAft>
+                <a:spcPts val="800"/>
+              </a:spcAft>
+              <a:buSzPct val="100000"/>
+              <a:buChar char="•"/>
+            </a:pPr>
+            <a:r>
+              <a:rPr lang="en-US" sz="1500" dirty="0">
+                <a:solidFill>
+                  <a:srgbClr val="1C1917"/>
+                </a:solidFill>
+                <a:latin typeface="Arial" pitchFamily="34" charset="0"/>
+                <a:ea typeface="Arial" pitchFamily="34" charset="-122"/>
+                <a:cs typeface="Arial" pitchFamily="34" charset="-120"/>
+              </a:rPr>
+              <a:t>Blue font color-coding is the widely adopted standard for marking inputs.</a:t>
+            </a:r>
+            <a:endParaRPr lang="en-US" sz="1500" dirty="0"/>
+          </a:p>
+        </p:txBody>
+      </p:sp>
+      <p:sp>
+        <p:nvSpPr>
+          <p:cNvPr id="7" name="Shape 5"/>
+          <p:cNvSpPr/>
+          <p:nvPr/>
+        </p:nvSpPr>
+        <p:spPr>
+          <a:xfrm>
+            <a:off x="731520" y="4041648"/>
+            <a:ext cx="7680960" cy="566928"/>
+          </a:xfrm>
+          <a:prstGeom prst="roundRect">
+            <a:avLst>
+              <a:gd name="adj" fmla="val 12903"/>
+            </a:avLst>
+          </a:prstGeom>
+          <a:solidFill>
+            <a:srgbClr val="B45309">
+              <a:alpha val="12000"/>
+            </a:srgbClr>
+          </a:solidFill>
+          <a:ln w="12700">
+            <a:solidFill>
+              <a:srgbClr val="B45309"/>
+            </a:solidFill>
+            <a:prstDash val="solid"/>
+          </a:ln>
+        </p:spPr>
+      </p:sp>
+      <p:sp>
+        <p:nvSpPr>
+          <p:cNvPr id="8" name="Text 6"/>
+          <p:cNvSpPr/>
+          <p:nvPr/>
+        </p:nvSpPr>
+        <p:spPr>
+          <a:xfrm>
+            <a:off x="868680" y="4087368"/>
+            <a:ext cx="7406640" cy="475488"/>
+          </a:xfrm>
+          <a:prstGeom prst="rect">
+            <a:avLst/>
+          </a:prstGeom>
+          <a:noFill/>
+          <a:ln/>
+        </p:spPr>
+        <p:txBody>
+          <a:bodyPr wrap="square" rtlCol="0" anchor="ctr"/>
+          <a:lstStyle/>
+          <a:p>
+            <a:pPr indent="0" marL="0">
+              <a:buNone/>
+            </a:pPr>
+            <a:r>
+              <a:rPr lang="en-US" sz="1100" b="1" dirty="0">
+                <a:solidFill>
+                  <a:srgbClr val="B45309"/>
+                </a:solidFill>
+                <a:latin typeface="Arial" pitchFamily="34" charset="0"/>
+                <a:ea typeface="Arial" pitchFamily="34" charset="-122"/>
+                <a:cs typeface="Arial" pitchFamily="34" charset="-120"/>
+              </a:rPr>
+              <a:t>Takeaway  </a:t>
+            </a:r>
+            <a:pPr indent="0" marL="0">
+              <a:buNone/>
+            </a:pPr>
+            <a:r>
+              <a:rPr lang="en-US" sz="1150" dirty="0">
+                <a:solidFill>
+                  <a:srgbClr val="1C1917"/>
+                </a:solidFill>
+                <a:latin typeface="Arial" pitchFamily="34" charset="0"/>
+                <a:ea typeface="Arial" pitchFamily="34" charset="-122"/>
+                <a:cs typeface="Arial" pitchFamily="34" charset="-120"/>
+              </a:rPr>
+              <a:t>Visible, isolated inputs are the single most important structural feature of a trustworthy model.</a:t>
+            </a:r>
+            <a:endParaRPr lang="en-US" sz="1100" dirty="0"/>
           </a:p>
         </p:txBody>
       </p:sp>
@@ -2239,9 +3890,16 @@
 </p:sld>
 </file>
 
-<file path=ppt/slides/slide3.xml><?xml version="1.0" encoding="utf-8"?>
+<file path=ppt/slides/slide13.xml><?xml version="1.0" encoding="utf-8"?>
 <p:sld xmlns:a="http://schemas.openxmlformats.org/drawingml/2006/main" xmlns:r="http://schemas.openxmlformats.org/officeDocument/2006/relationships" xmlns:p="http://schemas.openxmlformats.org/presentationml/2006/main">
-  <p:cSld name="Slide 3">
+  <p:cSld name="Slide 13">
+    <p:bg>
+      <p:bgPr>
+        <a:solidFill>
+          <a:srgbClr val="FFFFFF"/>
+        </a:solidFill>
+      </p:bgPr>
+    </p:bg>
     <p:spTree>
       <p:nvGrpSpPr>
         <p:cNvPr id="1" name=""/>
@@ -2258,14 +3916,34 @@
       </p:grpSpPr>
       <p:sp>
         <p:nvSpPr>
-          <p:cNvPr id="2" name="Text 0"/>
-          <p:cNvSpPr/>
-          <p:nvPr/>
-        </p:nvSpPr>
-        <p:spPr>
-          <a:xfrm>
-            <a:off x="457200" y="320040"/>
-            <a:ext cx="8229600" cy="731520"/>
+          <p:cNvPr id="2" name="Shape 0"/>
+          <p:cNvSpPr/>
+          <p:nvPr/>
+        </p:nvSpPr>
+        <p:spPr>
+          <a:xfrm>
+            <a:off x="411480" y="402336"/>
+            <a:ext cx="82296" cy="329184"/>
+          </a:xfrm>
+          <a:prstGeom prst="rect">
+            <a:avLst/>
+          </a:prstGeom>
+          <a:solidFill>
+            <a:srgbClr val="B45309"/>
+          </a:solidFill>
+          <a:ln/>
+        </p:spPr>
+      </p:sp>
+      <p:sp>
+        <p:nvSpPr>
+          <p:cNvPr id="3" name="Text 1"/>
+          <p:cNvSpPr/>
+          <p:nvPr/>
+        </p:nvSpPr>
+        <p:spPr>
+          <a:xfrm>
+            <a:off x="566928" y="292608"/>
+            <a:ext cx="8138160" cy="548640"/>
           </a:xfrm>
           <a:prstGeom prst="rect">
             <a:avLst/>
@@ -2281,27 +3959,92 @@
               <a:buNone/>
             </a:pPr>
             <a:r>
-              <a:rPr lang="en-US" sz="2400" b="1" dirty="0">
-                <a:solidFill>
-                  <a:srgbClr val="B45309"/>
-                </a:solidFill>
-              </a:rPr>
-              <a:t>Session Overview</a:t>
-            </a:r>
-            <a:endParaRPr lang="en-US" sz="2400" dirty="0"/>
-          </a:p>
-        </p:txBody>
-      </p:sp>
-      <p:sp>
-        <p:nvSpPr>
-          <p:cNvPr id="3" name="Text 1"/>
-          <p:cNvSpPr/>
-          <p:nvPr/>
-        </p:nvSpPr>
-        <p:spPr>
-          <a:xfrm>
-            <a:off x="640080" y="1188720"/>
-            <a:ext cx="7863840" cy="3291840"/>
+              <a:rPr lang="en-US" sz="2100" b="1" dirty="0">
+                <a:solidFill>
+                  <a:srgbClr val="1C1917"/>
+                </a:solidFill>
+                <a:latin typeface="Arial" pitchFamily="34" charset="0"/>
+                <a:ea typeface="Arial" pitchFamily="34" charset="-122"/>
+                <a:cs typeface="Arial" pitchFamily="34" charset="-120"/>
+              </a:rPr>
+              <a:t>Steps</a:t>
+            </a:r>
+            <a:endParaRPr lang="en-US" sz="2100" dirty="0"/>
+          </a:p>
+        </p:txBody>
+      </p:sp>
+      <p:sp>
+        <p:nvSpPr>
+          <p:cNvPr id="4" name="Shape 2"/>
+          <p:cNvSpPr/>
+          <p:nvPr/>
+        </p:nvSpPr>
+        <p:spPr>
+          <a:xfrm>
+            <a:off x="411480" y="960120"/>
+            <a:ext cx="8321040" cy="0"/>
+          </a:xfrm>
+          <a:prstGeom prst="line">
+            <a:avLst/>
+          </a:prstGeom>
+          <a:noFill/>
+          <a:ln w="12700">
+            <a:solidFill>
+              <a:srgbClr val="E7E5E4"/>
+            </a:solidFill>
+            <a:prstDash val="solid"/>
+          </a:ln>
+        </p:spPr>
+      </p:sp>
+      <p:sp>
+        <p:nvSpPr>
+          <p:cNvPr id="5" name="Text 3"/>
+          <p:cNvSpPr/>
+          <p:nvPr/>
+        </p:nvSpPr>
+        <p:spPr>
+          <a:xfrm>
+            <a:off x="411480" y="4864608"/>
+            <a:ext cx="8321040" cy="237744"/>
+          </a:xfrm>
+          <a:prstGeom prst="rect">
+            <a:avLst/>
+          </a:prstGeom>
+          <a:noFill/>
+          <a:ln/>
+        </p:spPr>
+        <p:txBody>
+          <a:bodyPr wrap="square" rtlCol="0" anchor="ctr"/>
+          <a:lstStyle/>
+          <a:p>
+            <a:pPr indent="0" marL="0">
+              <a:buNone/>
+            </a:pPr>
+            <a:r>
+              <a:rPr lang="en-US" sz="750" dirty="0">
+                <a:solidFill>
+                  <a:srgbClr val="AAAAAA"/>
+                </a:solidFill>
+                <a:latin typeface="Arial" pitchFamily="34" charset="0"/>
+                <a:ea typeface="Arial" pitchFamily="34" charset="-122"/>
+                <a:cs typeface="Arial" pitchFamily="34" charset="-120"/>
+              </a:rPr>
+              <a:t>Lesson Forge Pro (owner) — This content is educational material only and does not constitute financial, investment, or trading advice.</a:t>
+            </a:r>
+            <a:endParaRPr lang="en-US" sz="750" dirty="0"/>
+          </a:p>
+        </p:txBody>
+      </p:sp>
+      <p:sp>
+        <p:nvSpPr>
+          <p:cNvPr id="6" name="Text 4"/>
+          <p:cNvSpPr/>
+          <p:nvPr/>
+        </p:nvSpPr>
+        <p:spPr>
+          <a:xfrm>
+            <a:off x="731520" y="1188720"/>
+            <a:ext cx="7680960" cy="2743200"/>
           </a:xfrm>
           <a:prstGeom prst="rect">
             <a:avLst/>
@@ -2313,32 +4056,151 @@
           <a:bodyPr wrap="square" rtlCol="0" anchor="t"/>
           <a:lstStyle/>
           <a:p>
-            <a:pPr marL="342900" indent="-342900">
+            <a:pPr marL="152400" indent="-152400">
+              <a:spcAft>
+                <a:spcPts val="800"/>
+              </a:spcAft>
               <a:buSzPct val="100000"/>
               <a:buChar char="•"/>
             </a:pPr>
             <a:r>
-              <a:rPr lang="en-US" sz="1600" dirty="0">
-                <a:solidFill>
-                  <a:srgbClr val="333333"/>
-                </a:solidFill>
-              </a:rPr>
-              <a:t>In this 90-minute session, we will introduce the concept of financial modeling, its importance in investment decisions, and the key components involved. By the </a:t>
-            </a:r>
-            <a:endParaRPr lang="en-US" sz="1600" dirty="0"/>
-          </a:p>
-        </p:txBody>
-      </p:sp>
-      <p:sp>
-        <p:nvSpPr>
-          <p:cNvPr id="4" name="Text 2"/>
-          <p:cNvSpPr/>
-          <p:nvPr/>
-        </p:nvSpPr>
-        <p:spPr>
-          <a:xfrm>
-            <a:off x="457200" y="4709160"/>
-            <a:ext cx="8229600" cy="320040"/>
+              <a:rPr lang="en-US" sz="1500" dirty="0">
+                <a:solidFill>
+                  <a:srgbClr val="1C1917"/>
+                </a:solidFill>
+                <a:latin typeface="Arial" pitchFamily="34" charset="0"/>
+                <a:ea typeface="Arial" pitchFamily="34" charset="-122"/>
+                <a:cs typeface="Arial" pitchFamily="34" charset="-120"/>
+              </a:rPr>
+              <a:t>Define scope and time horizon before building any statement.</a:t>
+            </a:r>
+            <a:endParaRPr lang="en-US" sz="1500" dirty="0"/>
+          </a:p>
+          <a:p>
+            <a:pPr marL="152400" indent="-152400">
+              <a:spcAft>
+                <a:spcPts val="800"/>
+              </a:spcAft>
+              <a:buSzPct val="100000"/>
+              <a:buChar char="•"/>
+            </a:pPr>
+            <a:r>
+              <a:rPr lang="en-US" sz="1500" dirty="0">
+                <a:solidFill>
+                  <a:srgbClr val="1C1917"/>
+                </a:solidFill>
+                <a:latin typeface="Arial" pitchFamily="34" charset="0"/>
+                <a:ea typeface="Arial" pitchFamily="34" charset="-122"/>
+                <a:cs typeface="Arial" pitchFamily="34" charset="-120"/>
+              </a:rPr>
+              <a:t>Build income statement first: revenue → EBIT → net income.</a:t>
+            </a:r>
+            <a:endParaRPr lang="en-US" sz="1500" dirty="0"/>
+          </a:p>
+          <a:p>
+            <a:pPr marL="152400" indent="-152400">
+              <a:spcAft>
+                <a:spcPts val="800"/>
+              </a:spcAft>
+              <a:buSzPct val="100000"/>
+              <a:buChar char="•"/>
+            </a:pPr>
+            <a:r>
+              <a:rPr lang="en-US" sz="1500" dirty="0">
+                <a:solidFill>
+                  <a:srgbClr val="1C1917"/>
+                </a:solidFill>
+                <a:latin typeface="Arial" pitchFamily="34" charset="0"/>
+                <a:ea typeface="Arial" pitchFamily="34" charset="-122"/>
+                <a:cs typeface="Arial" pitchFamily="34" charset="-120"/>
+              </a:rPr>
+              <a:t>Project balance sheet using income-statement drivers like days sales outstanding.</a:t>
+            </a:r>
+            <a:endParaRPr lang="en-US" sz="1500" dirty="0"/>
+          </a:p>
+          <a:p>
+            <a:pPr marL="152400" indent="-152400">
+              <a:spcAft>
+                <a:spcPts val="800"/>
+              </a:spcAft>
+              <a:buSzPct val="100000"/>
+              <a:buChar char="•"/>
+            </a:pPr>
+            <a:r>
+              <a:rPr lang="en-US" sz="1500" dirty="0">
+                <a:solidFill>
+                  <a:srgbClr val="1C1917"/>
+                </a:solidFill>
+                <a:latin typeface="Arial" pitchFamily="34" charset="0"/>
+                <a:ea typeface="Arial" pitchFamily="34" charset="-122"/>
+                <a:cs typeface="Arial" pitchFamily="34" charset="-120"/>
+              </a:rPr>
+              <a:t>Derive cash flow statement by linking to income statement and balance sheet.</a:t>
+            </a:r>
+            <a:endParaRPr lang="en-US" sz="1500" dirty="0"/>
+          </a:p>
+          <a:p>
+            <a:pPr marL="152400" indent="-152400">
+              <a:spcAft>
+                <a:spcPts val="800"/>
+              </a:spcAft>
+              <a:buSzPct val="100000"/>
+              <a:buChar char="•"/>
+            </a:pPr>
+            <a:r>
+              <a:rPr lang="en-US" sz="1500" dirty="0">
+                <a:solidFill>
+                  <a:srgbClr val="1C1917"/>
+                </a:solidFill>
+                <a:latin typeface="Arial" pitchFamily="34" charset="0"/>
+                <a:ea typeface="Arial" pitchFamily="34" charset="-122"/>
+                <a:cs typeface="Arial" pitchFamily="34" charset="-120"/>
+              </a:rPr>
+              <a:t>Apply valuation or decision layer, then run scenarios and sensitivities.</a:t>
+            </a:r>
+            <a:endParaRPr lang="en-US" sz="1500" dirty="0"/>
+          </a:p>
+        </p:txBody>
+      </p:sp>
+      <p:sp>
+        <p:nvSpPr>
+          <p:cNvPr id="7" name="Shape 5"/>
+          <p:cNvSpPr/>
+          <p:nvPr/>
+        </p:nvSpPr>
+        <p:spPr>
+          <a:xfrm>
+            <a:off x="731520" y="4041648"/>
+            <a:ext cx="7680960" cy="566928"/>
+          </a:xfrm>
+          <a:prstGeom prst="roundRect">
+            <a:avLst>
+              <a:gd name="adj" fmla="val 12903"/>
+            </a:avLst>
+          </a:prstGeom>
+          <a:solidFill>
+            <a:srgbClr val="B45309">
+              <a:alpha val="12000"/>
+            </a:srgbClr>
+          </a:solidFill>
+          <a:ln w="12700">
+            <a:solidFill>
+              <a:srgbClr val="B45309"/>
+            </a:solidFill>
+            <a:prstDash val="solid"/>
+          </a:ln>
+        </p:spPr>
+      </p:sp>
+      <p:sp>
+        <p:nvSpPr>
+          <p:cNvPr id="8" name="Text 6"/>
+          <p:cNvSpPr/>
+          <p:nvPr/>
+        </p:nvSpPr>
+        <p:spPr>
+          <a:xfrm>
+            <a:off x="868680" y="4087368"/>
+            <a:ext cx="7406640" cy="475488"/>
           </a:xfrm>
           <a:prstGeom prst="rect">
             <a:avLst/>
@@ -2354,14 +4216,31 @@
               <a:buNone/>
             </a:pPr>
             <a:r>
-              <a:rPr lang="en-US" sz="800" dirty="0">
-                <a:solidFill>
-                  <a:srgbClr val="AAAAAA"/>
-                </a:solidFill>
-              </a:rPr>
-              <a:t>Lesson Forge Pro (owner) — This content is educational material only and does not constitute financial, investment, or trading advice.</a:t>
-            </a:r>
-            <a:endParaRPr lang="en-US" sz="800" dirty="0"/>
+              <a:rPr lang="en-US" sz="1100" b="1" dirty="0">
+                <a:solidFill>
+                  <a:srgbClr val="B45309"/>
+                </a:solidFill>
+                <a:latin typeface="Arial" pitchFamily="34" charset="0"/>
+                <a:ea typeface="Arial" pitchFamily="34" charset="-122"/>
+                <a:cs typeface="Arial" pitchFamily="34" charset="-120"/>
+              </a:rPr>
+              <a:t>Takeaway  </a:t>
+            </a:r>
+            <a:pPr indent="0" marL="0">
+              <a:buNone/>
+            </a:pPr>
+            <a:r>
+              <a:rPr lang="en-US" sz="1150" dirty="0">
+                <a:solidFill>
+                  <a:srgbClr val="1C1917"/>
+                </a:solidFill>
+                <a:latin typeface="Arial" pitchFamily="34" charset="0"/>
+                <a:ea typeface="Arial" pitchFamily="34" charset="-122"/>
+                <a:cs typeface="Arial" pitchFamily="34" charset="-120"/>
+              </a:rPr>
+              <a:t>Building statements in a fixed sequence—income, balance sheet, cash flow, valuation—prevents structural errors.</a:t>
+            </a:r>
+            <a:endParaRPr lang="en-US" sz="1100" dirty="0"/>
           </a:p>
         </p:txBody>
       </p:sp>
@@ -2373,9 +4252,16 @@
 </p:sld>
 </file>
 
-<file path=ppt/slides/slide4.xml><?xml version="1.0" encoding="utf-8"?>
+<file path=ppt/slides/slide14.xml><?xml version="1.0" encoding="utf-8"?>
 <p:sld xmlns:a="http://schemas.openxmlformats.org/drawingml/2006/main" xmlns:r="http://schemas.openxmlformats.org/officeDocument/2006/relationships" xmlns:p="http://schemas.openxmlformats.org/presentationml/2006/main">
-  <p:cSld name="Slide 4">
+  <p:cSld name="Slide 14">
+    <p:bg>
+      <p:bgPr>
+        <a:solidFill>
+          <a:srgbClr val="FFFFFF"/>
+        </a:solidFill>
+      </p:bgPr>
+    </p:bg>
     <p:spTree>
       <p:nvGrpSpPr>
         <p:cNvPr id="1" name=""/>
@@ -2392,14 +4278,34 @@
       </p:grpSpPr>
       <p:sp>
         <p:nvSpPr>
-          <p:cNvPr id="2" name="Text 0"/>
-          <p:cNvSpPr/>
-          <p:nvPr/>
-        </p:nvSpPr>
-        <p:spPr>
-          <a:xfrm>
-            <a:off x="457200" y="320040"/>
-            <a:ext cx="8229600" cy="731520"/>
+          <p:cNvPr id="2" name="Shape 0"/>
+          <p:cNvSpPr/>
+          <p:nvPr/>
+        </p:nvSpPr>
+        <p:spPr>
+          <a:xfrm>
+            <a:off x="411480" y="402336"/>
+            <a:ext cx="82296" cy="329184"/>
+          </a:xfrm>
+          <a:prstGeom prst="rect">
+            <a:avLst/>
+          </a:prstGeom>
+          <a:solidFill>
+            <a:srgbClr val="B45309"/>
+          </a:solidFill>
+          <a:ln/>
+        </p:spPr>
+      </p:sp>
+      <p:sp>
+        <p:nvSpPr>
+          <p:cNvPr id="3" name="Text 1"/>
+          <p:cNvSpPr/>
+          <p:nvPr/>
+        </p:nvSpPr>
+        <p:spPr>
+          <a:xfrm>
+            <a:off x="566928" y="292608"/>
+            <a:ext cx="8138160" cy="548640"/>
           </a:xfrm>
           <a:prstGeom prst="rect">
             <a:avLst/>
@@ -2415,27 +4321,92 @@
               <a:buNone/>
             </a:pPr>
             <a:r>
-              <a:rPr lang="en-US" sz="2400" b="1" dirty="0">
-                <a:solidFill>
-                  <a:srgbClr val="B45309"/>
-                </a:solidFill>
-              </a:rPr>
-              <a:t>Timed Agenda</a:t>
-            </a:r>
-            <a:endParaRPr lang="en-US" sz="2400" dirty="0"/>
-          </a:p>
-        </p:txBody>
-      </p:sp>
-      <p:sp>
-        <p:nvSpPr>
-          <p:cNvPr id="3" name="Text 1"/>
-          <p:cNvSpPr/>
-          <p:nvPr/>
-        </p:nvSpPr>
-        <p:spPr>
-          <a:xfrm>
-            <a:off x="640080" y="1188720"/>
-            <a:ext cx="7863840" cy="3291840"/>
+              <a:rPr lang="en-US" sz="2100" b="1" dirty="0">
+                <a:solidFill>
+                  <a:srgbClr val="1C1917"/>
+                </a:solidFill>
+                <a:latin typeface="Arial" pitchFamily="34" charset="0"/>
+                <a:ea typeface="Arial" pitchFamily="34" charset="-122"/>
+                <a:cs typeface="Arial" pitchFamily="34" charset="-120"/>
+              </a:rPr>
+              <a:t>Outputs</a:t>
+            </a:r>
+            <a:endParaRPr lang="en-US" sz="2100" dirty="0"/>
+          </a:p>
+        </p:txBody>
+      </p:sp>
+      <p:sp>
+        <p:nvSpPr>
+          <p:cNvPr id="4" name="Shape 2"/>
+          <p:cNvSpPr/>
+          <p:nvPr/>
+        </p:nvSpPr>
+        <p:spPr>
+          <a:xfrm>
+            <a:off x="411480" y="960120"/>
+            <a:ext cx="8321040" cy="0"/>
+          </a:xfrm>
+          <a:prstGeom prst="line">
+            <a:avLst/>
+          </a:prstGeom>
+          <a:noFill/>
+          <a:ln w="12700">
+            <a:solidFill>
+              <a:srgbClr val="E7E5E4"/>
+            </a:solidFill>
+            <a:prstDash val="solid"/>
+          </a:ln>
+        </p:spPr>
+      </p:sp>
+      <p:sp>
+        <p:nvSpPr>
+          <p:cNvPr id="5" name="Text 3"/>
+          <p:cNvSpPr/>
+          <p:nvPr/>
+        </p:nvSpPr>
+        <p:spPr>
+          <a:xfrm>
+            <a:off x="411480" y="4864608"/>
+            <a:ext cx="8321040" cy="237744"/>
+          </a:xfrm>
+          <a:prstGeom prst="rect">
+            <a:avLst/>
+          </a:prstGeom>
+          <a:noFill/>
+          <a:ln/>
+        </p:spPr>
+        <p:txBody>
+          <a:bodyPr wrap="square" rtlCol="0" anchor="ctr"/>
+          <a:lstStyle/>
+          <a:p>
+            <a:pPr indent="0" marL="0">
+              <a:buNone/>
+            </a:pPr>
+            <a:r>
+              <a:rPr lang="en-US" sz="750" dirty="0">
+                <a:solidFill>
+                  <a:srgbClr val="AAAAAA"/>
+                </a:solidFill>
+                <a:latin typeface="Arial" pitchFamily="34" charset="0"/>
+                <a:ea typeface="Arial" pitchFamily="34" charset="-122"/>
+                <a:cs typeface="Arial" pitchFamily="34" charset="-120"/>
+              </a:rPr>
+              <a:t>Lesson Forge Pro (owner) — This content is educational material only and does not constitute financial, investment, or trading advice.</a:t>
+            </a:r>
+            <a:endParaRPr lang="en-US" sz="750" dirty="0"/>
+          </a:p>
+        </p:txBody>
+      </p:sp>
+      <p:sp>
+        <p:nvSpPr>
+          <p:cNvPr id="6" name="Text 4"/>
+          <p:cNvSpPr/>
+          <p:nvPr/>
+        </p:nvSpPr>
+        <p:spPr>
+          <a:xfrm>
+            <a:off x="731520" y="1188720"/>
+            <a:ext cx="7680960" cy="2743200"/>
           </a:xfrm>
           <a:prstGeom prst="rect">
             <a:avLst/>
@@ -2447,122 +4418,130 @@
           <a:bodyPr wrap="square" rtlCol="0" anchor="t"/>
           <a:lstStyle/>
           <a:p>
-            <a:pPr marL="342900" indent="-342900">
+            <a:pPr marL="152400" indent="-152400">
+              <a:spcAft>
+                <a:spcPts val="800"/>
+              </a:spcAft>
               <a:buSzPct val="100000"/>
               <a:buChar char="•"/>
             </a:pPr>
             <a:r>
-              <a:rPr lang="en-US" sz="1600" dirty="0">
-                <a:solidFill>
-                  <a:srgbClr val="333333"/>
-                </a:solidFill>
-              </a:rPr>
-              <a:t>1. Introduction and Icebreaker (5 minutes, 0:00-0:05)</a:t>
-            </a:r>
-            <a:endParaRPr lang="en-US" sz="1600" dirty="0"/>
-          </a:p>
-          <a:p>
-            <a:pPr marL="342900" indent="-342900">
+              <a:rPr lang="en-US" sz="1500" dirty="0">
+                <a:solidFill>
+                  <a:srgbClr val="1C1917"/>
+                </a:solidFill>
+                <a:latin typeface="Arial" pitchFamily="34" charset="0"/>
+                <a:ea typeface="Arial" pitchFamily="34" charset="-122"/>
+                <a:cs typeface="Arial" pitchFamily="34" charset="-120"/>
+              </a:rPr>
+              <a:t>Outputs include projected statements, valuation ranges, IRRs, and dashboards.</a:t>
+            </a:r>
+            <a:endParaRPr lang="en-US" sz="1500" dirty="0"/>
+          </a:p>
+          <a:p>
+            <a:pPr marL="152400" indent="-152400">
+              <a:spcAft>
+                <a:spcPts val="800"/>
+              </a:spcAft>
               <a:buSzPct val="100000"/>
               <a:buChar char="•"/>
             </a:pPr>
             <a:r>
-              <a:rPr lang="en-US" sz="1600" dirty="0">
-                <a:solidFill>
-                  <a:srgbClr val="333333"/>
-                </a:solidFill>
-              </a:rPr>
-              <a:t>2. Defining Financial Modeling (15 minutes, 0:05-0:20)</a:t>
-            </a:r>
-            <a:endParaRPr lang="en-US" sz="1600" dirty="0"/>
-          </a:p>
-          <a:p>
-            <a:pPr marL="342900" indent="-342900">
+              <a:rPr lang="en-US" sz="1500" dirty="0">
+                <a:solidFill>
+                  <a:srgbClr val="1C1917"/>
+                </a:solidFill>
+                <a:latin typeface="Arial" pitchFamily="34" charset="0"/>
+                <a:ea typeface="Arial" pitchFamily="34" charset="-122"/>
+                <a:cs typeface="Arial" pitchFamily="34" charset="-120"/>
+              </a:rPr>
+              <a:t>Outputs must be clearly separated from inputs at all times.</a:t>
+            </a:r>
+            <a:endParaRPr lang="en-US" sz="1500" dirty="0"/>
+          </a:p>
+          <a:p>
+            <a:pPr marL="152400" indent="-152400">
+              <a:spcAft>
+                <a:spcPts val="800"/>
+              </a:spcAft>
               <a:buSzPct val="100000"/>
               <a:buChar char="•"/>
             </a:pPr>
             <a:r>
-              <a:rPr lang="en-US" sz="1600" dirty="0">
-                <a:solidFill>
-                  <a:srgbClr val="333333"/>
-                </a:solidFill>
-              </a:rPr>
-              <a:t>3. Key Components of Financial Modeling (20 minutes, 0:20-0:40)</a:t>
-            </a:r>
-            <a:endParaRPr lang="en-US" sz="1600" dirty="0"/>
-          </a:p>
-          <a:p>
-            <a:pPr marL="342900" indent="-342900">
+              <a:rPr lang="en-US" sz="1500" dirty="0">
+                <a:solidFill>
+                  <a:srgbClr val="1C1917"/>
+                </a:solidFill>
+                <a:latin typeface="Arial" pitchFamily="34" charset="0"/>
+                <a:ea typeface="Arial" pitchFamily="34" charset="-122"/>
+                <a:cs typeface="Arial" pitchFamily="34" charset="-120"/>
+              </a:rPr>
+              <a:t>Never manually overwrite an output—every result must trace back to a formula.</a:t>
+            </a:r>
+            <a:endParaRPr lang="en-US" sz="1500" dirty="0"/>
+          </a:p>
+          <a:p>
+            <a:pPr marL="152400" indent="-152400">
+              <a:spcAft>
+                <a:spcPts val="800"/>
+              </a:spcAft>
               <a:buSzPct val="100000"/>
               <a:buChar char="•"/>
             </a:pPr>
             <a:r>
-              <a:rPr lang="en-US" sz="1600" dirty="0">
-                <a:solidFill>
-                  <a:srgbClr val="333333"/>
-                </a:solidFill>
-              </a:rPr>
-              <a:t>4. Energizer/Break (5 minutes, 0:40-0:45)</a:t>
-            </a:r>
-            <a:endParaRPr lang="en-US" sz="1600" dirty="0"/>
-          </a:p>
-          <a:p>
-            <a:pPr marL="342900" indent="-342900">
-              <a:buSzPct val="100000"/>
-              <a:buChar char="•"/>
-            </a:pPr>
-            <a:r>
-              <a:rPr lang="en-US" sz="1600" dirty="0">
-                <a:solidFill>
-                  <a:srgbClr val="333333"/>
-                </a:solidFill>
-              </a:rPr>
-              <a:t>5. Role of Financial Modeling in Corporate Finance and Investment (20 minutes, 0:45-1:05)</a:t>
-            </a:r>
-            <a:endParaRPr lang="en-US" sz="1600" dirty="0"/>
-          </a:p>
-          <a:p>
-            <a:pPr marL="342900" indent="-342900">
-              <a:buSzPct val="100000"/>
-              <a:buChar char="•"/>
-            </a:pPr>
-            <a:r>
-              <a:rPr lang="en-US" sz="1600" dirty="0">
-                <a:solidFill>
-                  <a:srgbClr val="333333"/>
-                </a:solidFill>
-              </a:rPr>
-              <a:t>6. Conclusion and Q&amp;A (20 minutes, 1:05-1:25)</a:t>
-            </a:r>
-            <a:endParaRPr lang="en-US" sz="1600" dirty="0"/>
-          </a:p>
-          <a:p>
-            <a:pPr marL="342900" indent="-342900">
-              <a:buSzPct val="100000"/>
-              <a:buChar char="•"/>
-            </a:pPr>
-            <a:r>
-              <a:rPr lang="en-US" sz="1600" dirty="0">
-                <a:solidFill>
-                  <a:srgbClr val="333333"/>
-                </a:solidFill>
-              </a:rPr>
-              <a:t>7. Final Thoughts and Next Steps (5 minutes, 1:25-1:30)</a:t>
-            </a:r>
-            <a:endParaRPr lang="en-US" sz="1600" dirty="0"/>
-          </a:p>
-        </p:txBody>
-      </p:sp>
-      <p:sp>
-        <p:nvSpPr>
-          <p:cNvPr id="4" name="Text 2"/>
-          <p:cNvSpPr/>
-          <p:nvPr/>
-        </p:nvSpPr>
-        <p:spPr>
-          <a:xfrm>
-            <a:off x="457200" y="4709160"/>
-            <a:ext cx="8229600" cy="320040"/>
+              <a:rPr lang="en-US" sz="1500" dirty="0">
+                <a:solidFill>
+                  <a:srgbClr val="1C1917"/>
+                </a:solidFill>
+                <a:latin typeface="Arial" pitchFamily="34" charset="0"/>
+                <a:ea typeface="Arial" pitchFamily="34" charset="-122"/>
+                <a:cs typeface="Arial" pitchFamily="34" charset="-120"/>
+              </a:rPr>
+              <a:t>A clean formula chain rooted in inputs makes outputs fully auditable.</a:t>
+            </a:r>
+            <a:endParaRPr lang="en-US" sz="1500" dirty="0"/>
+          </a:p>
+        </p:txBody>
+      </p:sp>
+      <p:sp>
+        <p:nvSpPr>
+          <p:cNvPr id="7" name="Shape 5"/>
+          <p:cNvSpPr/>
+          <p:nvPr/>
+        </p:nvSpPr>
+        <p:spPr>
+          <a:xfrm>
+            <a:off x="731520" y="4041648"/>
+            <a:ext cx="7680960" cy="566928"/>
+          </a:xfrm>
+          <a:prstGeom prst="roundRect">
+            <a:avLst>
+              <a:gd name="adj" fmla="val 12903"/>
+            </a:avLst>
+          </a:prstGeom>
+          <a:solidFill>
+            <a:srgbClr val="B45309">
+              <a:alpha val="12000"/>
+            </a:srgbClr>
+          </a:solidFill>
+          <a:ln w="12700">
+            <a:solidFill>
+              <a:srgbClr val="B45309"/>
+            </a:solidFill>
+            <a:prstDash val="solid"/>
+          </a:ln>
+        </p:spPr>
+      </p:sp>
+      <p:sp>
+        <p:nvSpPr>
+          <p:cNvPr id="8" name="Text 6"/>
+          <p:cNvSpPr/>
+          <p:nvPr/>
+        </p:nvSpPr>
+        <p:spPr>
+          <a:xfrm>
+            <a:off x="868680" y="4087368"/>
+            <a:ext cx="7406640" cy="475488"/>
           </a:xfrm>
           <a:prstGeom prst="rect">
             <a:avLst/>
@@ -2578,14 +4557,31 @@
               <a:buNone/>
             </a:pPr>
             <a:r>
-              <a:rPr lang="en-US" sz="800" dirty="0">
-                <a:solidFill>
-                  <a:srgbClr val="AAAAAA"/>
-                </a:solidFill>
-              </a:rPr>
-              <a:t>Lesson Forge Pro (owner) — This content is educational material only and does not constitute financial, investment, or trading advice.</a:t>
-            </a:r>
-            <a:endParaRPr lang="en-US" sz="800" dirty="0"/>
+              <a:rPr lang="en-US" sz="1100" b="1" dirty="0">
+                <a:solidFill>
+                  <a:srgbClr val="B45309"/>
+                </a:solidFill>
+                <a:latin typeface="Arial" pitchFamily="34" charset="0"/>
+                <a:ea typeface="Arial" pitchFamily="34" charset="-122"/>
+                <a:cs typeface="Arial" pitchFamily="34" charset="-120"/>
+              </a:rPr>
+              <a:t>Takeaway  </a:t>
+            </a:r>
+            <a:pPr indent="0" marL="0">
+              <a:buNone/>
+            </a:pPr>
+            <a:r>
+              <a:rPr lang="en-US" sz="1150" dirty="0">
+                <a:solidFill>
+                  <a:srgbClr val="1C1917"/>
+                </a:solidFill>
+                <a:latin typeface="Arial" pitchFamily="34" charset="0"/>
+                <a:ea typeface="Arial" pitchFamily="34" charset="-122"/>
+                <a:cs typeface="Arial" pitchFamily="34" charset="-120"/>
+              </a:rPr>
+              <a:t>Outputs are only credible when they are fully formula-driven and traceable to their source inputs.</a:t>
+            </a:r>
+            <a:endParaRPr lang="en-US" sz="1100" dirty="0"/>
           </a:p>
         </p:txBody>
       </p:sp>
@@ -2597,9 +4593,16 @@
 </p:sld>
 </file>
 
-<file path=ppt/slides/slide5.xml><?xml version="1.0" encoding="utf-8"?>
+<file path=ppt/slides/slide15.xml><?xml version="1.0" encoding="utf-8"?>
 <p:sld xmlns:a="http://schemas.openxmlformats.org/drawingml/2006/main" xmlns:r="http://schemas.openxmlformats.org/officeDocument/2006/relationships" xmlns:p="http://schemas.openxmlformats.org/presentationml/2006/main">
-  <p:cSld name="Slide 5">
+  <p:cSld name="Slide 15">
+    <p:bg>
+      <p:bgPr>
+        <a:solidFill>
+          <a:srgbClr val="FFFFFF"/>
+        </a:solidFill>
+      </p:bgPr>
+    </p:bg>
     <p:spTree>
       <p:nvGrpSpPr>
         <p:cNvPr id="1" name=""/>
@@ -2616,14 +4619,34 @@
       </p:grpSpPr>
       <p:sp>
         <p:nvSpPr>
-          <p:cNvPr id="2" name="Text 0"/>
-          <p:cNvSpPr/>
-          <p:nvPr/>
-        </p:nvSpPr>
-        <p:spPr>
-          <a:xfrm>
-            <a:off x="457200" y="320040"/>
-            <a:ext cx="8229600" cy="731520"/>
+          <p:cNvPr id="2" name="Shape 0"/>
+          <p:cNvSpPr/>
+          <p:nvPr/>
+        </p:nvSpPr>
+        <p:spPr>
+          <a:xfrm>
+            <a:off x="411480" y="384048"/>
+            <a:ext cx="82296" cy="310896"/>
+          </a:xfrm>
+          <a:prstGeom prst="rect">
+            <a:avLst/>
+          </a:prstGeom>
+          <a:solidFill>
+            <a:srgbClr val="B45309"/>
+          </a:solidFill>
+          <a:ln/>
+        </p:spPr>
+      </p:sp>
+      <p:sp>
+        <p:nvSpPr>
+          <p:cNvPr id="3" name="Text 1"/>
+          <p:cNvSpPr/>
+          <p:nvPr/>
+        </p:nvSpPr>
+        <p:spPr>
+          <a:xfrm>
+            <a:off x="566928" y="292608"/>
+            <a:ext cx="8138160" cy="502920"/>
           </a:xfrm>
           <a:prstGeom prst="rect">
             <a:avLst/>
@@ -2639,51 +4662,17 @@
               <a:buNone/>
             </a:pPr>
             <a:r>
-              <a:rPr lang="en-US" sz="2400" b="1" dirty="0">
-                <a:solidFill>
-                  <a:srgbClr val="B45309"/>
-                </a:solidFill>
-              </a:rPr>
-              <a:t>Introduction and Icebreaker (0:00-0:05)</a:t>
-            </a:r>
-            <a:endParaRPr lang="en-US" sz="2400" dirty="0"/>
-          </a:p>
-        </p:txBody>
-      </p:sp>
-      <p:sp>
-        <p:nvSpPr>
-          <p:cNvPr id="3" name="Text 1"/>
-          <p:cNvSpPr/>
-          <p:nvPr/>
-        </p:nvSpPr>
-        <p:spPr>
-          <a:xfrm>
-            <a:off x="640080" y="1188720"/>
-            <a:ext cx="7863840" cy="3291840"/>
-          </a:xfrm>
-          <a:prstGeom prst="rect">
-            <a:avLst/>
-          </a:prstGeom>
-          <a:noFill/>
-          <a:ln/>
-        </p:spPr>
-        <p:txBody>
-          <a:bodyPr wrap="square" rtlCol="0" anchor="t"/>
-          <a:lstStyle/>
-          <a:p>
-            <a:pPr marL="342900" indent="-342900">
-              <a:buSzPct val="100000"/>
-              <a:buChar char="•"/>
-            </a:pPr>
-            <a:r>
-              <a:rPr lang="en-US" sz="1600" dirty="0">
-                <a:solidFill>
-                  <a:srgbClr val="333333"/>
-                </a:solidFill>
-              </a:rPr>
-              <a:t>Welcome learners and briefly introduce the topic of financial modeling. Ask learners to share their prior knowledge or experience with financial modeling. This </a:t>
-            </a:r>
-            <a:endParaRPr lang="en-US" sz="1600" dirty="0"/>
+              <a:rPr lang="en-US" sz="2000" b="1" dirty="0">
+                <a:solidFill>
+                  <a:srgbClr val="1C1917"/>
+                </a:solidFill>
+                <a:latin typeface="Arial" pitchFamily="34" charset="0"/>
+                <a:ea typeface="Arial" pitchFamily="34" charset="-122"/>
+                <a:cs typeface="Arial" pitchFamily="34" charset="-120"/>
+              </a:rPr>
+              <a:t>Financial Model Component Hierarchy</a:t>
+            </a:r>
+            <a:endParaRPr lang="en-US" sz="2000" dirty="0"/>
           </a:p>
         </p:txBody>
       </p:sp>
@@ -2695,8 +4684,8 @@
         </p:nvSpPr>
         <p:spPr>
           <a:xfrm>
-            <a:off x="457200" y="4709160"/>
-            <a:ext cx="8229600" cy="320040"/>
+            <a:off x="566928" y="4681728"/>
+            <a:ext cx="8138160" cy="320040"/>
           </a:xfrm>
           <a:prstGeom prst="rect">
             <a:avLst/>
@@ -2712,14 +4701,556 @@
               <a:buNone/>
             </a:pPr>
             <a:r>
-              <a:rPr lang="en-US" sz="800" dirty="0">
+              <a:rPr lang="en-US" sz="1000" i="1" dirty="0">
+                <a:solidFill>
+                  <a:srgbClr val="78716C"/>
+                </a:solidFill>
+                <a:latin typeface="Arial" pitchFamily="34" charset="0"/>
+                <a:ea typeface="Arial" pitchFamily="34" charset="-122"/>
+                <a:cs typeface="Arial" pitchFamily="34" charset="-120"/>
+              </a:rPr>
+              <a:t>Foundation of clean inputs supports every layer above; never hardcode in formulas</a:t>
+            </a:r>
+            <a:endParaRPr lang="en-US" sz="1000" dirty="0"/>
+          </a:p>
+        </p:txBody>
+      </p:sp>
+      <p:sp>
+        <p:nvSpPr>
+          <p:cNvPr id="5" name="Text 3"/>
+          <p:cNvSpPr/>
+          <p:nvPr/>
+        </p:nvSpPr>
+        <p:spPr>
+          <a:xfrm>
+            <a:off x="411480" y="4919472"/>
+            <a:ext cx="8321040" cy="219456"/>
+          </a:xfrm>
+          <a:prstGeom prst="rect">
+            <a:avLst/>
+          </a:prstGeom>
+          <a:noFill/>
+          <a:ln/>
+        </p:spPr>
+        <p:txBody>
+          <a:bodyPr wrap="square" rtlCol="0" anchor="ctr"/>
+          <a:lstStyle/>
+          <a:p>
+            <a:pPr indent="0" marL="0">
+              <a:buNone/>
+            </a:pPr>
+            <a:r>
+              <a:rPr lang="en-US" sz="750" dirty="0">
                 <a:solidFill>
                   <a:srgbClr val="AAAAAA"/>
                 </a:solidFill>
+                <a:latin typeface="Arial" pitchFamily="34" charset="0"/>
+                <a:ea typeface="Arial" pitchFamily="34" charset="-122"/>
+                <a:cs typeface="Arial" pitchFamily="34" charset="-120"/>
               </a:rPr>
               <a:t>Lesson Forge Pro (owner) — This content is educational material only and does not constitute financial, investment, or trading advice.</a:t>
             </a:r>
-            <a:endParaRPr lang="en-US" sz="800" dirty="0"/>
+            <a:endParaRPr lang="en-US" sz="750" dirty="0"/>
+          </a:p>
+        </p:txBody>
+      </p:sp>
+      <p:sp>
+        <p:nvSpPr>
+          <p:cNvPr id="6" name="Shape 4"/>
+          <p:cNvSpPr/>
+          <p:nvPr/>
+        </p:nvSpPr>
+        <p:spPr>
+          <a:xfrm flipV="1">
+            <a:off x="2084832" y="1234440"/>
+            <a:ext cx="2048256" cy="658368"/>
+          </a:xfrm>
+          <a:prstGeom prst="trapezoid">
+            <a:avLst/>
+          </a:prstGeom>
+          <a:solidFill>
+            <a:srgbClr val="B45309">
+              <a:alpha val="40000"/>
+            </a:srgbClr>
+          </a:solidFill>
+          <a:ln/>
+        </p:spPr>
+      </p:sp>
+      <p:sp>
+        <p:nvSpPr>
+          <p:cNvPr id="7" name="Text 5"/>
+          <p:cNvSpPr/>
+          <p:nvPr/>
+        </p:nvSpPr>
+        <p:spPr>
+          <a:xfrm>
+            <a:off x="2084832" y="1289304"/>
+            <a:ext cx="2048256" cy="566928"/>
+          </a:xfrm>
+          <a:prstGeom prst="rect">
+            <a:avLst/>
+          </a:prstGeom>
+          <a:noFill/>
+          <a:ln/>
+        </p:spPr>
+        <p:txBody>
+          <a:bodyPr wrap="square" rtlCol="0" anchor="ctr"/>
+          <a:lstStyle/>
+          <a:p>
+            <a:pPr algn="ctr" indent="0" marL="0">
+              <a:buNone/>
+            </a:pPr>
+            <a:r>
+              <a:rPr lang="en-US" sz="1200" b="1" dirty="0">
+                <a:solidFill>
+                  <a:srgbClr val="FFFFFF"/>
+                </a:solidFill>
+                <a:latin typeface="Arial" pitchFamily="34" charset="0"/>
+                <a:ea typeface="Arial" pitchFamily="34" charset="-122"/>
+                <a:cs typeface="Arial" pitchFamily="34" charset="-120"/>
+              </a:rPr>
+              <a:t>Decision Output</a:t>
+            </a:r>
+            <a:endParaRPr lang="en-US" sz="1200" dirty="0"/>
+          </a:p>
+        </p:txBody>
+      </p:sp>
+      <p:sp>
+        <p:nvSpPr>
+          <p:cNvPr id="8" name="Text 6"/>
+          <p:cNvSpPr/>
+          <p:nvPr/>
+        </p:nvSpPr>
+        <p:spPr>
+          <a:xfrm>
+            <a:off x="5760720" y="1417320"/>
+            <a:ext cx="2926080" cy="310896"/>
+          </a:xfrm>
+          <a:prstGeom prst="rect">
+            <a:avLst/>
+          </a:prstGeom>
+          <a:noFill/>
+          <a:ln/>
+        </p:spPr>
+        <p:txBody>
+          <a:bodyPr wrap="square" rtlCol="0" anchor="ctr"/>
+          <a:lstStyle/>
+          <a:p>
+            <a:pPr indent="0" marL="0">
+              <a:buNone/>
+            </a:pPr>
+            <a:r>
+              <a:rPr lang="en-US" sz="1000" dirty="0">
+                <a:solidFill>
+                  <a:srgbClr val="78716C"/>
+                </a:solidFill>
+                <a:latin typeface="Arial" pitchFamily="34" charset="0"/>
+                <a:ea typeface="Arial" pitchFamily="34" charset="-122"/>
+                <a:cs typeface="Arial" pitchFamily="34" charset="-120"/>
+              </a:rPr>
+              <a:t>Valuation or go/no-go recommendation</a:t>
+            </a:r>
+            <a:endParaRPr lang="en-US" sz="1000" dirty="0"/>
+          </a:p>
+        </p:txBody>
+      </p:sp>
+      <p:sp>
+        <p:nvSpPr>
+          <p:cNvPr id="9" name="Shape 7"/>
+          <p:cNvSpPr/>
+          <p:nvPr/>
+        </p:nvSpPr>
+        <p:spPr>
+          <a:xfrm flipV="1">
+            <a:off x="1700784" y="1984248"/>
+            <a:ext cx="2816352" cy="658368"/>
+          </a:xfrm>
+          <a:prstGeom prst="trapezoid">
+            <a:avLst/>
+          </a:prstGeom>
+          <a:solidFill>
+            <a:srgbClr val="B45309">
+              <a:alpha val="54000"/>
+            </a:srgbClr>
+          </a:solidFill>
+          <a:ln/>
+        </p:spPr>
+      </p:sp>
+      <p:sp>
+        <p:nvSpPr>
+          <p:cNvPr id="10" name="Text 8"/>
+          <p:cNvSpPr/>
+          <p:nvPr/>
+        </p:nvSpPr>
+        <p:spPr>
+          <a:xfrm>
+            <a:off x="1700784" y="2039112"/>
+            <a:ext cx="2816352" cy="566928"/>
+          </a:xfrm>
+          <a:prstGeom prst="rect">
+            <a:avLst/>
+          </a:prstGeom>
+          <a:noFill/>
+          <a:ln/>
+        </p:spPr>
+        <p:txBody>
+          <a:bodyPr wrap="square" rtlCol="0" anchor="ctr"/>
+          <a:lstStyle/>
+          <a:p>
+            <a:pPr algn="ctr" indent="0" marL="0">
+              <a:buNone/>
+            </a:pPr>
+            <a:r>
+              <a:rPr lang="en-US" sz="1200" b="1" dirty="0">
+                <a:solidFill>
+                  <a:srgbClr val="FFFFFF"/>
+                </a:solidFill>
+                <a:latin typeface="Arial" pitchFamily="34" charset="0"/>
+                <a:ea typeface="Arial" pitchFamily="34" charset="-122"/>
+                <a:cs typeface="Arial" pitchFamily="34" charset="-120"/>
+              </a:rPr>
+              <a:t>Scenarios &amp; Sensitivity</a:t>
+            </a:r>
+            <a:endParaRPr lang="en-US" sz="1200" dirty="0"/>
+          </a:p>
+        </p:txBody>
+      </p:sp>
+      <p:sp>
+        <p:nvSpPr>
+          <p:cNvPr id="11" name="Text 9"/>
+          <p:cNvSpPr/>
+          <p:nvPr/>
+        </p:nvSpPr>
+        <p:spPr>
+          <a:xfrm>
+            <a:off x="5760720" y="2167128"/>
+            <a:ext cx="2926080" cy="310896"/>
+          </a:xfrm>
+          <a:prstGeom prst="rect">
+            <a:avLst/>
+          </a:prstGeom>
+          <a:noFill/>
+          <a:ln/>
+        </p:spPr>
+        <p:txBody>
+          <a:bodyPr wrap="square" rtlCol="0" anchor="ctr"/>
+          <a:lstStyle/>
+          <a:p>
+            <a:pPr indent="0" marL="0">
+              <a:buNone/>
+            </a:pPr>
+            <a:r>
+              <a:rPr lang="en-US" sz="1000" dirty="0">
+                <a:solidFill>
+                  <a:srgbClr val="78716C"/>
+                </a:solidFill>
+                <a:latin typeface="Arial" pitchFamily="34" charset="0"/>
+                <a:ea typeface="Arial" pitchFamily="34" charset="-122"/>
+                <a:cs typeface="Arial" pitchFamily="34" charset="-120"/>
+              </a:rPr>
+              <a:t>Base, upside, downside driver variations</a:t>
+            </a:r>
+            <a:endParaRPr lang="en-US" sz="1000" dirty="0"/>
+          </a:p>
+        </p:txBody>
+      </p:sp>
+      <p:sp>
+        <p:nvSpPr>
+          <p:cNvPr id="12" name="Shape 10"/>
+          <p:cNvSpPr/>
+          <p:nvPr/>
+        </p:nvSpPr>
+        <p:spPr>
+          <a:xfrm flipV="1">
+            <a:off x="1316736" y="2734056"/>
+            <a:ext cx="3584448" cy="658368"/>
+          </a:xfrm>
+          <a:prstGeom prst="trapezoid">
+            <a:avLst/>
+          </a:prstGeom>
+          <a:solidFill>
+            <a:srgbClr val="B45309">
+              <a:alpha val="67000"/>
+            </a:srgbClr>
+          </a:solidFill>
+          <a:ln/>
+        </p:spPr>
+      </p:sp>
+      <p:sp>
+        <p:nvSpPr>
+          <p:cNvPr id="13" name="Text 11"/>
+          <p:cNvSpPr/>
+          <p:nvPr/>
+        </p:nvSpPr>
+        <p:spPr>
+          <a:xfrm>
+            <a:off x="1316736" y="2788920"/>
+            <a:ext cx="3584448" cy="566928"/>
+          </a:xfrm>
+          <a:prstGeom prst="rect">
+            <a:avLst/>
+          </a:prstGeom>
+          <a:noFill/>
+          <a:ln/>
+        </p:spPr>
+        <p:txBody>
+          <a:bodyPr wrap="square" rtlCol="0" anchor="ctr"/>
+          <a:lstStyle/>
+          <a:p>
+            <a:pPr algn="ctr" indent="0" marL="0">
+              <a:buNone/>
+            </a:pPr>
+            <a:r>
+              <a:rPr lang="en-US" sz="1200" b="1" dirty="0">
+                <a:solidFill>
+                  <a:srgbClr val="FFFFFF"/>
+                </a:solidFill>
+                <a:latin typeface="Arial" pitchFamily="34" charset="0"/>
+                <a:ea typeface="Arial" pitchFamily="34" charset="-122"/>
+                <a:cs typeface="Arial" pitchFamily="34" charset="-120"/>
+              </a:rPr>
+              <a:t>Linked Formulas</a:t>
+            </a:r>
+            <a:endParaRPr lang="en-US" sz="1200" dirty="0"/>
+          </a:p>
+        </p:txBody>
+      </p:sp>
+      <p:sp>
+        <p:nvSpPr>
+          <p:cNvPr id="14" name="Text 12"/>
+          <p:cNvSpPr/>
+          <p:nvPr/>
+        </p:nvSpPr>
+        <p:spPr>
+          <a:xfrm>
+            <a:off x="5760720" y="2916936"/>
+            <a:ext cx="2926080" cy="310896"/>
+          </a:xfrm>
+          <a:prstGeom prst="rect">
+            <a:avLst/>
+          </a:prstGeom>
+          <a:noFill/>
+          <a:ln/>
+        </p:spPr>
+        <p:txBody>
+          <a:bodyPr wrap="square" rtlCol="0" anchor="ctr"/>
+          <a:lstStyle/>
+          <a:p>
+            <a:pPr indent="0" marL="0">
+              <a:buNone/>
+            </a:pPr>
+            <a:r>
+              <a:rPr lang="en-US" sz="1000" dirty="0">
+                <a:solidFill>
+                  <a:srgbClr val="78716C"/>
+                </a:solidFill>
+                <a:latin typeface="Arial" pitchFamily="34" charset="0"/>
+                <a:ea typeface="Arial" pitchFamily="34" charset="-122"/>
+                <a:cs typeface="Arial" pitchFamily="34" charset="-120"/>
+              </a:rPr>
+              <a:t>Outputs referencing only assumption block</a:t>
+            </a:r>
+            <a:endParaRPr lang="en-US" sz="1000" dirty="0"/>
+          </a:p>
+        </p:txBody>
+      </p:sp>
+      <p:sp>
+        <p:nvSpPr>
+          <p:cNvPr id="15" name="Shape 13"/>
+          <p:cNvSpPr/>
+          <p:nvPr/>
+        </p:nvSpPr>
+        <p:spPr>
+          <a:xfrm flipV="1">
+            <a:off x="932688" y="3483864"/>
+            <a:ext cx="4352544" cy="658368"/>
+          </a:xfrm>
+          <a:prstGeom prst="trapezoid">
+            <a:avLst/>
+          </a:prstGeom>
+          <a:solidFill>
+            <a:srgbClr val="B45309">
+              <a:alpha val="81000"/>
+            </a:srgbClr>
+          </a:solidFill>
+          <a:ln/>
+        </p:spPr>
+      </p:sp>
+      <p:sp>
+        <p:nvSpPr>
+          <p:cNvPr id="16" name="Text 14"/>
+          <p:cNvSpPr/>
+          <p:nvPr/>
+        </p:nvSpPr>
+        <p:spPr>
+          <a:xfrm>
+            <a:off x="932688" y="3538728"/>
+            <a:ext cx="4352544" cy="566928"/>
+          </a:xfrm>
+          <a:prstGeom prst="rect">
+            <a:avLst/>
+          </a:prstGeom>
+          <a:noFill/>
+          <a:ln/>
+        </p:spPr>
+        <p:txBody>
+          <a:bodyPr wrap="square" rtlCol="0" anchor="ctr"/>
+          <a:lstStyle/>
+          <a:p>
+            <a:pPr algn="ctr" indent="0" marL="0">
+              <a:buNone/>
+            </a:pPr>
+            <a:r>
+              <a:rPr lang="en-US" sz="1200" b="1" dirty="0">
+                <a:solidFill>
+                  <a:srgbClr val="FFFFFF"/>
+                </a:solidFill>
+                <a:latin typeface="Arial" pitchFamily="34" charset="0"/>
+                <a:ea typeface="Arial" pitchFamily="34" charset="-122"/>
+                <a:cs typeface="Arial" pitchFamily="34" charset="-120"/>
+              </a:rPr>
+              <a:t>Drivers Identified</a:t>
+            </a:r>
+            <a:endParaRPr lang="en-US" sz="1200" dirty="0"/>
+          </a:p>
+        </p:txBody>
+      </p:sp>
+      <p:sp>
+        <p:nvSpPr>
+          <p:cNvPr id="17" name="Text 15"/>
+          <p:cNvSpPr/>
+          <p:nvPr/>
+        </p:nvSpPr>
+        <p:spPr>
+          <a:xfrm>
+            <a:off x="5760720" y="3666744"/>
+            <a:ext cx="2926080" cy="310896"/>
+          </a:xfrm>
+          <a:prstGeom prst="rect">
+            <a:avLst/>
+          </a:prstGeom>
+          <a:noFill/>
+          <a:ln/>
+        </p:spPr>
+        <p:txBody>
+          <a:bodyPr wrap="square" rtlCol="0" anchor="ctr"/>
+          <a:lstStyle/>
+          <a:p>
+            <a:pPr indent="0" marL="0">
+              <a:buNone/>
+            </a:pPr>
+            <a:r>
+              <a:rPr lang="en-US" sz="1000" dirty="0">
+                <a:solidFill>
+                  <a:srgbClr val="78716C"/>
+                </a:solidFill>
+                <a:latin typeface="Arial" pitchFamily="34" charset="0"/>
+                <a:ea typeface="Arial" pitchFamily="34" charset="-122"/>
+                <a:cs typeface="Arial" pitchFamily="34" charset="-120"/>
+              </a:rPr>
+              <a:t>Two or three inputs with outsized impact</a:t>
+            </a:r>
+            <a:endParaRPr lang="en-US" sz="1000" dirty="0"/>
+          </a:p>
+        </p:txBody>
+      </p:sp>
+      <p:sp>
+        <p:nvSpPr>
+          <p:cNvPr id="18" name="Shape 16"/>
+          <p:cNvSpPr/>
+          <p:nvPr/>
+        </p:nvSpPr>
+        <p:spPr>
+          <a:xfrm flipV="1">
+            <a:off x="548640" y="4233672"/>
+            <a:ext cx="5120640" cy="658368"/>
+          </a:xfrm>
+          <a:prstGeom prst="trapezoid">
+            <a:avLst/>
+          </a:prstGeom>
+          <a:solidFill>
+            <a:srgbClr val="B45309">
+              <a:alpha val="95000"/>
+            </a:srgbClr>
+          </a:solidFill>
+          <a:ln/>
+        </p:spPr>
+      </p:sp>
+      <p:sp>
+        <p:nvSpPr>
+          <p:cNvPr id="19" name="Text 17"/>
+          <p:cNvSpPr/>
+          <p:nvPr/>
+        </p:nvSpPr>
+        <p:spPr>
+          <a:xfrm>
+            <a:off x="548640" y="4288536"/>
+            <a:ext cx="5120640" cy="566928"/>
+          </a:xfrm>
+          <a:prstGeom prst="rect">
+            <a:avLst/>
+          </a:prstGeom>
+          <a:noFill/>
+          <a:ln/>
+        </p:spPr>
+        <p:txBody>
+          <a:bodyPr wrap="square" rtlCol="0" anchor="ctr"/>
+          <a:lstStyle/>
+          <a:p>
+            <a:pPr algn="ctr" indent="0" marL="0">
+              <a:buNone/>
+            </a:pPr>
+            <a:r>
+              <a:rPr lang="en-US" sz="1200" b="1" dirty="0">
+                <a:solidFill>
+                  <a:srgbClr val="FFFFFF"/>
+                </a:solidFill>
+                <a:latin typeface="Arial" pitchFamily="34" charset="0"/>
+                <a:ea typeface="Arial" pitchFamily="34" charset="-122"/>
+                <a:cs typeface="Arial" pitchFamily="34" charset="-120"/>
+              </a:rPr>
+              <a:t>Assumption Block</a:t>
+            </a:r>
+            <a:endParaRPr lang="en-US" sz="1200" dirty="0"/>
+          </a:p>
+        </p:txBody>
+      </p:sp>
+      <p:sp>
+        <p:nvSpPr>
+          <p:cNvPr id="20" name="Text 18"/>
+          <p:cNvSpPr/>
+          <p:nvPr/>
+        </p:nvSpPr>
+        <p:spPr>
+          <a:xfrm>
+            <a:off x="5760720" y="4416552"/>
+            <a:ext cx="2926080" cy="310896"/>
+          </a:xfrm>
+          <a:prstGeom prst="rect">
+            <a:avLst/>
+          </a:prstGeom>
+          <a:noFill/>
+          <a:ln/>
+        </p:spPr>
+        <p:txBody>
+          <a:bodyPr wrap="square" rtlCol="0" anchor="ctr"/>
+          <a:lstStyle/>
+          <a:p>
+            <a:pPr indent="0" marL="0">
+              <a:buNone/>
+            </a:pPr>
+            <a:r>
+              <a:rPr lang="en-US" sz="1000" dirty="0">
+                <a:solidFill>
+                  <a:srgbClr val="78716C"/>
+                </a:solidFill>
+                <a:latin typeface="Arial" pitchFamily="34" charset="0"/>
+                <a:ea typeface="Arial" pitchFamily="34" charset="-122"/>
+                <a:cs typeface="Arial" pitchFamily="34" charset="-120"/>
+              </a:rPr>
+              <a:t>All inputs isolated, labeled, color-coded</a:t>
+            </a:r>
+            <a:endParaRPr lang="en-US" sz="1000" dirty="0"/>
           </a:p>
         </p:txBody>
       </p:sp>
@@ -2731,9 +5262,16 @@
 </p:sld>
 </file>
 
-<file path=ppt/slides/slide6.xml><?xml version="1.0" encoding="utf-8"?>
+<file path=ppt/slides/slide16.xml><?xml version="1.0" encoding="utf-8"?>
 <p:sld xmlns:a="http://schemas.openxmlformats.org/drawingml/2006/main" xmlns:r="http://schemas.openxmlformats.org/officeDocument/2006/relationships" xmlns:p="http://schemas.openxmlformats.org/presentationml/2006/main">
-  <p:cSld name="Slide 6">
+  <p:cSld name="Slide 16">
+    <p:bg>
+      <p:bgPr>
+        <a:solidFill>
+          <a:srgbClr val="FFFFFF"/>
+        </a:solidFill>
+      </p:bgPr>
+    </p:bg>
     <p:spTree>
       <p:nvGrpSpPr>
         <p:cNvPr id="1" name=""/>
@@ -2750,14 +5288,34 @@
       </p:grpSpPr>
       <p:sp>
         <p:nvSpPr>
-          <p:cNvPr id="2" name="Text 0"/>
-          <p:cNvSpPr/>
-          <p:nvPr/>
-        </p:nvSpPr>
-        <p:spPr>
-          <a:xfrm>
-            <a:off x="457200" y="320040"/>
-            <a:ext cx="8229600" cy="731520"/>
+          <p:cNvPr id="2" name="Shape 0"/>
+          <p:cNvSpPr/>
+          <p:nvPr/>
+        </p:nvSpPr>
+        <p:spPr>
+          <a:xfrm>
+            <a:off x="411480" y="402336"/>
+            <a:ext cx="82296" cy="329184"/>
+          </a:xfrm>
+          <a:prstGeom prst="rect">
+            <a:avLst/>
+          </a:prstGeom>
+          <a:solidFill>
+            <a:srgbClr val="B45309"/>
+          </a:solidFill>
+          <a:ln/>
+        </p:spPr>
+      </p:sp>
+      <p:sp>
+        <p:nvSpPr>
+          <p:cNvPr id="3" name="Text 1"/>
+          <p:cNvSpPr/>
+          <p:nvPr/>
+        </p:nvSpPr>
+        <p:spPr>
+          <a:xfrm>
+            <a:off x="566928" y="292608"/>
+            <a:ext cx="8138160" cy="548640"/>
           </a:xfrm>
           <a:prstGeom prst="rect">
             <a:avLst/>
@@ -2773,27 +5331,92 @@
               <a:buNone/>
             </a:pPr>
             <a:r>
-              <a:rPr lang="en-US" sz="2400" b="1" dirty="0">
-                <a:solidFill>
-                  <a:srgbClr val="B45309"/>
-                </a:solidFill>
-              </a:rPr>
-              <a:t>Defining Financial Modeling (0:05-0:20)</a:t>
-            </a:r>
-            <a:endParaRPr lang="en-US" sz="2400" dirty="0"/>
-          </a:p>
-        </p:txBody>
-      </p:sp>
-      <p:sp>
-        <p:nvSpPr>
-          <p:cNvPr id="3" name="Text 1"/>
-          <p:cNvSpPr/>
-          <p:nvPr/>
-        </p:nvSpPr>
-        <p:spPr>
-          <a:xfrm>
-            <a:off x="640080" y="1188720"/>
-            <a:ext cx="7863840" cy="3291840"/>
+              <a:rPr lang="en-US" sz="2100" b="1" dirty="0">
+                <a:solidFill>
+                  <a:srgbClr val="1C1917"/>
+                </a:solidFill>
+                <a:latin typeface="Arial" pitchFamily="34" charset="0"/>
+                <a:ea typeface="Arial" pitchFamily="34" charset="-122"/>
+                <a:cs typeface="Arial" pitchFamily="34" charset="-120"/>
+              </a:rPr>
+              <a:t>Checks</a:t>
+            </a:r>
+            <a:endParaRPr lang="en-US" sz="2100" dirty="0"/>
+          </a:p>
+        </p:txBody>
+      </p:sp>
+      <p:sp>
+        <p:nvSpPr>
+          <p:cNvPr id="4" name="Shape 2"/>
+          <p:cNvSpPr/>
+          <p:nvPr/>
+        </p:nvSpPr>
+        <p:spPr>
+          <a:xfrm>
+            <a:off x="411480" y="960120"/>
+            <a:ext cx="8321040" cy="0"/>
+          </a:xfrm>
+          <a:prstGeom prst="line">
+            <a:avLst/>
+          </a:prstGeom>
+          <a:noFill/>
+          <a:ln w="12700">
+            <a:solidFill>
+              <a:srgbClr val="E7E5E4"/>
+            </a:solidFill>
+            <a:prstDash val="solid"/>
+          </a:ln>
+        </p:spPr>
+      </p:sp>
+      <p:sp>
+        <p:nvSpPr>
+          <p:cNvPr id="5" name="Text 3"/>
+          <p:cNvSpPr/>
+          <p:nvPr/>
+        </p:nvSpPr>
+        <p:spPr>
+          <a:xfrm>
+            <a:off x="411480" y="4864608"/>
+            <a:ext cx="8321040" cy="237744"/>
+          </a:xfrm>
+          <a:prstGeom prst="rect">
+            <a:avLst/>
+          </a:prstGeom>
+          <a:noFill/>
+          <a:ln/>
+        </p:spPr>
+        <p:txBody>
+          <a:bodyPr wrap="square" rtlCol="0" anchor="ctr"/>
+          <a:lstStyle/>
+          <a:p>
+            <a:pPr indent="0" marL="0">
+              <a:buNone/>
+            </a:pPr>
+            <a:r>
+              <a:rPr lang="en-US" sz="750" dirty="0">
+                <a:solidFill>
+                  <a:srgbClr val="AAAAAA"/>
+                </a:solidFill>
+                <a:latin typeface="Arial" pitchFamily="34" charset="0"/>
+                <a:ea typeface="Arial" pitchFamily="34" charset="-122"/>
+                <a:cs typeface="Arial" pitchFamily="34" charset="-120"/>
+              </a:rPr>
+              <a:t>Lesson Forge Pro (owner) — This content is educational material only and does not constitute financial, investment, or trading advice.</a:t>
+            </a:r>
+            <a:endParaRPr lang="en-US" sz="750" dirty="0"/>
+          </a:p>
+        </p:txBody>
+      </p:sp>
+      <p:sp>
+        <p:nvSpPr>
+          <p:cNvPr id="6" name="Text 4"/>
+          <p:cNvSpPr/>
+          <p:nvPr/>
+        </p:nvSpPr>
+        <p:spPr>
+          <a:xfrm>
+            <a:off x="731520" y="1188720"/>
+            <a:ext cx="7680960" cy="2743200"/>
           </a:xfrm>
           <a:prstGeom prst="rect">
             <a:avLst/>
@@ -2805,107 +5428,130 @@
           <a:bodyPr wrap="square" rtlCol="0" anchor="t"/>
           <a:lstStyle/>
           <a:p>
-            <a:pPr marL="342900" indent="-342900">
+            <a:pPr marL="152400" indent="-152400">
+              <a:spcAft>
+                <a:spcPts val="800"/>
+              </a:spcAft>
               <a:buSzPct val="100000"/>
               <a:buChar char="•"/>
             </a:pPr>
             <a:r>
-              <a:rPr lang="en-US" sz="1600" dirty="0">
-                <a:solidFill>
-                  <a:srgbClr val="333333"/>
-                </a:solidFill>
-              </a:rPr>
-              <a:t>Talking Points:</a:t>
-            </a:r>
-            <a:endParaRPr lang="en-US" sz="1600" dirty="0"/>
-          </a:p>
-          <a:p>
-            <a:pPr marL="342900" indent="-342900">
+              <a:rPr lang="en-US" sz="1500" dirty="0">
+                <a:solidFill>
+                  <a:srgbClr val="1C1917"/>
+                </a:solidFill>
+                <a:latin typeface="Arial" pitchFamily="34" charset="0"/>
+                <a:ea typeface="Arial" pitchFamily="34" charset="-122"/>
+                <a:cs typeface="Arial" pitchFamily="34" charset="-120"/>
+              </a:rPr>
+              <a:t>Total assets must equal total liabilities plus equity in every period.</a:t>
+            </a:r>
+            <a:endParaRPr lang="en-US" sz="1500" dirty="0"/>
+          </a:p>
+          <a:p>
+            <a:pPr marL="152400" indent="-152400">
+              <a:spcAft>
+                <a:spcPts val="800"/>
+              </a:spcAft>
               <a:buSzPct val="100000"/>
               <a:buChar char="•"/>
             </a:pPr>
             <a:r>
-              <a:rPr lang="en-US" sz="1600" dirty="0">
-                <a:solidFill>
-                  <a:srgbClr val="333333"/>
-                </a:solidFill>
-              </a:rPr>
-              <a:t>Financial modeling is the process of creating a mathematical representation of a company's financial situation.</a:t>
-            </a:r>
-            <a:endParaRPr lang="en-US" sz="1600" dirty="0"/>
-          </a:p>
-          <a:p>
-            <a:pPr marL="342900" indent="-342900">
+              <a:rPr lang="en-US" sz="1500" dirty="0">
+                <a:solidFill>
+                  <a:srgbClr val="1C1917"/>
+                </a:solidFill>
+                <a:latin typeface="Arial" pitchFamily="34" charset="0"/>
+                <a:ea typeface="Arial" pitchFamily="34" charset="-122"/>
+                <a:cs typeface="Arial" pitchFamily="34" charset="-120"/>
+              </a:rPr>
+              <a:t>Closing cash on the cash flow statement must match the balance sheet cash line.</a:t>
+            </a:r>
+            <a:endParaRPr lang="en-US" sz="1500" dirty="0"/>
+          </a:p>
+          <a:p>
+            <a:pPr marL="152400" indent="-152400">
+              <a:spcAft>
+                <a:spcPts val="800"/>
+              </a:spcAft>
               <a:buSzPct val="100000"/>
               <a:buChar char="•"/>
             </a:pPr>
             <a:r>
-              <a:rPr lang="en-US" sz="1600" dirty="0">
-                <a:solidFill>
-                  <a:srgbClr val="333333"/>
-                </a:solidFill>
-              </a:rPr>
-              <a:t>It involves using historical data and assumptions to forecast future financial performance.</a:t>
-            </a:r>
-            <a:endParaRPr lang="en-US" sz="1600" dirty="0"/>
-          </a:p>
-          <a:p>
-            <a:pPr marL="342900" indent="-342900">
+              <a:rPr lang="en-US" sz="1500" dirty="0">
+                <a:solidFill>
+                  <a:srgbClr val="1C1917"/>
+                </a:solidFill>
+                <a:latin typeface="Arial" pitchFamily="34" charset="0"/>
+                <a:ea typeface="Arial" pitchFamily="34" charset="-122"/>
+                <a:cs typeface="Arial" pitchFamily="34" charset="-120"/>
+              </a:rPr>
+              <a:t>Flag intentional circular references such as revolver interest calculations.</a:t>
+            </a:r>
+            <a:endParaRPr lang="en-US" sz="1500" dirty="0"/>
+          </a:p>
+          <a:p>
+            <a:pPr marL="152400" indent="-152400">
+              <a:spcAft>
+                <a:spcPts val="800"/>
+              </a:spcAft>
               <a:buSzPct val="100000"/>
               <a:buChar char="•"/>
             </a:pPr>
             <a:r>
-              <a:rPr lang="en-US" sz="1600" dirty="0">
-                <a:solidFill>
-                  <a:srgbClr val="333333"/>
-                </a:solidFill>
-              </a:rPr>
-              <a:t>Financial models are used to support investment decisions, such as mergers and acquisitions, and to evaluate the potential impact of different business strategies.</a:t>
-            </a:r>
-            <a:endParaRPr lang="en-US" sz="1600" dirty="0"/>
-          </a:p>
-          <a:p>
-            <a:pPr marL="342900" indent="-342900">
-              <a:buSzPct val="100000"/>
-              <a:buChar char="•"/>
-            </a:pPr>
-            <a:r>
-              <a:rPr lang="en-US" sz="1600" dirty="0">
-                <a:solidFill>
-                  <a:srgbClr val="333333"/>
-                </a:solidFill>
-              </a:rPr>
-              <a:t>Analogy: Think of financial modeling like building a map. Just as a map helps you navigate through unfamiliar territory, a financial model helps you navigate through the complexities of a company's financial situation and make informed decisions.</a:t>
-            </a:r>
-            <a:endParaRPr lang="en-US" sz="1600" dirty="0"/>
-          </a:p>
-          <a:p>
-            <a:pPr marL="342900" indent="-342900">
-              <a:buSzPct val="100000"/>
-              <a:buChar char="•"/>
-            </a:pPr>
-            <a:r>
-              <a:rPr lang="en-US" sz="1600" dirty="0">
-                <a:solidFill>
-                  <a:srgbClr val="333333"/>
-                </a:solidFill>
-              </a:rPr>
-              <a:t>Example: The Microsoft-sponsored ModelOff Financial Modeling World Championships is an example of how financial modeling is used in a competitive setting to test speed and accuracy in modeling.</a:t>
-            </a:r>
-            <a:endParaRPr lang="en-US" sz="1600" dirty="0"/>
-          </a:p>
-        </p:txBody>
-      </p:sp>
-      <p:sp>
-        <p:nvSpPr>
-          <p:cNvPr id="4" name="Text 2"/>
-          <p:cNvSpPr/>
-          <p:nvPr/>
-        </p:nvSpPr>
-        <p:spPr>
-          <a:xfrm>
-            <a:off x="457200" y="4709160"/>
-            <a:ext cx="8229600" cy="320040"/>
+              <a:rPr lang="en-US" sz="1500" dirty="0">
+                <a:solidFill>
+                  <a:srgbClr val="1C1917"/>
+                </a:solidFill>
+                <a:latin typeface="Arial" pitchFamily="34" charset="0"/>
+                <a:ea typeface="Arial" pitchFamily="34" charset="-122"/>
+                <a:cs typeface="Arial" pitchFamily="34" charset="-120"/>
+              </a:rPr>
+              <a:t>A dedicated checks row displaying 0 confirms the model balances correctly.</a:t>
+            </a:r>
+            <a:endParaRPr lang="en-US" sz="1500" dirty="0"/>
+          </a:p>
+        </p:txBody>
+      </p:sp>
+      <p:sp>
+        <p:nvSpPr>
+          <p:cNvPr id="7" name="Shape 5"/>
+          <p:cNvSpPr/>
+          <p:nvPr/>
+        </p:nvSpPr>
+        <p:spPr>
+          <a:xfrm>
+            <a:off x="731520" y="4041648"/>
+            <a:ext cx="7680960" cy="566928"/>
+          </a:xfrm>
+          <a:prstGeom prst="roundRect">
+            <a:avLst>
+              <a:gd name="adj" fmla="val 12903"/>
+            </a:avLst>
+          </a:prstGeom>
+          <a:solidFill>
+            <a:srgbClr val="B45309">
+              <a:alpha val="12000"/>
+            </a:srgbClr>
+          </a:solidFill>
+          <a:ln w="12700">
+            <a:solidFill>
+              <a:srgbClr val="B45309"/>
+            </a:solidFill>
+            <a:prstDash val="solid"/>
+          </a:ln>
+        </p:spPr>
+      </p:sp>
+      <p:sp>
+        <p:nvSpPr>
+          <p:cNvPr id="8" name="Text 6"/>
+          <p:cNvSpPr/>
+          <p:nvPr/>
+        </p:nvSpPr>
+        <p:spPr>
+          <a:xfrm>
+            <a:off x="868680" y="4087368"/>
+            <a:ext cx="7406640" cy="475488"/>
           </a:xfrm>
           <a:prstGeom prst="rect">
             <a:avLst/>
@@ -2921,14 +5567,31 @@
               <a:buNone/>
             </a:pPr>
             <a:r>
-              <a:rPr lang="en-US" sz="800" dirty="0">
-                <a:solidFill>
-                  <a:srgbClr val="AAAAAA"/>
-                </a:solidFill>
-              </a:rPr>
-              <a:t>Lesson Forge Pro (owner) — This content is educational material only and does not constitute financial, investment, or trading advice.</a:t>
-            </a:r>
-            <a:endParaRPr lang="en-US" sz="800" dirty="0"/>
+              <a:rPr lang="en-US" sz="1100" b="1" dirty="0">
+                <a:solidFill>
+                  <a:srgbClr val="B45309"/>
+                </a:solidFill>
+                <a:latin typeface="Arial" pitchFamily="34" charset="0"/>
+                <a:ea typeface="Arial" pitchFamily="34" charset="-122"/>
+                <a:cs typeface="Arial" pitchFamily="34" charset="-120"/>
+              </a:rPr>
+              <a:t>Takeaway  </a:t>
+            </a:r>
+            <a:pPr indent="0" marL="0">
+              <a:buNone/>
+            </a:pPr>
+            <a:r>
+              <a:rPr lang="en-US" sz="1150" dirty="0">
+                <a:solidFill>
+                  <a:srgbClr val="1C1917"/>
+                </a:solidFill>
+                <a:latin typeface="Arial" pitchFamily="34" charset="0"/>
+                <a:ea typeface="Arial" pitchFamily="34" charset="-122"/>
+                <a:cs typeface="Arial" pitchFamily="34" charset="-120"/>
+              </a:rPr>
+              <a:t>Built-in checks transform a model from a liability into a reliable decision-support tool.</a:t>
+            </a:r>
+            <a:endParaRPr lang="en-US" sz="1100" dirty="0"/>
           </a:p>
         </p:txBody>
       </p:sp>
@@ -2940,9 +5603,16 @@
 </p:sld>
 </file>
 
-<file path=ppt/slides/slide7.xml><?xml version="1.0" encoding="utf-8"?>
+<file path=ppt/slides/slide17.xml><?xml version="1.0" encoding="utf-8"?>
 <p:sld xmlns:a="http://schemas.openxmlformats.org/drawingml/2006/main" xmlns:r="http://schemas.openxmlformats.org/officeDocument/2006/relationships" xmlns:p="http://schemas.openxmlformats.org/presentationml/2006/main">
-  <p:cSld name="Slide 7">
+  <p:cSld name="Slide 17">
+    <p:bg>
+      <p:bgPr>
+        <a:solidFill>
+          <a:srgbClr val="FFFFFF"/>
+        </a:solidFill>
+      </p:bgPr>
+    </p:bg>
     <p:spTree>
       <p:nvGrpSpPr>
         <p:cNvPr id="1" name=""/>
@@ -2959,14 +5629,34 @@
       </p:grpSpPr>
       <p:sp>
         <p:nvSpPr>
-          <p:cNvPr id="2" name="Text 0"/>
-          <p:cNvSpPr/>
-          <p:nvPr/>
-        </p:nvSpPr>
-        <p:spPr>
-          <a:xfrm>
-            <a:off x="457200" y="320040"/>
-            <a:ext cx="8229600" cy="731520"/>
+          <p:cNvPr id="2" name="Shape 0"/>
+          <p:cNvSpPr/>
+          <p:nvPr/>
+        </p:nvSpPr>
+        <p:spPr>
+          <a:xfrm>
+            <a:off x="411480" y="402336"/>
+            <a:ext cx="82296" cy="329184"/>
+          </a:xfrm>
+          <a:prstGeom prst="rect">
+            <a:avLst/>
+          </a:prstGeom>
+          <a:solidFill>
+            <a:srgbClr val="B45309"/>
+          </a:solidFill>
+          <a:ln/>
+        </p:spPr>
+      </p:sp>
+      <p:sp>
+        <p:nvSpPr>
+          <p:cNvPr id="3" name="Text 1"/>
+          <p:cNvSpPr/>
+          <p:nvPr/>
+        </p:nvSpPr>
+        <p:spPr>
+          <a:xfrm>
+            <a:off x="566928" y="292608"/>
+            <a:ext cx="8138160" cy="548640"/>
           </a:xfrm>
           <a:prstGeom prst="rect">
             <a:avLst/>
@@ -2982,27 +5672,92 @@
               <a:buNone/>
             </a:pPr>
             <a:r>
-              <a:rPr lang="en-US" sz="2400" b="1" dirty="0">
-                <a:solidFill>
-                  <a:srgbClr val="B45309"/>
-                </a:solidFill>
-              </a:rPr>
-              <a:t>Key Components of Financial Modeling (0:20-0:40)</a:t>
-            </a:r>
-            <a:endParaRPr lang="en-US" sz="2400" dirty="0"/>
-          </a:p>
-        </p:txBody>
-      </p:sp>
-      <p:sp>
-        <p:nvSpPr>
-          <p:cNvPr id="3" name="Text 1"/>
-          <p:cNvSpPr/>
-          <p:nvPr/>
-        </p:nvSpPr>
-        <p:spPr>
-          <a:xfrm>
-            <a:off x="640080" y="1188720"/>
-            <a:ext cx="7863840" cy="3291840"/>
+              <a:rPr lang="en-US" sz="2100" b="1" dirty="0">
+                <a:solidFill>
+                  <a:srgbClr val="1C1917"/>
+                </a:solidFill>
+                <a:latin typeface="Arial" pitchFamily="34" charset="0"/>
+                <a:ea typeface="Arial" pitchFamily="34" charset="-122"/>
+                <a:cs typeface="Arial" pitchFamily="34" charset="-120"/>
+              </a:rPr>
+              <a:t>Fully Worked Numerical Example</a:t>
+            </a:r>
+            <a:endParaRPr lang="en-US" sz="2100" dirty="0"/>
+          </a:p>
+        </p:txBody>
+      </p:sp>
+      <p:sp>
+        <p:nvSpPr>
+          <p:cNvPr id="4" name="Shape 2"/>
+          <p:cNvSpPr/>
+          <p:nvPr/>
+        </p:nvSpPr>
+        <p:spPr>
+          <a:xfrm>
+            <a:off x="411480" y="960120"/>
+            <a:ext cx="8321040" cy="0"/>
+          </a:xfrm>
+          <a:prstGeom prst="line">
+            <a:avLst/>
+          </a:prstGeom>
+          <a:noFill/>
+          <a:ln w="12700">
+            <a:solidFill>
+              <a:srgbClr val="E7E5E4"/>
+            </a:solidFill>
+            <a:prstDash val="solid"/>
+          </a:ln>
+        </p:spPr>
+      </p:sp>
+      <p:sp>
+        <p:nvSpPr>
+          <p:cNvPr id="5" name="Text 3"/>
+          <p:cNvSpPr/>
+          <p:nvPr/>
+        </p:nvSpPr>
+        <p:spPr>
+          <a:xfrm>
+            <a:off x="411480" y="4864608"/>
+            <a:ext cx="8321040" cy="237744"/>
+          </a:xfrm>
+          <a:prstGeom prst="rect">
+            <a:avLst/>
+          </a:prstGeom>
+          <a:noFill/>
+          <a:ln/>
+        </p:spPr>
+        <p:txBody>
+          <a:bodyPr wrap="square" rtlCol="0" anchor="ctr"/>
+          <a:lstStyle/>
+          <a:p>
+            <a:pPr indent="0" marL="0">
+              <a:buNone/>
+            </a:pPr>
+            <a:r>
+              <a:rPr lang="en-US" sz="750" dirty="0">
+                <a:solidFill>
+                  <a:srgbClr val="AAAAAA"/>
+                </a:solidFill>
+                <a:latin typeface="Arial" pitchFamily="34" charset="0"/>
+                <a:ea typeface="Arial" pitchFamily="34" charset="-122"/>
+                <a:cs typeface="Arial" pitchFamily="34" charset="-120"/>
+              </a:rPr>
+              <a:t>Lesson Forge Pro (owner) — This content is educational material only and does not constitute financial, investment, or trading advice.</a:t>
+            </a:r>
+            <a:endParaRPr lang="en-US" sz="750" dirty="0"/>
+          </a:p>
+        </p:txBody>
+      </p:sp>
+      <p:sp>
+        <p:nvSpPr>
+          <p:cNvPr id="6" name="Text 4"/>
+          <p:cNvSpPr/>
+          <p:nvPr/>
+        </p:nvSpPr>
+        <p:spPr>
+          <a:xfrm>
+            <a:off x="731520" y="1188720"/>
+            <a:ext cx="7680960" cy="2743200"/>
           </a:xfrm>
           <a:prstGeom prst="rect">
             <a:avLst/>
@@ -3014,167 +5769,151 @@
           <a:bodyPr wrap="square" rtlCol="0" anchor="t"/>
           <a:lstStyle/>
           <a:p>
-            <a:pPr marL="342900" indent="-342900">
+            <a:pPr marL="152400" indent="-152400">
+              <a:spcAft>
+                <a:spcPts val="800"/>
+              </a:spcAft>
               <a:buSzPct val="100000"/>
               <a:buChar char="•"/>
             </a:pPr>
             <a:r>
-              <a:rPr lang="en-US" sz="1600" dirty="0">
-                <a:solidFill>
-                  <a:srgbClr val="333333"/>
-                </a:solidFill>
-              </a:rPr>
-              <a:t>Talking Points:</a:t>
-            </a:r>
-            <a:endParaRPr lang="en-US" sz="1600" dirty="0"/>
-          </a:p>
-          <a:p>
-            <a:pPr marL="342900" indent="-342900">
+              <a:rPr lang="en-US" sz="1500" dirty="0">
+                <a:solidFill>
+                  <a:srgbClr val="1C1917"/>
+                </a:solidFill>
+                <a:latin typeface="Arial" pitchFamily="34" charset="0"/>
+                <a:ea typeface="Arial" pitchFamily="34" charset="-122"/>
+                <a:cs typeface="Arial" pitchFamily="34" charset="-120"/>
+              </a:rPr>
+              <a:t>Revenue grows 10% from $500,000 base to $550,000 in Year 1.</a:t>
+            </a:r>
+            <a:endParaRPr lang="en-US" sz="1500" dirty="0"/>
+          </a:p>
+          <a:p>
+            <a:pPr marL="152400" indent="-152400">
+              <a:spcAft>
+                <a:spcPts val="800"/>
+              </a:spcAft>
               <a:buSzPct val="100000"/>
               <a:buChar char="•"/>
             </a:pPr>
             <a:r>
-              <a:rPr lang="en-US" sz="1600" dirty="0">
-                <a:solidFill>
-                  <a:srgbClr val="333333"/>
-                </a:solidFill>
-              </a:rPr>
-              <a:t>Financial statements (balance sheet, income statement, cash flow statement) are the foundation of financial modeling.</a:t>
-            </a:r>
-            <a:endParaRPr lang="en-US" sz="1600" dirty="0"/>
-          </a:p>
-          <a:p>
-            <a:pPr marL="342900" indent="-342900">
+              <a:rPr lang="en-US" sz="1500" dirty="0">
+                <a:solidFill>
+                  <a:srgbClr val="1C1917"/>
+                </a:solidFill>
+                <a:latin typeface="Arial" pitchFamily="34" charset="0"/>
+                <a:ea typeface="Arial" pitchFamily="34" charset="-122"/>
+                <a:cs typeface="Arial" pitchFamily="34" charset="-120"/>
+              </a:rPr>
+              <a:t>Gross profit of $220,000 minus $80,000 OpEx yields EBIT of $140,000.</a:t>
+            </a:r>
+            <a:endParaRPr lang="en-US" sz="1500" dirty="0"/>
+          </a:p>
+          <a:p>
+            <a:pPr marL="152400" indent="-152400">
+              <a:spcAft>
+                <a:spcPts val="800"/>
+              </a:spcAft>
               <a:buSzPct val="100000"/>
               <a:buChar char="•"/>
             </a:pPr>
             <a:r>
-              <a:rPr lang="en-US" sz="1600" dirty="0">
-                <a:solidFill>
-                  <a:srgbClr val="333333"/>
-                </a:solidFill>
-              </a:rPr>
-              <a:t>Assumptions about future performance, such as revenue growth and expense ratios, are used to forecast future financial results.</a:t>
-            </a:r>
-            <a:endParaRPr lang="en-US" sz="1600" dirty="0"/>
-          </a:p>
-          <a:p>
-            <a:pPr marL="342900" indent="-342900">
+              <a:rPr lang="en-US" sz="1500" dirty="0">
+                <a:solidFill>
+                  <a:srgbClr val="1C1917"/>
+                </a:solidFill>
+                <a:latin typeface="Arial" pitchFamily="34" charset="0"/>
+                <a:ea typeface="Arial" pitchFamily="34" charset="-122"/>
+                <a:cs typeface="Arial" pitchFamily="34" charset="-120"/>
+              </a:rPr>
+              <a:t>Net income after 25% tax is $105,000; add $10,000 depreciation for $115,000 operating cash flow.</a:t>
+            </a:r>
+            <a:endParaRPr lang="en-US" sz="1500" dirty="0"/>
+          </a:p>
+          <a:p>
+            <a:pPr marL="152400" indent="-152400">
+              <a:spcAft>
+                <a:spcPts val="800"/>
+              </a:spcAft>
               <a:buSzPct val="100000"/>
               <a:buChar char="•"/>
             </a:pPr>
             <a:r>
-              <a:rPr lang="en-US" sz="1600" dirty="0">
-                <a:solidFill>
-                  <a:srgbClr val="333333"/>
-                </a:solidFill>
-              </a:rPr>
-              <a:t>Sensitivity analysis is used to test how changes in assumptions affect the model's output.</a:t>
-            </a:r>
-            <a:endParaRPr lang="en-US" sz="1600" dirty="0"/>
-          </a:p>
-          <a:p>
-            <a:pPr marL="342900" indent="-342900">
+              <a:rPr lang="en-US" sz="1500" dirty="0">
+                <a:solidFill>
+                  <a:srgbClr val="1C1917"/>
+                </a:solidFill>
+                <a:latin typeface="Arial" pitchFamily="34" charset="0"/>
+                <a:ea typeface="Arial" pitchFamily="34" charset="-122"/>
+                <a:cs typeface="Arial" pitchFamily="34" charset="-120"/>
+              </a:rPr>
+              <a:t>Ending cash: $40,000 + $115,000 − $15,000 CapEx = $140,000.</a:t>
+            </a:r>
+            <a:endParaRPr lang="en-US" sz="1500" dirty="0"/>
+          </a:p>
+          <a:p>
+            <a:pPr marL="152400" indent="-152400">
+              <a:spcAft>
+                <a:spcPts val="800"/>
+              </a:spcAft>
               <a:buSzPct val="100000"/>
               <a:buChar char="•"/>
             </a:pPr>
             <a:r>
-              <a:rPr lang="en-US" sz="1600" dirty="0">
-                <a:solidFill>
-                  <a:srgbClr val="333333"/>
-                </a:solidFill>
-              </a:rPr>
-              <a:t>Analogy: Building a financial model is like constructing a house. The financial statements are the foundation, the assumptions are the blueprint, and the sensitivity analysis is the stress test to ensure the house can withstand different conditions.</a:t>
-            </a:r>
-            <a:endParaRPr lang="en-US" sz="1600" dirty="0"/>
-          </a:p>
-          <a:p>
-            <a:pPr marL="342900" indent="-342900">
-              <a:buSzPct val="100000"/>
-              <a:buChar char="•"/>
-            </a:pPr>
-            <a:r>
-              <a:rPr lang="en-US" sz="1600" dirty="0">
-                <a:solidFill>
-                  <a:srgbClr val="333333"/>
-                </a:solidFill>
-              </a:rPr>
-              <a:t>Anticipated Learner Questions:</a:t>
-            </a:r>
-            <a:endParaRPr lang="en-US" sz="1600" dirty="0"/>
-          </a:p>
-          <a:p>
-            <a:pPr marL="342900" indent="-342900">
-              <a:buSzPct val="100000"/>
-              <a:buChar char="•"/>
-            </a:pPr>
-            <a:r>
-              <a:rPr lang="en-US" sz="1600" dirty="0">
-                <a:solidFill>
-                  <a:srgbClr val="333333"/>
-                </a:solidFill>
-              </a:rPr>
-              <a:t>Q: What is the difference between a financial model and a financial statement?</a:t>
-            </a:r>
-            <a:endParaRPr lang="en-US" sz="1600" dirty="0"/>
-          </a:p>
-          <a:p>
-            <a:pPr marL="342900" indent="-342900">
-              <a:buSzPct val="100000"/>
-              <a:buChar char="•"/>
-            </a:pPr>
-            <a:r>
-              <a:rPr lang="en-US" sz="1600" dirty="0">
-                <a:solidFill>
-                  <a:srgbClr val="333333"/>
-                </a:solidFill>
-              </a:rPr>
-              <a:t>A: A financial statement is a historical record of a company's financial performance, while a financial model is a forward-looking representation of a company's financial situation.</a:t>
-            </a:r>
-            <a:endParaRPr lang="en-US" sz="1600" dirty="0"/>
-          </a:p>
-          <a:p>
-            <a:pPr marL="342900" indent="-342900">
-              <a:buSzPct val="100000"/>
-              <a:buChar char="•"/>
-            </a:pPr>
-            <a:r>
-              <a:rPr lang="en-US" sz="1600" dirty="0">
-                <a:solidFill>
-                  <a:srgbClr val="333333"/>
-                </a:solidFill>
-              </a:rPr>
-              <a:t>Q: How do you determine the assumptions used in a financial model?</a:t>
-            </a:r>
-            <a:endParaRPr lang="en-US" sz="1600" dirty="0"/>
-          </a:p>
-          <a:p>
-            <a:pPr marL="342900" indent="-342900">
-              <a:buSzPct val="100000"/>
-              <a:buChar char="•"/>
-            </a:pPr>
-            <a:r>
-              <a:rPr lang="en-US" sz="1600" dirty="0">
-                <a:solidFill>
-                  <a:srgbClr val="333333"/>
-                </a:solidFill>
-              </a:rPr>
-              <a:t>A: Assumptions are based on historical data, industry trends, and management's expectations for future performance.</a:t>
-            </a:r>
-            <a:endParaRPr lang="en-US" sz="1600" dirty="0"/>
-          </a:p>
-        </p:txBody>
-      </p:sp>
-      <p:sp>
-        <p:nvSpPr>
-          <p:cNvPr id="4" name="Text 2"/>
-          <p:cNvSpPr/>
-          <p:nvPr/>
-        </p:nvSpPr>
-        <p:spPr>
-          <a:xfrm>
-            <a:off x="457200" y="4709160"/>
-            <a:ext cx="8229600" cy="320040"/>
+              <a:rPr lang="en-US" sz="1500" dirty="0">
+                <a:solidFill>
+                  <a:srgbClr val="1C1917"/>
+                </a:solidFill>
+                <a:latin typeface="Arial" pitchFamily="34" charset="0"/>
+                <a:ea typeface="Arial" pitchFamily="34" charset="-122"/>
+                <a:cs typeface="Arial" pitchFamily="34" charset="-120"/>
+              </a:rPr>
+              <a:t>The $140,000 must appear identically on both the cash flow statement and balance sheet.</a:t>
+            </a:r>
+            <a:endParaRPr lang="en-US" sz="1500" dirty="0"/>
+          </a:p>
+        </p:txBody>
+      </p:sp>
+      <p:sp>
+        <p:nvSpPr>
+          <p:cNvPr id="7" name="Shape 5"/>
+          <p:cNvSpPr/>
+          <p:nvPr/>
+        </p:nvSpPr>
+        <p:spPr>
+          <a:xfrm>
+            <a:off x="731520" y="4041648"/>
+            <a:ext cx="7680960" cy="566928"/>
+          </a:xfrm>
+          <a:prstGeom prst="roundRect">
+            <a:avLst>
+              <a:gd name="adj" fmla="val 12903"/>
+            </a:avLst>
+          </a:prstGeom>
+          <a:solidFill>
+            <a:srgbClr val="B45309">
+              <a:alpha val="12000"/>
+            </a:srgbClr>
+          </a:solidFill>
+          <a:ln w="12700">
+            <a:solidFill>
+              <a:srgbClr val="B45309"/>
+            </a:solidFill>
+            <a:prstDash val="solid"/>
+          </a:ln>
+        </p:spPr>
+      </p:sp>
+      <p:sp>
+        <p:nvSpPr>
+          <p:cNvPr id="8" name="Text 6"/>
+          <p:cNvSpPr/>
+          <p:nvPr/>
+        </p:nvSpPr>
+        <p:spPr>
+          <a:xfrm>
+            <a:off x="868680" y="4087368"/>
+            <a:ext cx="7406640" cy="475488"/>
           </a:xfrm>
           <a:prstGeom prst="rect">
             <a:avLst/>
@@ -3190,14 +5929,31 @@
               <a:buNone/>
             </a:pPr>
             <a:r>
-              <a:rPr lang="en-US" sz="800" dirty="0">
-                <a:solidFill>
-                  <a:srgbClr val="AAAAAA"/>
-                </a:solidFill>
-              </a:rPr>
-              <a:t>Lesson Forge Pro (owner) — This content is educational material only and does not constitute financial, investment, or trading advice.</a:t>
-            </a:r>
-            <a:endParaRPr lang="en-US" sz="800" dirty="0"/>
+              <a:rPr lang="en-US" sz="1100" b="1" dirty="0">
+                <a:solidFill>
+                  <a:srgbClr val="B45309"/>
+                </a:solidFill>
+                <a:latin typeface="Arial" pitchFamily="34" charset="0"/>
+                <a:ea typeface="Arial" pitchFamily="34" charset="-122"/>
+                <a:cs typeface="Arial" pitchFamily="34" charset="-120"/>
+              </a:rPr>
+              <a:t>Takeaway  </a:t>
+            </a:r>
+            <a:pPr indent="0" marL="0">
+              <a:buNone/>
+            </a:pPr>
+            <a:r>
+              <a:rPr lang="en-US" sz="1150" dirty="0">
+                <a:solidFill>
+                  <a:srgbClr val="1C1917"/>
+                </a:solidFill>
+                <a:latin typeface="Arial" pitchFamily="34" charset="0"/>
+                <a:ea typeface="Arial" pitchFamily="34" charset="-122"/>
+                <a:cs typeface="Arial" pitchFamily="34" charset="-120"/>
+              </a:rPr>
+              <a:t>Walking through a complete numerical example confirms that every modeling step and check connects correctly.</a:t>
+            </a:r>
+            <a:endParaRPr lang="en-US" sz="1100" dirty="0"/>
           </a:p>
         </p:txBody>
       </p:sp>
@@ -3209,9 +5965,16 @@
 </p:sld>
 </file>
 
-<file path=ppt/slides/slide8.xml><?xml version="1.0" encoding="utf-8"?>
+<file path=ppt/slides/slide18.xml><?xml version="1.0" encoding="utf-8"?>
 <p:sld xmlns:a="http://schemas.openxmlformats.org/drawingml/2006/main" xmlns:r="http://schemas.openxmlformats.org/officeDocument/2006/relationships" xmlns:p="http://schemas.openxmlformats.org/presentationml/2006/main">
-  <p:cSld name="Slide 8">
+  <p:cSld name="Slide 18">
+    <p:bg>
+      <p:bgPr>
+        <a:solidFill>
+          <a:srgbClr val="FFFFFF"/>
+        </a:solidFill>
+      </p:bgPr>
+    </p:bg>
     <p:spTree>
       <p:nvGrpSpPr>
         <p:cNvPr id="1" name=""/>
@@ -3228,14 +5991,34 @@
       </p:grpSpPr>
       <p:sp>
         <p:nvSpPr>
-          <p:cNvPr id="2" name="Text 0"/>
-          <p:cNvSpPr/>
-          <p:nvPr/>
-        </p:nvSpPr>
-        <p:spPr>
-          <a:xfrm>
-            <a:off x="457200" y="320040"/>
-            <a:ext cx="8229600" cy="731520"/>
+          <p:cNvPr id="2" name="Shape 0"/>
+          <p:cNvSpPr/>
+          <p:nvPr/>
+        </p:nvSpPr>
+        <p:spPr>
+          <a:xfrm>
+            <a:off x="411480" y="402336"/>
+            <a:ext cx="82296" cy="329184"/>
+          </a:xfrm>
+          <a:prstGeom prst="rect">
+            <a:avLst/>
+          </a:prstGeom>
+          <a:solidFill>
+            <a:srgbClr val="B45309"/>
+          </a:solidFill>
+          <a:ln/>
+        </p:spPr>
+      </p:sp>
+      <p:sp>
+        <p:nvSpPr>
+          <p:cNvPr id="3" name="Text 1"/>
+          <p:cNvSpPr/>
+          <p:nvPr/>
+        </p:nvSpPr>
+        <p:spPr>
+          <a:xfrm>
+            <a:off x="566928" y="292608"/>
+            <a:ext cx="8138160" cy="548640"/>
           </a:xfrm>
           <a:prstGeom prst="rect">
             <a:avLst/>
@@ -3251,27 +6034,92 @@
               <a:buNone/>
             </a:pPr>
             <a:r>
-              <a:rPr lang="en-US" sz="2400" b="1" dirty="0">
-                <a:solidFill>
-                  <a:srgbClr val="B45309"/>
-                </a:solidFill>
-              </a:rPr>
-              <a:t>Energizer/Break (0:40-0:45)</a:t>
-            </a:r>
-            <a:endParaRPr lang="en-US" sz="2400" dirty="0"/>
-          </a:p>
-        </p:txBody>
-      </p:sp>
-      <p:sp>
-        <p:nvSpPr>
-          <p:cNvPr id="3" name="Text 1"/>
-          <p:cNvSpPr/>
-          <p:nvPr/>
-        </p:nvSpPr>
-        <p:spPr>
-          <a:xfrm>
-            <a:off x="640080" y="1188720"/>
-            <a:ext cx="7863840" cy="3291840"/>
+              <a:rPr lang="en-US" sz="2100" b="1" dirty="0">
+                <a:solidFill>
+                  <a:srgbClr val="1C1917"/>
+                </a:solidFill>
+                <a:latin typeface="Arial" pitchFamily="34" charset="0"/>
+                <a:ea typeface="Arial" pitchFamily="34" charset="-122"/>
+                <a:cs typeface="Arial" pitchFamily="34" charset="-120"/>
+              </a:rPr>
+              <a:t>Applications and Pitfalls</a:t>
+            </a:r>
+            <a:endParaRPr lang="en-US" sz="2100" dirty="0"/>
+          </a:p>
+        </p:txBody>
+      </p:sp>
+      <p:sp>
+        <p:nvSpPr>
+          <p:cNvPr id="4" name="Shape 2"/>
+          <p:cNvSpPr/>
+          <p:nvPr/>
+        </p:nvSpPr>
+        <p:spPr>
+          <a:xfrm>
+            <a:off x="411480" y="960120"/>
+            <a:ext cx="8321040" cy="0"/>
+          </a:xfrm>
+          <a:prstGeom prst="line">
+            <a:avLst/>
+          </a:prstGeom>
+          <a:noFill/>
+          <a:ln w="12700">
+            <a:solidFill>
+              <a:srgbClr val="E7E5E4"/>
+            </a:solidFill>
+            <a:prstDash val="solid"/>
+          </a:ln>
+        </p:spPr>
+      </p:sp>
+      <p:sp>
+        <p:nvSpPr>
+          <p:cNvPr id="5" name="Text 3"/>
+          <p:cNvSpPr/>
+          <p:nvPr/>
+        </p:nvSpPr>
+        <p:spPr>
+          <a:xfrm>
+            <a:off x="411480" y="4864608"/>
+            <a:ext cx="8321040" cy="237744"/>
+          </a:xfrm>
+          <a:prstGeom prst="rect">
+            <a:avLst/>
+          </a:prstGeom>
+          <a:noFill/>
+          <a:ln/>
+        </p:spPr>
+        <p:txBody>
+          <a:bodyPr wrap="square" rtlCol="0" anchor="ctr"/>
+          <a:lstStyle/>
+          <a:p>
+            <a:pPr indent="0" marL="0">
+              <a:buNone/>
+            </a:pPr>
+            <a:r>
+              <a:rPr lang="en-US" sz="750" dirty="0">
+                <a:solidFill>
+                  <a:srgbClr val="AAAAAA"/>
+                </a:solidFill>
+                <a:latin typeface="Arial" pitchFamily="34" charset="0"/>
+                <a:ea typeface="Arial" pitchFamily="34" charset="-122"/>
+                <a:cs typeface="Arial" pitchFamily="34" charset="-120"/>
+              </a:rPr>
+              <a:t>Lesson Forge Pro (owner) — This content is educational material only and does not constitute financial, investment, or trading advice.</a:t>
+            </a:r>
+            <a:endParaRPr lang="en-US" sz="750" dirty="0"/>
+          </a:p>
+        </p:txBody>
+      </p:sp>
+      <p:sp>
+        <p:nvSpPr>
+          <p:cNvPr id="6" name="Text 4"/>
+          <p:cNvSpPr/>
+          <p:nvPr/>
+        </p:nvSpPr>
+        <p:spPr>
+          <a:xfrm>
+            <a:off x="731520" y="1188720"/>
+            <a:ext cx="7680960" cy="2743200"/>
           </a:xfrm>
           <a:prstGeom prst="rect">
             <a:avLst/>
@@ -3283,32 +6131,151 @@
           <a:bodyPr wrap="square" rtlCol="0" anchor="t"/>
           <a:lstStyle/>
           <a:p>
-            <a:pPr marL="342900" indent="-342900">
+            <a:pPr marL="152400" indent="-152400">
+              <a:spcAft>
+                <a:spcPts val="800"/>
+              </a:spcAft>
               <a:buSzPct val="100000"/>
               <a:buChar char="•"/>
             </a:pPr>
             <a:r>
-              <a:rPr lang="en-US" sz="1600" dirty="0">
-                <a:solidFill>
-                  <a:srgbClr val="333333"/>
-                </a:solidFill>
-              </a:rPr>
-              <a:t>Take a short break to refresh and recharge. Ask learners to think about a time when they had to make a financial decision, such as buying a car or investing in </a:t>
-            </a:r>
-            <a:endParaRPr lang="en-US" sz="1600" dirty="0"/>
-          </a:p>
-        </p:txBody>
-      </p:sp>
-      <p:sp>
-        <p:nvSpPr>
-          <p:cNvPr id="4" name="Text 2"/>
-          <p:cNvSpPr/>
-          <p:nvPr/>
-        </p:nvSpPr>
-        <p:spPr>
-          <a:xfrm>
-            <a:off x="457200" y="4709160"/>
-            <a:ext cx="8229600" cy="320040"/>
+              <a:rPr lang="en-US" sz="1500" dirty="0">
+                <a:solidFill>
+                  <a:srgbClr val="1C1917"/>
+                </a:solidFill>
+                <a:latin typeface="Arial" pitchFamily="34" charset="0"/>
+                <a:ea typeface="Arial" pitchFamily="34" charset="-122"/>
+                <a:cs typeface="Arial" pitchFamily="34" charset="-120"/>
+              </a:rPr>
+              <a:t>DCF models estimate intrinsic value by discounting projected free cash flows.</a:t>
+            </a:r>
+            <a:endParaRPr lang="en-US" sz="1500" dirty="0"/>
+          </a:p>
+          <a:p>
+            <a:pPr marL="152400" indent="-152400">
+              <a:spcAft>
+                <a:spcPts val="800"/>
+              </a:spcAft>
+              <a:buSzPct val="100000"/>
+              <a:buChar char="•"/>
+            </a:pPr>
+            <a:r>
+              <a:rPr lang="en-US" sz="1500" dirty="0">
+                <a:solidFill>
+                  <a:srgbClr val="1C1917"/>
+                </a:solidFill>
+                <a:latin typeface="Arial" pitchFamily="34" charset="0"/>
+                <a:ea typeface="Arial" pitchFamily="34" charset="-122"/>
+                <a:cs typeface="Arial" pitchFamily="34" charset="-120"/>
+              </a:rPr>
+              <a:t>Operating models translate revenue drivers into full projected financial statements.</a:t>
+            </a:r>
+            <a:endParaRPr lang="en-US" sz="1500" dirty="0"/>
+          </a:p>
+          <a:p>
+            <a:pPr marL="152400" indent="-152400">
+              <a:spcAft>
+                <a:spcPts val="800"/>
+              </a:spcAft>
+              <a:buSzPct val="100000"/>
+              <a:buChar char="•"/>
+            </a:pPr>
+            <a:r>
+              <a:rPr lang="en-US" sz="1500" dirty="0">
+                <a:solidFill>
+                  <a:srgbClr val="1C1917"/>
+                </a:solidFill>
+                <a:latin typeface="Arial" pitchFamily="34" charset="0"/>
+                <a:ea typeface="Arial" pitchFamily="34" charset="-122"/>
+                <a:cs typeface="Arial" pitchFamily="34" charset="-120"/>
+              </a:rPr>
+              <a:t>Merger models assess EPS accretion or dilution and evaluate deal pricing.</a:t>
+            </a:r>
+            <a:endParaRPr lang="en-US" sz="1500" dirty="0"/>
+          </a:p>
+          <a:p>
+            <a:pPr marL="152400" indent="-152400">
+              <a:spcAft>
+                <a:spcPts val="800"/>
+              </a:spcAft>
+              <a:buSzPct val="100000"/>
+              <a:buChar char="•"/>
+            </a:pPr>
+            <a:r>
+              <a:rPr lang="en-US" sz="1500" dirty="0">
+                <a:solidFill>
+                  <a:srgbClr val="1C1917"/>
+                </a:solidFill>
+                <a:latin typeface="Arial" pitchFamily="34" charset="0"/>
+                <a:ea typeface="Arial" pitchFamily="34" charset="-122"/>
+                <a:cs typeface="Arial" pitchFamily="34" charset="-120"/>
+              </a:rPr>
+              <a:t>Scenario and sensitivity analysis quantify output ranges across key driver changes.</a:t>
+            </a:r>
+            <a:endParaRPr lang="en-US" sz="1500" dirty="0"/>
+          </a:p>
+          <a:p>
+            <a:pPr marL="152400" indent="-152400">
+              <a:spcAft>
+                <a:spcPts val="800"/>
+              </a:spcAft>
+              <a:buSzPct val="100000"/>
+              <a:buChar char="•"/>
+            </a:pPr>
+            <a:r>
+              <a:rPr lang="en-US" sz="1500" dirty="0">
+                <a:solidFill>
+                  <a:srgbClr val="1C1917"/>
+                </a:solidFill>
+                <a:latin typeface="Arial" pitchFamily="34" charset="0"/>
+                <a:ea typeface="Arial" pitchFamily="34" charset="-122"/>
+                <a:cs typeface="Arial" pitchFamily="34" charset="-120"/>
+              </a:rPr>
+              <a:t>Common pitfalls include hardcoded numbers, broken links, and unchecked circulars.</a:t>
+            </a:r>
+            <a:endParaRPr lang="en-US" sz="1500" dirty="0"/>
+          </a:p>
+        </p:txBody>
+      </p:sp>
+      <p:sp>
+        <p:nvSpPr>
+          <p:cNvPr id="7" name="Shape 5"/>
+          <p:cNvSpPr/>
+          <p:nvPr/>
+        </p:nvSpPr>
+        <p:spPr>
+          <a:xfrm>
+            <a:off x="731520" y="4041648"/>
+            <a:ext cx="7680960" cy="566928"/>
+          </a:xfrm>
+          <a:prstGeom prst="roundRect">
+            <a:avLst>
+              <a:gd name="adj" fmla="val 12903"/>
+            </a:avLst>
+          </a:prstGeom>
+          <a:solidFill>
+            <a:srgbClr val="B45309">
+              <a:alpha val="12000"/>
+            </a:srgbClr>
+          </a:solidFill>
+          <a:ln w="12700">
+            <a:solidFill>
+              <a:srgbClr val="B45309"/>
+            </a:solidFill>
+            <a:prstDash val="solid"/>
+          </a:ln>
+        </p:spPr>
+      </p:sp>
+      <p:sp>
+        <p:nvSpPr>
+          <p:cNvPr id="8" name="Text 6"/>
+          <p:cNvSpPr/>
+          <p:nvPr/>
+        </p:nvSpPr>
+        <p:spPr>
+          <a:xfrm>
+            <a:off x="868680" y="4087368"/>
+            <a:ext cx="7406640" cy="475488"/>
           </a:xfrm>
           <a:prstGeom prst="rect">
             <a:avLst/>
@@ -3324,14 +6291,31 @@
               <a:buNone/>
             </a:pPr>
             <a:r>
-              <a:rPr lang="en-US" sz="800" dirty="0">
-                <a:solidFill>
-                  <a:srgbClr val="AAAAAA"/>
-                </a:solidFill>
-              </a:rPr>
-              <a:t>Lesson Forge Pro (owner) — This content is educational material only and does not constitute financial, investment, or trading advice.</a:t>
-            </a:r>
-            <a:endParaRPr lang="en-US" sz="800" dirty="0"/>
+              <a:rPr lang="en-US" sz="1100" b="1" dirty="0">
+                <a:solidFill>
+                  <a:srgbClr val="B45309"/>
+                </a:solidFill>
+                <a:latin typeface="Arial" pitchFamily="34" charset="0"/>
+                <a:ea typeface="Arial" pitchFamily="34" charset="-122"/>
+                <a:cs typeface="Arial" pitchFamily="34" charset="-120"/>
+              </a:rPr>
+              <a:t>Takeaway  </a:t>
+            </a:r>
+            <a:pPr indent="0" marL="0">
+              <a:buNone/>
+            </a:pPr>
+            <a:r>
+              <a:rPr lang="en-US" sz="1150" dirty="0">
+                <a:solidFill>
+                  <a:srgbClr val="1C1917"/>
+                </a:solidFill>
+                <a:latin typeface="Arial" pitchFamily="34" charset="0"/>
+                <a:ea typeface="Arial" pitchFamily="34" charset="-122"/>
+                <a:cs typeface="Arial" pitchFamily="34" charset="-120"/>
+              </a:rPr>
+              <a:t>Financial models create the most value when deployed with clear business questions and rigorous error controls.</a:t>
+            </a:r>
+            <a:endParaRPr lang="en-US" sz="1100" dirty="0"/>
           </a:p>
         </p:txBody>
       </p:sp>
@@ -3343,9 +6327,16 @@
 </p:sld>
 </file>
 
-<file path=ppt/slides/slide9.xml><?xml version="1.0" encoding="utf-8"?>
+<file path=ppt/slides/slide19.xml><?xml version="1.0" encoding="utf-8"?>
 <p:sld xmlns:a="http://schemas.openxmlformats.org/drawingml/2006/main" xmlns:r="http://schemas.openxmlformats.org/officeDocument/2006/relationships" xmlns:p="http://schemas.openxmlformats.org/presentationml/2006/main">
-  <p:cSld name="Slide 9">
+  <p:cSld name="Slide 19">
+    <p:bg>
+      <p:bgPr>
+        <a:solidFill>
+          <a:srgbClr val="FFFFFF"/>
+        </a:solidFill>
+      </p:bgPr>
+    </p:bg>
     <p:spTree>
       <p:nvGrpSpPr>
         <p:cNvPr id="1" name=""/>
@@ -3362,14 +6353,34 @@
       </p:grpSpPr>
       <p:sp>
         <p:nvSpPr>
-          <p:cNvPr id="2" name="Text 0"/>
-          <p:cNvSpPr/>
-          <p:nvPr/>
-        </p:nvSpPr>
-        <p:spPr>
-          <a:xfrm>
-            <a:off x="457200" y="320040"/>
-            <a:ext cx="8229600" cy="731520"/>
+          <p:cNvPr id="2" name="Shape 0"/>
+          <p:cNvSpPr/>
+          <p:nvPr/>
+        </p:nvSpPr>
+        <p:spPr>
+          <a:xfrm>
+            <a:off x="0" y="4480560"/>
+            <a:ext cx="9144000" cy="667512"/>
+          </a:xfrm>
+          <a:prstGeom prst="rect">
+            <a:avLst/>
+          </a:prstGeom>
+          <a:solidFill>
+            <a:srgbClr val="B45309"/>
+          </a:solidFill>
+          <a:ln/>
+        </p:spPr>
+      </p:sp>
+      <p:sp>
+        <p:nvSpPr>
+          <p:cNvPr id="3" name="Text 1"/>
+          <p:cNvSpPr/>
+          <p:nvPr/>
+        </p:nvSpPr>
+        <p:spPr>
+          <a:xfrm>
+            <a:off x="685800" y="2148840"/>
+            <a:ext cx="7863840" cy="548640"/>
           </a:xfrm>
           <a:prstGeom prst="rect">
             <a:avLst/>
@@ -3385,16 +6396,110 @@
               <a:buNone/>
             </a:pPr>
             <a:r>
-              <a:rPr lang="en-US" sz="2400" b="1" dirty="0">
-                <a:solidFill>
-                  <a:srgbClr val="B45309"/>
-                </a:solidFill>
-              </a:rPr>
-              <a:t>Role of Financial Modeling in Corporate Finance and Investment (0:45-1:05)</a:t>
-            </a:r>
-            <a:endParaRPr lang="en-US" sz="2400" dirty="0"/>
-          </a:p>
-        </p:txBody>
+              <a:rPr lang="en-US" sz="2000" b="1" dirty="0">
+                <a:solidFill>
+                  <a:srgbClr val="1C1917"/>
+                </a:solidFill>
+                <a:latin typeface="Arial" pitchFamily="34" charset="0"/>
+                <a:ea typeface="Arial" pitchFamily="34" charset="-122"/>
+                <a:cs typeface="Arial" pitchFamily="34" charset="-120"/>
+              </a:rPr>
+              <a:t>Next: practice problems in your textbook chapter</a:t>
+            </a:r>
+            <a:endParaRPr lang="en-US" sz="2000" dirty="0"/>
+          </a:p>
+        </p:txBody>
+      </p:sp>
+      <p:sp>
+        <p:nvSpPr>
+          <p:cNvPr id="4" name="Text 2"/>
+          <p:cNvSpPr/>
+          <p:nvPr/>
+        </p:nvSpPr>
+        <p:spPr>
+          <a:xfrm>
+            <a:off x="685800" y="4599432"/>
+            <a:ext cx="7863840" cy="411480"/>
+          </a:xfrm>
+          <a:prstGeom prst="rect">
+            <a:avLst/>
+          </a:prstGeom>
+          <a:noFill/>
+          <a:ln/>
+        </p:spPr>
+        <p:txBody>
+          <a:bodyPr wrap="square" rtlCol="0" anchor="ctr"/>
+          <a:lstStyle/>
+          <a:p>
+            <a:pPr indent="0" marL="0">
+              <a:buNone/>
+            </a:pPr>
+            <a:r>
+              <a:rPr lang="en-US" sz="1100" dirty="0">
+                <a:solidFill>
+                  <a:srgbClr val="FFFFFF"/>
+                </a:solidFill>
+                <a:latin typeface="Arial" pitchFamily="34" charset="0"/>
+                <a:ea typeface="Arial" pitchFamily="34" charset="-122"/>
+                <a:cs typeface="Arial" pitchFamily="34" charset="-120"/>
+              </a:rPr>
+              <a:t>Lesson Forge Pro (owner) — This content is educational material only and does not constitute financial, investment, or trading advice.</a:t>
+            </a:r>
+            <a:endParaRPr lang="en-US" sz="1100" dirty="0"/>
+          </a:p>
+        </p:txBody>
+      </p:sp>
+    </p:spTree>
+  </p:cSld>
+  <p:clrMapOvr>
+    <a:masterClrMapping/>
+  </p:clrMapOvr>
+</p:sld>
+</file>
+
+<file path=ppt/slides/slide2.xml><?xml version="1.0" encoding="utf-8"?>
+<p:sld xmlns:a="http://schemas.openxmlformats.org/drawingml/2006/main" xmlns:r="http://schemas.openxmlformats.org/officeDocument/2006/relationships" xmlns:p="http://schemas.openxmlformats.org/presentationml/2006/main">
+  <p:cSld name="Slide 2">
+    <p:bg>
+      <p:bgPr>
+        <a:solidFill>
+          <a:srgbClr val="FFFFFF"/>
+        </a:solidFill>
+      </p:bgPr>
+    </p:bg>
+    <p:spTree>
+      <p:nvGrpSpPr>
+        <p:cNvPr id="1" name=""/>
+        <p:cNvGrpSpPr/>
+        <p:nvPr/>
+      </p:nvGrpSpPr>
+      <p:grpSpPr>
+        <a:xfrm>
+          <a:off x="0" y="0"/>
+          <a:ext cx="0" cy="0"/>
+          <a:chOff x="0" y="0"/>
+          <a:chExt cx="0" cy="0"/>
+        </a:xfrm>
+      </p:grpSpPr>
+      <p:sp>
+        <p:nvSpPr>
+          <p:cNvPr id="2" name="Shape 0"/>
+          <p:cNvSpPr/>
+          <p:nvPr/>
+        </p:nvSpPr>
+        <p:spPr>
+          <a:xfrm>
+            <a:off x="411480" y="402336"/>
+            <a:ext cx="82296" cy="329184"/>
+          </a:xfrm>
+          <a:prstGeom prst="rect">
+            <a:avLst/>
+          </a:prstGeom>
+          <a:solidFill>
+            <a:srgbClr val="B45309"/>
+          </a:solidFill>
+          <a:ln/>
+        </p:spPr>
       </p:sp>
       <p:sp>
         <p:nvSpPr>
@@ -3404,8 +6509,109 @@
         </p:nvSpPr>
         <p:spPr>
           <a:xfrm>
-            <a:off x="640080" y="1188720"/>
-            <a:ext cx="7863840" cy="3291840"/>
+            <a:off x="566928" y="292608"/>
+            <a:ext cx="8138160" cy="548640"/>
+          </a:xfrm>
+          <a:prstGeom prst="rect">
+            <a:avLst/>
+          </a:prstGeom>
+          <a:noFill/>
+          <a:ln/>
+        </p:spPr>
+        <p:txBody>
+          <a:bodyPr wrap="square" rtlCol="0" anchor="ctr"/>
+          <a:lstStyle/>
+          <a:p>
+            <a:pPr indent="0" marL="0">
+              <a:buNone/>
+            </a:pPr>
+            <a:r>
+              <a:rPr lang="en-US" sz="2100" b="1" dirty="0">
+                <a:solidFill>
+                  <a:srgbClr val="1C1917"/>
+                </a:solidFill>
+                <a:latin typeface="Arial" pitchFamily="34" charset="0"/>
+                <a:ea typeface="Arial" pitchFamily="34" charset="-122"/>
+                <a:cs typeface="Arial" pitchFamily="34" charset="-120"/>
+              </a:rPr>
+              <a:t>Today's agenda</a:t>
+            </a:r>
+            <a:endParaRPr lang="en-US" sz="2100" dirty="0"/>
+          </a:p>
+        </p:txBody>
+      </p:sp>
+      <p:sp>
+        <p:nvSpPr>
+          <p:cNvPr id="4" name="Shape 2"/>
+          <p:cNvSpPr/>
+          <p:nvPr/>
+        </p:nvSpPr>
+        <p:spPr>
+          <a:xfrm>
+            <a:off x="411480" y="960120"/>
+            <a:ext cx="8321040" cy="0"/>
+          </a:xfrm>
+          <a:prstGeom prst="line">
+            <a:avLst/>
+          </a:prstGeom>
+          <a:noFill/>
+          <a:ln w="12700">
+            <a:solidFill>
+              <a:srgbClr val="E7E5E4"/>
+            </a:solidFill>
+            <a:prstDash val="solid"/>
+          </a:ln>
+        </p:spPr>
+      </p:sp>
+      <p:sp>
+        <p:nvSpPr>
+          <p:cNvPr id="5" name="Text 3"/>
+          <p:cNvSpPr/>
+          <p:nvPr/>
+        </p:nvSpPr>
+        <p:spPr>
+          <a:xfrm>
+            <a:off x="411480" y="4864608"/>
+            <a:ext cx="8321040" cy="237744"/>
+          </a:xfrm>
+          <a:prstGeom prst="rect">
+            <a:avLst/>
+          </a:prstGeom>
+          <a:noFill/>
+          <a:ln/>
+        </p:spPr>
+        <p:txBody>
+          <a:bodyPr wrap="square" rtlCol="0" anchor="ctr"/>
+          <a:lstStyle/>
+          <a:p>
+            <a:pPr indent="0" marL="0">
+              <a:buNone/>
+            </a:pPr>
+            <a:r>
+              <a:rPr lang="en-US" sz="750" dirty="0">
+                <a:solidFill>
+                  <a:srgbClr val="AAAAAA"/>
+                </a:solidFill>
+                <a:latin typeface="Arial" pitchFamily="34" charset="0"/>
+                <a:ea typeface="Arial" pitchFamily="34" charset="-122"/>
+                <a:cs typeface="Arial" pitchFamily="34" charset="-120"/>
+              </a:rPr>
+              <a:t>Lesson Forge Pro (owner) — This content is educational material only and does not constitute financial, investment, or trading advice.</a:t>
+            </a:r>
+            <a:endParaRPr lang="en-US" sz="750" dirty="0"/>
+          </a:p>
+        </p:txBody>
+      </p:sp>
+      <p:sp>
+        <p:nvSpPr>
+          <p:cNvPr id="6" name="Text 4"/>
+          <p:cNvSpPr/>
+          <p:nvPr/>
+        </p:nvSpPr>
+        <p:spPr>
+          <a:xfrm>
+            <a:off x="731520" y="1234440"/>
+            <a:ext cx="7680960" cy="3383280"/>
           </a:xfrm>
           <a:prstGeom prst="rect">
             <a:avLst/>
@@ -3417,167 +6623,1281 @@
           <a:bodyPr wrap="square" rtlCol="0" anchor="t"/>
           <a:lstStyle/>
           <a:p>
-            <a:pPr marL="342900" indent="-342900">
+            <a:pPr marL="177800" indent="-177800">
+              <a:spcAft>
+                <a:spcPts val="1000"/>
+              </a:spcAft>
+              <a:buSzPct val="100000"/>
+              <a:buChar char="▪"/>
+            </a:pPr>
+            <a:r>
+              <a:rPr lang="en-US" sz="1600" dirty="0">
+                <a:solidFill>
+                  <a:srgbClr val="1C1917"/>
+                </a:solidFill>
+                <a:latin typeface="Arial" pitchFamily="34" charset="0"/>
+                <a:ea typeface="Arial" pitchFamily="34" charset="-122"/>
+                <a:cs typeface="Arial" pitchFamily="34" charset="-120"/>
+              </a:rPr>
+              <a:t>Concepts and Vocabulary</a:t>
+            </a:r>
+            <a:endParaRPr lang="en-US" sz="1600" dirty="0"/>
+          </a:p>
+          <a:p>
+            <a:pPr marL="177800" indent="-177800">
+              <a:spcAft>
+                <a:spcPts val="1000"/>
+              </a:spcAft>
+              <a:buSzPct val="100000"/>
+              <a:buChar char="▪"/>
+            </a:pPr>
+            <a:r>
+              <a:rPr lang="en-US" sz="1600" dirty="0">
+                <a:solidFill>
+                  <a:srgbClr val="1C1917"/>
+                </a:solidFill>
+                <a:latin typeface="Arial" pitchFamily="34" charset="0"/>
+                <a:ea typeface="Arial" pitchFamily="34" charset="-122"/>
+                <a:cs typeface="Arial" pitchFamily="34" charset="-120"/>
+              </a:rPr>
+              <a:t>Core Definitions</a:t>
+            </a:r>
+            <a:endParaRPr lang="en-US" sz="1600" dirty="0"/>
+          </a:p>
+          <a:p>
+            <a:pPr marL="177800" indent="-177800">
+              <a:spcAft>
+                <a:spcPts val="1000"/>
+              </a:spcAft>
+              <a:buSzPct val="100000"/>
+              <a:buChar char="▪"/>
+            </a:pPr>
+            <a:r>
+              <a:rPr lang="en-US" sz="1600" dirty="0">
+                <a:solidFill>
+                  <a:srgbClr val="1C1917"/>
+                </a:solidFill>
+                <a:latin typeface="Arial" pitchFamily="34" charset="0"/>
+                <a:ea typeface="Arial" pitchFamily="34" charset="-122"/>
+                <a:cs typeface="Arial" pitchFamily="34" charset="-120"/>
+              </a:rPr>
+              <a:t>Where Financial Modeling Fits in Practice</a:t>
+            </a:r>
+            <a:endParaRPr lang="en-US" sz="1600" dirty="0"/>
+          </a:p>
+          <a:p>
+            <a:pPr marL="177800" indent="-177800">
+              <a:spcAft>
+                <a:spcPts val="1000"/>
+              </a:spcAft>
+              <a:buSzPct val="100000"/>
+              <a:buChar char="▪"/>
+            </a:pPr>
+            <a:r>
+              <a:rPr lang="en-US" sz="1600" dirty="0">
+                <a:solidFill>
+                  <a:srgbClr val="1C1917"/>
+                </a:solidFill>
+                <a:latin typeface="Arial" pitchFamily="34" charset="0"/>
+                <a:ea typeface="Arial" pitchFamily="34" charset="-122"/>
+                <a:cs typeface="Arial" pitchFamily="34" charset="-120"/>
+              </a:rPr>
+              <a:t>Notation Conventions</a:t>
+            </a:r>
+            <a:endParaRPr lang="en-US" sz="1600" dirty="0"/>
+          </a:p>
+          <a:p>
+            <a:pPr marL="177800" indent="-177800">
+              <a:spcAft>
+                <a:spcPts val="1000"/>
+              </a:spcAft>
+              <a:buSzPct val="100000"/>
+              <a:buChar char="▪"/>
+            </a:pPr>
+            <a:r>
+              <a:rPr lang="en-US" sz="1600" dirty="0">
+                <a:solidFill>
+                  <a:srgbClr val="1C1917"/>
+                </a:solidFill>
+                <a:latin typeface="Arial" pitchFamily="34" charset="0"/>
+                <a:ea typeface="Arial" pitchFamily="34" charset="-122"/>
+                <a:cs typeface="Arial" pitchFamily="34" charset="-120"/>
+              </a:rPr>
+              <a:t>Mapping Vocabulary to a New Model</a:t>
+            </a:r>
+            <a:endParaRPr lang="en-US" sz="1600" dirty="0"/>
+          </a:p>
+          <a:p>
+            <a:pPr marL="177800" indent="-177800">
+              <a:spcAft>
+                <a:spcPts val="1000"/>
+              </a:spcAft>
+              <a:buSzPct val="100000"/>
+              <a:buChar char="▪"/>
+            </a:pPr>
+            <a:r>
+              <a:rPr lang="en-US" sz="1600" dirty="0">
+                <a:solidFill>
+                  <a:srgbClr val="1C1917"/>
+                </a:solidFill>
+                <a:latin typeface="Arial" pitchFamily="34" charset="0"/>
+                <a:ea typeface="Arial" pitchFamily="34" charset="-122"/>
+                <a:cs typeface="Arial" pitchFamily="34" charset="-120"/>
+              </a:rPr>
+              <a:t>Worked Example: Terminology in Action</a:t>
+            </a:r>
+            <a:endParaRPr lang="en-US" sz="1600" dirty="0"/>
+          </a:p>
+          <a:p>
+            <a:pPr marL="177800" indent="-177800">
+              <a:spcAft>
+                <a:spcPts val="1000"/>
+              </a:spcAft>
+              <a:buSzPct val="100000"/>
+              <a:buChar char="▪"/>
+            </a:pPr>
+            <a:r>
+              <a:rPr lang="en-US" sz="1600" dirty="0">
+                <a:solidFill>
+                  <a:srgbClr val="1C1917"/>
+                </a:solidFill>
+                <a:latin typeface="Arial" pitchFamily="34" charset="0"/>
+                <a:ea typeface="Arial" pitchFamily="34" charset="-122"/>
+                <a:cs typeface="Arial" pitchFamily="34" charset="-120"/>
+              </a:rPr>
+              <a:t>The Standard Modeling Procedure</a:t>
+            </a:r>
+            <a:endParaRPr lang="en-US" sz="1600" dirty="0"/>
+          </a:p>
+          <a:p>
+            <a:pPr marL="177800" indent="-177800">
+              <a:spcAft>
+                <a:spcPts val="1000"/>
+              </a:spcAft>
+              <a:buSzPct val="100000"/>
+              <a:buChar char="▪"/>
+            </a:pPr>
+            <a:r>
+              <a:rPr lang="en-US" sz="1600" dirty="0">
+                <a:solidFill>
+                  <a:srgbClr val="1C1917"/>
+                </a:solidFill>
+                <a:latin typeface="Arial" pitchFamily="34" charset="0"/>
+                <a:ea typeface="Arial" pitchFamily="34" charset="-122"/>
+                <a:cs typeface="Arial" pitchFamily="34" charset="-120"/>
+              </a:rPr>
+              <a:t>Inputs</a:t>
+            </a:r>
+            <a:endParaRPr lang="en-US" sz="1600" dirty="0"/>
+          </a:p>
+          <a:p>
+            <a:pPr marL="177800" indent="-177800">
+              <a:spcAft>
+                <a:spcPts val="1000"/>
+              </a:spcAft>
+              <a:buSzPct val="100000"/>
+              <a:buChar char="▪"/>
+            </a:pPr>
+            <a:r>
+              <a:rPr lang="en-US" sz="1600" dirty="0">
+                <a:solidFill>
+                  <a:srgbClr val="1C1917"/>
+                </a:solidFill>
+                <a:latin typeface="Arial" pitchFamily="34" charset="0"/>
+                <a:ea typeface="Arial" pitchFamily="34" charset="-122"/>
+                <a:cs typeface="Arial" pitchFamily="34" charset="-120"/>
+              </a:rPr>
+              <a:t>Steps</a:t>
+            </a:r>
+            <a:endParaRPr lang="en-US" sz="1600" dirty="0"/>
+          </a:p>
+          <a:p>
+            <a:pPr marL="177800" indent="-177800">
+              <a:spcAft>
+                <a:spcPts val="1000"/>
+              </a:spcAft>
+              <a:buSzPct val="100000"/>
+              <a:buChar char="▪"/>
+            </a:pPr>
+            <a:r>
+              <a:rPr lang="en-US" sz="1600" dirty="0">
+                <a:solidFill>
+                  <a:srgbClr val="1C1917"/>
+                </a:solidFill>
+                <a:latin typeface="Arial" pitchFamily="34" charset="0"/>
+                <a:ea typeface="Arial" pitchFamily="34" charset="-122"/>
+                <a:cs typeface="Arial" pitchFamily="34" charset="-120"/>
+              </a:rPr>
+              <a:t>Outputs</a:t>
+            </a:r>
+            <a:endParaRPr lang="en-US" sz="1600" dirty="0"/>
+          </a:p>
+          <a:p>
+            <a:pPr marL="177800" indent="-177800">
+              <a:spcAft>
+                <a:spcPts val="1000"/>
+              </a:spcAft>
+              <a:buSzPct val="100000"/>
+              <a:buChar char="▪"/>
+            </a:pPr>
+            <a:r>
+              <a:rPr lang="en-US" sz="1600" dirty="0">
+                <a:solidFill>
+                  <a:srgbClr val="1C1917"/>
+                </a:solidFill>
+                <a:latin typeface="Arial" pitchFamily="34" charset="0"/>
+                <a:ea typeface="Arial" pitchFamily="34" charset="-122"/>
+                <a:cs typeface="Arial" pitchFamily="34" charset="-120"/>
+              </a:rPr>
+              <a:t>Checks</a:t>
+            </a:r>
+            <a:endParaRPr lang="en-US" sz="1600" dirty="0"/>
+          </a:p>
+          <a:p>
+            <a:pPr marL="177800" indent="-177800">
+              <a:spcAft>
+                <a:spcPts val="1000"/>
+              </a:spcAft>
+              <a:buSzPct val="100000"/>
+              <a:buChar char="▪"/>
+            </a:pPr>
+            <a:r>
+              <a:rPr lang="en-US" sz="1600" dirty="0">
+                <a:solidFill>
+                  <a:srgbClr val="1C1917"/>
+                </a:solidFill>
+                <a:latin typeface="Arial" pitchFamily="34" charset="0"/>
+                <a:ea typeface="Arial" pitchFamily="34" charset="-122"/>
+                <a:cs typeface="Arial" pitchFamily="34" charset="-120"/>
+              </a:rPr>
+              <a:t>Fully Worked Numerical Example</a:t>
+            </a:r>
+            <a:endParaRPr lang="en-US" sz="1600" dirty="0"/>
+          </a:p>
+          <a:p>
+            <a:pPr marL="177800" indent="-177800">
+              <a:spcAft>
+                <a:spcPts val="1000"/>
+              </a:spcAft>
+              <a:buSzPct val="100000"/>
+              <a:buChar char="▪"/>
+            </a:pPr>
+            <a:r>
+              <a:rPr lang="en-US" sz="1600" dirty="0">
+                <a:solidFill>
+                  <a:srgbClr val="1C1917"/>
+                </a:solidFill>
+                <a:latin typeface="Arial" pitchFamily="34" charset="0"/>
+                <a:ea typeface="Arial" pitchFamily="34" charset="-122"/>
+                <a:cs typeface="Arial" pitchFamily="34" charset="-120"/>
+              </a:rPr>
+              <a:t>Applications and Pitfalls</a:t>
+            </a:r>
+            <a:endParaRPr lang="en-US" sz="1600" dirty="0"/>
+          </a:p>
+        </p:txBody>
+      </p:sp>
+    </p:spTree>
+  </p:cSld>
+  <p:clrMapOvr>
+    <a:masterClrMapping/>
+  </p:clrMapOvr>
+</p:sld>
+</file>
+
+<file path=ppt/slides/slide3.xml><?xml version="1.0" encoding="utf-8"?>
+<p:sld xmlns:a="http://schemas.openxmlformats.org/drawingml/2006/main" xmlns:r="http://schemas.openxmlformats.org/officeDocument/2006/relationships" xmlns:p="http://schemas.openxmlformats.org/presentationml/2006/main">
+  <p:cSld name="Slide 3">
+    <p:bg>
+      <p:bgPr>
+        <a:solidFill>
+          <a:srgbClr val="FFFFFF"/>
+        </a:solidFill>
+      </p:bgPr>
+    </p:bg>
+    <p:spTree>
+      <p:nvGrpSpPr>
+        <p:cNvPr id="1" name=""/>
+        <p:cNvGrpSpPr/>
+        <p:nvPr/>
+      </p:nvGrpSpPr>
+      <p:grpSpPr>
+        <a:xfrm>
+          <a:off x="0" y="0"/>
+          <a:ext cx="0" cy="0"/>
+          <a:chOff x="0" y="0"/>
+          <a:chExt cx="0" cy="0"/>
+        </a:xfrm>
+      </p:grpSpPr>
+      <p:sp>
+        <p:nvSpPr>
+          <p:cNvPr id="2" name="Shape 0"/>
+          <p:cNvSpPr/>
+          <p:nvPr/>
+        </p:nvSpPr>
+        <p:spPr>
+          <a:xfrm>
+            <a:off x="411480" y="402336"/>
+            <a:ext cx="82296" cy="329184"/>
+          </a:xfrm>
+          <a:prstGeom prst="rect">
+            <a:avLst/>
+          </a:prstGeom>
+          <a:solidFill>
+            <a:srgbClr val="B45309"/>
+          </a:solidFill>
+          <a:ln/>
+        </p:spPr>
+      </p:sp>
+      <p:sp>
+        <p:nvSpPr>
+          <p:cNvPr id="3" name="Text 1"/>
+          <p:cNvSpPr/>
+          <p:nvPr/>
+        </p:nvSpPr>
+        <p:spPr>
+          <a:xfrm>
+            <a:off x="566928" y="292608"/>
+            <a:ext cx="8138160" cy="548640"/>
+          </a:xfrm>
+          <a:prstGeom prst="rect">
+            <a:avLst/>
+          </a:prstGeom>
+          <a:noFill/>
+          <a:ln/>
+        </p:spPr>
+        <p:txBody>
+          <a:bodyPr wrap="square" rtlCol="0" anchor="ctr"/>
+          <a:lstStyle/>
+          <a:p>
+            <a:pPr indent="0" marL="0">
+              <a:buNone/>
+            </a:pPr>
+            <a:r>
+              <a:rPr lang="en-US" sz="2100" b="1" dirty="0">
+                <a:solidFill>
+                  <a:srgbClr val="1C1917"/>
+                </a:solidFill>
+                <a:latin typeface="Arial" pitchFamily="34" charset="0"/>
+                <a:ea typeface="Arial" pitchFamily="34" charset="-122"/>
+                <a:cs typeface="Arial" pitchFamily="34" charset="-120"/>
+              </a:rPr>
+              <a:t>Concepts and Vocabulary</a:t>
+            </a:r>
+            <a:endParaRPr lang="en-US" sz="2100" dirty="0"/>
+          </a:p>
+        </p:txBody>
+      </p:sp>
+      <p:sp>
+        <p:nvSpPr>
+          <p:cNvPr id="4" name="Shape 2"/>
+          <p:cNvSpPr/>
+          <p:nvPr/>
+        </p:nvSpPr>
+        <p:spPr>
+          <a:xfrm>
+            <a:off x="411480" y="960120"/>
+            <a:ext cx="8321040" cy="0"/>
+          </a:xfrm>
+          <a:prstGeom prst="line">
+            <a:avLst/>
+          </a:prstGeom>
+          <a:noFill/>
+          <a:ln w="12700">
+            <a:solidFill>
+              <a:srgbClr val="E7E5E4"/>
+            </a:solidFill>
+            <a:prstDash val="solid"/>
+          </a:ln>
+        </p:spPr>
+      </p:sp>
+      <p:sp>
+        <p:nvSpPr>
+          <p:cNvPr id="5" name="Text 3"/>
+          <p:cNvSpPr/>
+          <p:nvPr/>
+        </p:nvSpPr>
+        <p:spPr>
+          <a:xfrm>
+            <a:off x="411480" y="4864608"/>
+            <a:ext cx="8321040" cy="237744"/>
+          </a:xfrm>
+          <a:prstGeom prst="rect">
+            <a:avLst/>
+          </a:prstGeom>
+          <a:noFill/>
+          <a:ln/>
+        </p:spPr>
+        <p:txBody>
+          <a:bodyPr wrap="square" rtlCol="0" anchor="ctr"/>
+          <a:lstStyle/>
+          <a:p>
+            <a:pPr indent="0" marL="0">
+              <a:buNone/>
+            </a:pPr>
+            <a:r>
+              <a:rPr lang="en-US" sz="750" dirty="0">
+                <a:solidFill>
+                  <a:srgbClr val="AAAAAA"/>
+                </a:solidFill>
+                <a:latin typeface="Arial" pitchFamily="34" charset="0"/>
+                <a:ea typeface="Arial" pitchFamily="34" charset="-122"/>
+                <a:cs typeface="Arial" pitchFamily="34" charset="-120"/>
+              </a:rPr>
+              <a:t>Lesson Forge Pro (owner) — This content is educational material only and does not constitute financial, investment, or trading advice.</a:t>
+            </a:r>
+            <a:endParaRPr lang="en-US" sz="750" dirty="0"/>
+          </a:p>
+        </p:txBody>
+      </p:sp>
+      <p:sp>
+        <p:nvSpPr>
+          <p:cNvPr id="6" name="Text 4"/>
+          <p:cNvSpPr/>
+          <p:nvPr/>
+        </p:nvSpPr>
+        <p:spPr>
+          <a:xfrm>
+            <a:off x="731520" y="1188720"/>
+            <a:ext cx="7680960" cy="2743200"/>
+          </a:xfrm>
+          <a:prstGeom prst="rect">
+            <a:avLst/>
+          </a:prstGeom>
+          <a:noFill/>
+          <a:ln/>
+        </p:spPr>
+        <p:txBody>
+          <a:bodyPr wrap="square" rtlCol="0" anchor="t"/>
+          <a:lstStyle/>
+          <a:p>
+            <a:pPr marL="152400" indent="-152400">
+              <a:spcAft>
+                <a:spcPts val="800"/>
+              </a:spcAft>
               <a:buSzPct val="100000"/>
               <a:buChar char="•"/>
             </a:pPr>
             <a:r>
-              <a:rPr lang="en-US" sz="1600" dirty="0">
-                <a:solidFill>
-                  <a:srgbClr val="333333"/>
-                </a:solidFill>
-              </a:rPr>
-              <a:t>Talking Points:</a:t>
-            </a:r>
-            <a:endParaRPr lang="en-US" sz="1600" dirty="0"/>
-          </a:p>
-          <a:p>
-            <a:pPr marL="342900" indent="-342900">
+              <a:rPr lang="en-US" sz="1500" dirty="0">
+                <a:solidFill>
+                  <a:srgbClr val="1C1917"/>
+                </a:solidFill>
+                <a:latin typeface="Arial" pitchFamily="34" charset="0"/>
+                <a:ea typeface="Arial" pitchFamily="34" charset="-122"/>
+                <a:cs typeface="Arial" pitchFamily="34" charset="-120"/>
+              </a:rPr>
+              <a:t>Financial modeling blends accounting, finance, and applied mathematics.</a:t>
+            </a:r>
+            <a:endParaRPr lang="en-US" sz="1500" dirty="0"/>
+          </a:p>
+          <a:p>
+            <a:pPr marL="152400" indent="-152400">
+              <a:spcAft>
+                <a:spcPts val="800"/>
+              </a:spcAft>
               <a:buSzPct val="100000"/>
               <a:buChar char="•"/>
             </a:pPr>
             <a:r>
-              <a:rPr lang="en-US" sz="1600" dirty="0">
-                <a:solidFill>
-                  <a:srgbClr val="333333"/>
-                </a:solidFill>
-              </a:rPr>
-              <a:t>Financial models are used to evaluate investment opportunities, such as mergers and acquisitions.</a:t>
-            </a:r>
-            <a:endParaRPr lang="en-US" sz="1600" dirty="0"/>
-          </a:p>
-          <a:p>
-            <a:pPr marL="342900" indent="-342900">
+              <a:rPr lang="en-US" sz="1500" dirty="0">
+                <a:solidFill>
+                  <a:srgbClr val="1C1917"/>
+                </a:solidFill>
+                <a:latin typeface="Arial" pitchFamily="34" charset="0"/>
+                <a:ea typeface="Arial" pitchFamily="34" charset="-122"/>
+                <a:cs typeface="Arial" pitchFamily="34" charset="-120"/>
+              </a:rPr>
+              <a:t>Shared vocabulary lets analysts, managers, and auditors work without ambiguity.</a:t>
+            </a:r>
+            <a:endParaRPr lang="en-US" sz="1500" dirty="0"/>
+          </a:p>
+          <a:p>
+            <a:pPr marL="152400" indent="-152400">
+              <a:spcAft>
+                <a:spcPts val="800"/>
+              </a:spcAft>
               <a:buSzPct val="100000"/>
               <a:buChar char="•"/>
             </a:pPr>
             <a:r>
-              <a:rPr lang="en-US" sz="1600" dirty="0">
-                <a:solidFill>
-                  <a:srgbClr val="333333"/>
-                </a:solidFill>
-              </a:rPr>
-              <a:t>They are also used to assess the potential impact of different business strategies, such as expanding into new markets.</a:t>
-            </a:r>
-            <a:endParaRPr lang="en-US" sz="1600" dirty="0"/>
-          </a:p>
-          <a:p>
-            <a:pPr marL="342900" indent="-342900">
+              <a:rPr lang="en-US" sz="1500" dirty="0">
+                <a:solidFill>
+                  <a:srgbClr val="1C1917"/>
+                </a:solidFill>
+                <a:latin typeface="Arial" pitchFamily="34" charset="0"/>
+                <a:ea typeface="Arial" pitchFamily="34" charset="-122"/>
+                <a:cs typeface="Arial" pitchFamily="34" charset="-120"/>
+              </a:rPr>
+              <a:t>Precise terms enable clean audits and consistent communication across teams.</a:t>
+            </a:r>
+            <a:endParaRPr lang="en-US" sz="1500" dirty="0"/>
+          </a:p>
+          <a:p>
+            <a:pPr marL="152400" indent="-152400">
+              <a:spcAft>
+                <a:spcPts val="800"/>
+              </a:spcAft>
               <a:buSzPct val="100000"/>
               <a:buChar char="•"/>
             </a:pPr>
             <a:r>
-              <a:rPr lang="en-US" sz="1600" dirty="0">
-                <a:solidFill>
-                  <a:srgbClr val="333333"/>
-                </a:solidFill>
-              </a:rPr>
-              <a:t>Financial models can help companies identify areas for cost reduction and improve their overall financial performance.</a:t>
-            </a:r>
-            <a:endParaRPr lang="en-US" sz="1600" dirty="0"/>
-          </a:p>
-          <a:p>
-            <a:pPr marL="342900" indent="-342900">
+              <a:rPr lang="en-US" sz="1500" dirty="0">
+                <a:solidFill>
+                  <a:srgbClr val="1C1917"/>
+                </a:solidFill>
+                <a:latin typeface="Arial" pitchFamily="34" charset="0"/>
+                <a:ea typeface="Arial" pitchFamily="34" charset="-122"/>
+                <a:cs typeface="Arial" pitchFamily="34" charset="-120"/>
+              </a:rPr>
+              <a:t>Common language is a prerequisite before any model is built.</a:t>
+            </a:r>
+            <a:endParaRPr lang="en-US" sz="1500" dirty="0"/>
+          </a:p>
+        </p:txBody>
+      </p:sp>
+      <p:sp>
+        <p:nvSpPr>
+          <p:cNvPr id="7" name="Shape 5"/>
+          <p:cNvSpPr/>
+          <p:nvPr/>
+        </p:nvSpPr>
+        <p:spPr>
+          <a:xfrm>
+            <a:off x="731520" y="4041648"/>
+            <a:ext cx="7680960" cy="566928"/>
+          </a:xfrm>
+          <a:prstGeom prst="roundRect">
+            <a:avLst>
+              <a:gd name="adj" fmla="val 12903"/>
+            </a:avLst>
+          </a:prstGeom>
+          <a:solidFill>
+            <a:srgbClr val="B45309">
+              <a:alpha val="12000"/>
+            </a:srgbClr>
+          </a:solidFill>
+          <a:ln w="12700">
+            <a:solidFill>
+              <a:srgbClr val="B45309"/>
+            </a:solidFill>
+            <a:prstDash val="solid"/>
+          </a:ln>
+        </p:spPr>
+      </p:sp>
+      <p:sp>
+        <p:nvSpPr>
+          <p:cNvPr id="8" name="Text 6"/>
+          <p:cNvSpPr/>
+          <p:nvPr/>
+        </p:nvSpPr>
+        <p:spPr>
+          <a:xfrm>
+            <a:off x="868680" y="4087368"/>
+            <a:ext cx="7406640" cy="475488"/>
+          </a:xfrm>
+          <a:prstGeom prst="rect">
+            <a:avLst/>
+          </a:prstGeom>
+          <a:noFill/>
+          <a:ln/>
+        </p:spPr>
+        <p:txBody>
+          <a:bodyPr wrap="square" rtlCol="0" anchor="ctr"/>
+          <a:lstStyle/>
+          <a:p>
+            <a:pPr indent="0" marL="0">
+              <a:buNone/>
+            </a:pPr>
+            <a:r>
+              <a:rPr lang="en-US" sz="1100" b="1" dirty="0">
+                <a:solidFill>
+                  <a:srgbClr val="B45309"/>
+                </a:solidFill>
+                <a:latin typeface="Arial" pitchFamily="34" charset="0"/>
+                <a:ea typeface="Arial" pitchFamily="34" charset="-122"/>
+                <a:cs typeface="Arial" pitchFamily="34" charset="-120"/>
+              </a:rPr>
+              <a:t>Takeaway  </a:t>
+            </a:r>
+            <a:pPr indent="0" marL="0">
+              <a:buNone/>
+            </a:pPr>
+            <a:r>
+              <a:rPr lang="en-US" sz="1150" dirty="0">
+                <a:solidFill>
+                  <a:srgbClr val="1C1917"/>
+                </a:solidFill>
+                <a:latin typeface="Arial" pitchFamily="34" charset="0"/>
+                <a:ea typeface="Arial" pitchFamily="34" charset="-122"/>
+                <a:cs typeface="Arial" pitchFamily="34" charset="-120"/>
+              </a:rPr>
+              <a:t>A shared, precise vocabulary is the non-negotiable foundation of every financial model.</a:t>
+            </a:r>
+            <a:endParaRPr lang="en-US" sz="1100" dirty="0"/>
+          </a:p>
+        </p:txBody>
+      </p:sp>
+    </p:spTree>
+  </p:cSld>
+  <p:clrMapOvr>
+    <a:masterClrMapping/>
+  </p:clrMapOvr>
+</p:sld>
+</file>
+
+<file path=ppt/slides/slide4.xml><?xml version="1.0" encoding="utf-8"?>
+<p:sld xmlns:a="http://schemas.openxmlformats.org/drawingml/2006/main" xmlns:r="http://schemas.openxmlformats.org/officeDocument/2006/relationships" xmlns:p="http://schemas.openxmlformats.org/presentationml/2006/main">
+  <p:cSld name="Slide 4">
+    <p:bg>
+      <p:bgPr>
+        <a:solidFill>
+          <a:srgbClr val="FFFFFF"/>
+        </a:solidFill>
+      </p:bgPr>
+    </p:bg>
+    <p:spTree>
+      <p:nvGrpSpPr>
+        <p:cNvPr id="1" name=""/>
+        <p:cNvGrpSpPr/>
+        <p:nvPr/>
+      </p:nvGrpSpPr>
+      <p:grpSpPr>
+        <a:xfrm>
+          <a:off x="0" y="0"/>
+          <a:ext cx="0" cy="0"/>
+          <a:chOff x="0" y="0"/>
+          <a:chExt cx="0" cy="0"/>
+        </a:xfrm>
+      </p:grpSpPr>
+      <p:sp>
+        <p:nvSpPr>
+          <p:cNvPr id="2" name="Shape 0"/>
+          <p:cNvSpPr/>
+          <p:nvPr/>
+        </p:nvSpPr>
+        <p:spPr>
+          <a:xfrm>
+            <a:off x="411480" y="402336"/>
+            <a:ext cx="82296" cy="329184"/>
+          </a:xfrm>
+          <a:prstGeom prst="rect">
+            <a:avLst/>
+          </a:prstGeom>
+          <a:solidFill>
+            <a:srgbClr val="B45309"/>
+          </a:solidFill>
+          <a:ln/>
+        </p:spPr>
+      </p:sp>
+      <p:sp>
+        <p:nvSpPr>
+          <p:cNvPr id="3" name="Text 1"/>
+          <p:cNvSpPr/>
+          <p:nvPr/>
+        </p:nvSpPr>
+        <p:spPr>
+          <a:xfrm>
+            <a:off x="566928" y="292608"/>
+            <a:ext cx="8138160" cy="548640"/>
+          </a:xfrm>
+          <a:prstGeom prst="rect">
+            <a:avLst/>
+          </a:prstGeom>
+          <a:noFill/>
+          <a:ln/>
+        </p:spPr>
+        <p:txBody>
+          <a:bodyPr wrap="square" rtlCol="0" anchor="ctr"/>
+          <a:lstStyle/>
+          <a:p>
+            <a:pPr indent="0" marL="0">
+              <a:buNone/>
+            </a:pPr>
+            <a:r>
+              <a:rPr lang="en-US" sz="2100" b="1" dirty="0">
+                <a:solidFill>
+                  <a:srgbClr val="1C1917"/>
+                </a:solidFill>
+                <a:latin typeface="Arial" pitchFamily="34" charset="0"/>
+                <a:ea typeface="Arial" pitchFamily="34" charset="-122"/>
+                <a:cs typeface="Arial" pitchFamily="34" charset="-120"/>
+              </a:rPr>
+              <a:t>Core Definitions</a:t>
+            </a:r>
+            <a:endParaRPr lang="en-US" sz="2100" dirty="0"/>
+          </a:p>
+        </p:txBody>
+      </p:sp>
+      <p:sp>
+        <p:nvSpPr>
+          <p:cNvPr id="4" name="Shape 2"/>
+          <p:cNvSpPr/>
+          <p:nvPr/>
+        </p:nvSpPr>
+        <p:spPr>
+          <a:xfrm>
+            <a:off x="411480" y="960120"/>
+            <a:ext cx="8321040" cy="0"/>
+          </a:xfrm>
+          <a:prstGeom prst="line">
+            <a:avLst/>
+          </a:prstGeom>
+          <a:noFill/>
+          <a:ln w="12700">
+            <a:solidFill>
+              <a:srgbClr val="E7E5E4"/>
+            </a:solidFill>
+            <a:prstDash val="solid"/>
+          </a:ln>
+        </p:spPr>
+      </p:sp>
+      <p:sp>
+        <p:nvSpPr>
+          <p:cNvPr id="5" name="Text 3"/>
+          <p:cNvSpPr/>
+          <p:nvPr/>
+        </p:nvSpPr>
+        <p:spPr>
+          <a:xfrm>
+            <a:off x="411480" y="4864608"/>
+            <a:ext cx="8321040" cy="237744"/>
+          </a:xfrm>
+          <a:prstGeom prst="rect">
+            <a:avLst/>
+          </a:prstGeom>
+          <a:noFill/>
+          <a:ln/>
+        </p:spPr>
+        <p:txBody>
+          <a:bodyPr wrap="square" rtlCol="0" anchor="ctr"/>
+          <a:lstStyle/>
+          <a:p>
+            <a:pPr indent="0" marL="0">
+              <a:buNone/>
+            </a:pPr>
+            <a:r>
+              <a:rPr lang="en-US" sz="750" dirty="0">
+                <a:solidFill>
+                  <a:srgbClr val="AAAAAA"/>
+                </a:solidFill>
+                <a:latin typeface="Arial" pitchFamily="34" charset="0"/>
+                <a:ea typeface="Arial" pitchFamily="34" charset="-122"/>
+                <a:cs typeface="Arial" pitchFamily="34" charset="-120"/>
+              </a:rPr>
+              <a:t>Lesson Forge Pro (owner) — This content is educational material only and does not constitute financial, investment, or trading advice.</a:t>
+            </a:r>
+            <a:endParaRPr lang="en-US" sz="750" dirty="0"/>
+          </a:p>
+        </p:txBody>
+      </p:sp>
+      <p:sp>
+        <p:nvSpPr>
+          <p:cNvPr id="6" name="Text 4"/>
+          <p:cNvSpPr/>
+          <p:nvPr/>
+        </p:nvSpPr>
+        <p:spPr>
+          <a:xfrm>
+            <a:off x="731520" y="1188720"/>
+            <a:ext cx="7680960" cy="2743200"/>
+          </a:xfrm>
+          <a:prstGeom prst="rect">
+            <a:avLst/>
+          </a:prstGeom>
+          <a:noFill/>
+          <a:ln/>
+        </p:spPr>
+        <p:txBody>
+          <a:bodyPr wrap="square" rtlCol="0" anchor="t"/>
+          <a:lstStyle/>
+          <a:p>
+            <a:pPr marL="152400" indent="-152400">
+              <a:spcAft>
+                <a:spcPts val="800"/>
+              </a:spcAft>
               <a:buSzPct val="100000"/>
               <a:buChar char="•"/>
             </a:pPr>
             <a:r>
-              <a:rPr lang="en-US" sz="1600" dirty="0">
-                <a:solidFill>
-                  <a:srgbClr val="333333"/>
-                </a:solidFill>
-              </a:rPr>
-              <a:t>Example: A company considering an acquisition might use a financial model to evaluate the potential return on investment and determine whether the acquisition is likely to increase shareholder value.</a:t>
-            </a:r>
-            <a:endParaRPr lang="en-US" sz="1600" dirty="0"/>
-          </a:p>
-          <a:p>
-            <a:pPr marL="342900" indent="-342900">
+              <a:rPr lang="en-US" sz="1500" dirty="0">
+                <a:solidFill>
+                  <a:srgbClr val="1C1917"/>
+                </a:solidFill>
+                <a:latin typeface="Arial" pitchFamily="34" charset="0"/>
+                <a:ea typeface="Arial" pitchFamily="34" charset="-122"/>
+                <a:cs typeface="Arial" pitchFamily="34" charset="-120"/>
+              </a:rPr>
+              <a:t>A financial model is a structured, quantitative representation of a business situation.</a:t>
+            </a:r>
+            <a:endParaRPr lang="en-US" sz="1500" dirty="0"/>
+          </a:p>
+          <a:p>
+            <a:pPr marL="152400" indent="-152400">
+              <a:spcAft>
+                <a:spcPts val="800"/>
+              </a:spcAft>
               <a:buSzPct val="100000"/>
               <a:buChar char="•"/>
             </a:pPr>
             <a:r>
-              <a:rPr lang="en-US" sz="1600" dirty="0">
-                <a:solidFill>
-                  <a:srgbClr val="333333"/>
-                </a:solidFill>
-              </a:rPr>
-              <a:t>Anticipated Learner Questions:</a:t>
-            </a:r>
-            <a:endParaRPr lang="en-US" sz="1600" dirty="0"/>
-          </a:p>
-          <a:p>
-            <a:pPr marL="342900" indent="-342900">
+              <a:rPr lang="en-US" sz="1500" dirty="0">
+                <a:solidFill>
+                  <a:srgbClr val="1C1917"/>
+                </a:solidFill>
+                <a:latin typeface="Arial" pitchFamily="34" charset="0"/>
+                <a:ea typeface="Arial" pitchFamily="34" charset="-122"/>
+                <a:cs typeface="Arial" pitchFamily="34" charset="-120"/>
+              </a:rPr>
+              <a:t>Inputs are independently chosen values that drive model results.</a:t>
+            </a:r>
+            <a:endParaRPr lang="en-US" sz="1500" dirty="0"/>
+          </a:p>
+          <a:p>
+            <a:pPr marL="152400" indent="-152400">
+              <a:spcAft>
+                <a:spcPts val="800"/>
+              </a:spcAft>
               <a:buSzPct val="100000"/>
               <a:buChar char="•"/>
             </a:pPr>
             <a:r>
-              <a:rPr lang="en-US" sz="1600" dirty="0">
-                <a:solidFill>
-                  <a:srgbClr val="333333"/>
-                </a:solidFill>
-              </a:rPr>
-              <a:t>Q: How do financial models support investment decisions?</a:t>
-            </a:r>
-            <a:endParaRPr lang="en-US" sz="1600" dirty="0"/>
-          </a:p>
-          <a:p>
-            <a:pPr marL="342900" indent="-342900">
+              <a:rPr lang="en-US" sz="1500" dirty="0">
+                <a:solidFill>
+                  <a:srgbClr val="1C1917"/>
+                </a:solidFill>
+                <a:latin typeface="Arial" pitchFamily="34" charset="0"/>
+                <a:ea typeface="Arial" pitchFamily="34" charset="-122"/>
+                <a:cs typeface="Arial" pitchFamily="34" charset="-120"/>
+              </a:rPr>
+              <a:t>Outputs are calculated results such as net income or enterprise value.</a:t>
+            </a:r>
+            <a:endParaRPr lang="en-US" sz="1500" dirty="0"/>
+          </a:p>
+          <a:p>
+            <a:pPr marL="152400" indent="-152400">
+              <a:spcAft>
+                <a:spcPts val="800"/>
+              </a:spcAft>
               <a:buSzPct val="100000"/>
               <a:buChar char="•"/>
             </a:pPr>
             <a:r>
-              <a:rPr lang="en-US" sz="1600" dirty="0">
-                <a:solidFill>
-                  <a:srgbClr val="333333"/>
-                </a:solidFill>
-              </a:rPr>
-              <a:t>A: Financial models provide a framework for evaluating investment opportunities and assessing the potential risks and returns.</a:t>
-            </a:r>
-            <a:endParaRPr lang="en-US" sz="1600" dirty="0"/>
-          </a:p>
-          <a:p>
-            <a:pPr marL="342900" indent="-342900">
+              <a:rPr lang="en-US" sz="1500" dirty="0">
+                <a:solidFill>
+                  <a:srgbClr val="1C1917"/>
+                </a:solidFill>
+                <a:latin typeface="Arial" pitchFamily="34" charset="0"/>
+                <a:ea typeface="Arial" pitchFamily="34" charset="-122"/>
+                <a:cs typeface="Arial" pitchFamily="34" charset="-120"/>
+              </a:rPr>
+              <a:t>Drivers are inputs whose small changes swing key outputs materially.</a:t>
+            </a:r>
+            <a:endParaRPr lang="en-US" sz="1500" dirty="0"/>
+          </a:p>
+          <a:p>
+            <a:pPr marL="152400" indent="-152400">
+              <a:spcAft>
+                <a:spcPts val="800"/>
+              </a:spcAft>
               <a:buSzPct val="100000"/>
               <a:buChar char="•"/>
             </a:pPr>
             <a:r>
-              <a:rPr lang="en-US" sz="1600" dirty="0">
-                <a:solidFill>
-                  <a:srgbClr val="333333"/>
-                </a:solidFill>
-              </a:rPr>
-              <a:t>Q: Can financial models be used in other areas of business, such as marketing or operations?</a:t>
-            </a:r>
-            <a:endParaRPr lang="en-US" sz="1600" dirty="0"/>
-          </a:p>
-          <a:p>
-            <a:pPr marL="342900" indent="-342900">
+              <a:rPr lang="en-US" sz="1500" dirty="0">
+                <a:solidFill>
+                  <a:srgbClr val="1C1917"/>
+                </a:solidFill>
+                <a:latin typeface="Arial" pitchFamily="34" charset="0"/>
+                <a:ea typeface="Arial" pitchFamily="34" charset="-122"/>
+                <a:cs typeface="Arial" pitchFamily="34" charset="-120"/>
+              </a:rPr>
+              <a:t>Models demonstrate transaction possibility under assumptions, not perfect reality.</a:t>
+            </a:r>
+            <a:endParaRPr lang="en-US" sz="1500" dirty="0"/>
+          </a:p>
+        </p:txBody>
+      </p:sp>
+      <p:sp>
+        <p:nvSpPr>
+          <p:cNvPr id="7" name="Shape 5"/>
+          <p:cNvSpPr/>
+          <p:nvPr/>
+        </p:nvSpPr>
+        <p:spPr>
+          <a:xfrm>
+            <a:off x="731520" y="4041648"/>
+            <a:ext cx="7680960" cy="566928"/>
+          </a:xfrm>
+          <a:prstGeom prst="roundRect">
+            <a:avLst>
+              <a:gd name="adj" fmla="val 12903"/>
+            </a:avLst>
+          </a:prstGeom>
+          <a:solidFill>
+            <a:srgbClr val="B45309">
+              <a:alpha val="12000"/>
+            </a:srgbClr>
+          </a:solidFill>
+          <a:ln w="12700">
+            <a:solidFill>
+              <a:srgbClr val="B45309"/>
+            </a:solidFill>
+            <a:prstDash val="solid"/>
+          </a:ln>
+        </p:spPr>
+      </p:sp>
+      <p:sp>
+        <p:nvSpPr>
+          <p:cNvPr id="8" name="Text 6"/>
+          <p:cNvSpPr/>
+          <p:nvPr/>
+        </p:nvSpPr>
+        <p:spPr>
+          <a:xfrm>
+            <a:off x="868680" y="4087368"/>
+            <a:ext cx="7406640" cy="475488"/>
+          </a:xfrm>
+          <a:prstGeom prst="rect">
+            <a:avLst/>
+          </a:prstGeom>
+          <a:noFill/>
+          <a:ln/>
+        </p:spPr>
+        <p:txBody>
+          <a:bodyPr wrap="square" rtlCol="0" anchor="ctr"/>
+          <a:lstStyle/>
+          <a:p>
+            <a:pPr indent="0" marL="0">
+              <a:buNone/>
+            </a:pPr>
+            <a:r>
+              <a:rPr lang="en-US" sz="1100" b="1" dirty="0">
+                <a:solidFill>
+                  <a:srgbClr val="B45309"/>
+                </a:solidFill>
+                <a:latin typeface="Arial" pitchFamily="34" charset="0"/>
+                <a:ea typeface="Arial" pitchFamily="34" charset="-122"/>
+                <a:cs typeface="Arial" pitchFamily="34" charset="-120"/>
+              </a:rPr>
+              <a:t>Takeaway  </a:t>
+            </a:r>
+            <a:pPr indent="0" marL="0">
+              <a:buNone/>
+            </a:pPr>
+            <a:r>
+              <a:rPr lang="en-US" sz="1150" dirty="0">
+                <a:solidFill>
+                  <a:srgbClr val="1C1917"/>
+                </a:solidFill>
+                <a:latin typeface="Arial" pitchFamily="34" charset="0"/>
+                <a:ea typeface="Arial" pitchFamily="34" charset="-122"/>
+                <a:cs typeface="Arial" pitchFamily="34" charset="-120"/>
+              </a:rPr>
+              <a:t>Mastering input, output, and driver distinctions is the starting point for building any model.</a:t>
+            </a:r>
+            <a:endParaRPr lang="en-US" sz="1100" dirty="0"/>
+          </a:p>
+        </p:txBody>
+      </p:sp>
+    </p:spTree>
+  </p:cSld>
+  <p:clrMapOvr>
+    <a:masterClrMapping/>
+  </p:clrMapOvr>
+</p:sld>
+</file>
+
+<file path=ppt/slides/slide5.xml><?xml version="1.0" encoding="utf-8"?>
+<p:sld xmlns:a="http://schemas.openxmlformats.org/drawingml/2006/main" xmlns:r="http://schemas.openxmlformats.org/officeDocument/2006/relationships" xmlns:p="http://schemas.openxmlformats.org/presentationml/2006/main">
+  <p:cSld name="Slide 5">
+    <p:bg>
+      <p:bgPr>
+        <a:solidFill>
+          <a:srgbClr val="FFFFFF"/>
+        </a:solidFill>
+      </p:bgPr>
+    </p:bg>
+    <p:spTree>
+      <p:nvGrpSpPr>
+        <p:cNvPr id="1" name=""/>
+        <p:cNvGrpSpPr/>
+        <p:nvPr/>
+      </p:nvGrpSpPr>
+      <p:grpSpPr>
+        <a:xfrm>
+          <a:off x="0" y="0"/>
+          <a:ext cx="0" cy="0"/>
+          <a:chOff x="0" y="0"/>
+          <a:chExt cx="0" cy="0"/>
+        </a:xfrm>
+      </p:grpSpPr>
+      <p:sp>
+        <p:nvSpPr>
+          <p:cNvPr id="2" name="Shape 0"/>
+          <p:cNvSpPr/>
+          <p:nvPr/>
+        </p:nvSpPr>
+        <p:spPr>
+          <a:xfrm>
+            <a:off x="411480" y="402336"/>
+            <a:ext cx="82296" cy="329184"/>
+          </a:xfrm>
+          <a:prstGeom prst="rect">
+            <a:avLst/>
+          </a:prstGeom>
+          <a:solidFill>
+            <a:srgbClr val="B45309"/>
+          </a:solidFill>
+          <a:ln/>
+        </p:spPr>
+      </p:sp>
+      <p:sp>
+        <p:nvSpPr>
+          <p:cNvPr id="3" name="Text 1"/>
+          <p:cNvSpPr/>
+          <p:nvPr/>
+        </p:nvSpPr>
+        <p:spPr>
+          <a:xfrm>
+            <a:off x="566928" y="292608"/>
+            <a:ext cx="8138160" cy="548640"/>
+          </a:xfrm>
+          <a:prstGeom prst="rect">
+            <a:avLst/>
+          </a:prstGeom>
+          <a:noFill/>
+          <a:ln/>
+        </p:spPr>
+        <p:txBody>
+          <a:bodyPr wrap="square" rtlCol="0" anchor="ctr"/>
+          <a:lstStyle/>
+          <a:p>
+            <a:pPr indent="0" marL="0">
+              <a:buNone/>
+            </a:pPr>
+            <a:r>
+              <a:rPr lang="en-US" sz="2100" b="1" dirty="0">
+                <a:solidFill>
+                  <a:srgbClr val="1C1917"/>
+                </a:solidFill>
+                <a:latin typeface="Arial" pitchFamily="34" charset="0"/>
+                <a:ea typeface="Arial" pitchFamily="34" charset="-122"/>
+                <a:cs typeface="Arial" pitchFamily="34" charset="-120"/>
+              </a:rPr>
+              <a:t>Where Financial Modeling Fits in Practice</a:t>
+            </a:r>
+            <a:endParaRPr lang="en-US" sz="2100" dirty="0"/>
+          </a:p>
+        </p:txBody>
+      </p:sp>
+      <p:sp>
+        <p:nvSpPr>
+          <p:cNvPr id="4" name="Shape 2"/>
+          <p:cNvSpPr/>
+          <p:nvPr/>
+        </p:nvSpPr>
+        <p:spPr>
+          <a:xfrm>
+            <a:off x="411480" y="960120"/>
+            <a:ext cx="8321040" cy="0"/>
+          </a:xfrm>
+          <a:prstGeom prst="line">
+            <a:avLst/>
+          </a:prstGeom>
+          <a:noFill/>
+          <a:ln w="12700">
+            <a:solidFill>
+              <a:srgbClr val="E7E5E4"/>
+            </a:solidFill>
+            <a:prstDash val="solid"/>
+          </a:ln>
+        </p:spPr>
+      </p:sp>
+      <p:sp>
+        <p:nvSpPr>
+          <p:cNvPr id="5" name="Text 3"/>
+          <p:cNvSpPr/>
+          <p:nvPr/>
+        </p:nvSpPr>
+        <p:spPr>
+          <a:xfrm>
+            <a:off x="411480" y="4864608"/>
+            <a:ext cx="8321040" cy="237744"/>
+          </a:xfrm>
+          <a:prstGeom prst="rect">
+            <a:avLst/>
+          </a:prstGeom>
+          <a:noFill/>
+          <a:ln/>
+        </p:spPr>
+        <p:txBody>
+          <a:bodyPr wrap="square" rtlCol="0" anchor="ctr"/>
+          <a:lstStyle/>
+          <a:p>
+            <a:pPr indent="0" marL="0">
+              <a:buNone/>
+            </a:pPr>
+            <a:r>
+              <a:rPr lang="en-US" sz="750" dirty="0">
+                <a:solidFill>
+                  <a:srgbClr val="AAAAAA"/>
+                </a:solidFill>
+                <a:latin typeface="Arial" pitchFamily="34" charset="0"/>
+                <a:ea typeface="Arial" pitchFamily="34" charset="-122"/>
+                <a:cs typeface="Arial" pitchFamily="34" charset="-120"/>
+              </a:rPr>
+              <a:t>Lesson Forge Pro (owner) — This content is educational material only and does not constitute financial, investment, or trading advice.</a:t>
+            </a:r>
+            <a:endParaRPr lang="en-US" sz="750" dirty="0"/>
+          </a:p>
+        </p:txBody>
+      </p:sp>
+      <p:sp>
+        <p:nvSpPr>
+          <p:cNvPr id="6" name="Text 4"/>
+          <p:cNvSpPr/>
+          <p:nvPr/>
+        </p:nvSpPr>
+        <p:spPr>
+          <a:xfrm>
+            <a:off x="731520" y="1188720"/>
+            <a:ext cx="7680960" cy="2743200"/>
+          </a:xfrm>
+          <a:prstGeom prst="rect">
+            <a:avLst/>
+          </a:prstGeom>
+          <a:noFill/>
+          <a:ln/>
+        </p:spPr>
+        <p:txBody>
+          <a:bodyPr wrap="square" rtlCol="0" anchor="t"/>
+          <a:lstStyle/>
+          <a:p>
+            <a:pPr marL="152400" indent="-152400">
+              <a:spcAft>
+                <a:spcPts val="800"/>
+              </a:spcAft>
               <a:buSzPct val="100000"/>
               <a:buChar char="•"/>
             </a:pPr>
             <a:r>
-              <a:rPr lang="en-US" sz="1600" dirty="0">
-                <a:solidFill>
-                  <a:srgbClr val="333333"/>
-                </a:solidFill>
-              </a:rPr>
-              <a:t>A: Yes, financial models can be used to support decision-making in a variety of areas, including marketing and operations.</a:t>
-            </a:r>
-            <a:endParaRPr lang="en-US" sz="1600" dirty="0"/>
-          </a:p>
-        </p:txBody>
-      </p:sp>
-      <p:sp>
-        <p:nvSpPr>
-          <p:cNvPr id="4" name="Text 2"/>
-          <p:cNvSpPr/>
-          <p:nvPr/>
-        </p:nvSpPr>
-        <p:spPr>
-          <a:xfrm>
-            <a:off x="457200" y="4709160"/>
-            <a:ext cx="8229600" cy="320040"/>
+              <a:rPr lang="en-US" sz="1500" dirty="0">
+                <a:solidFill>
+                  <a:srgbClr val="1C1917"/>
+                </a:solidFill>
+                <a:latin typeface="Arial" pitchFamily="34" charset="0"/>
+                <a:ea typeface="Arial" pitchFamily="34" charset="-122"/>
+                <a:cs typeface="Arial" pitchFamily="34" charset="-120"/>
+              </a:rPr>
+              <a:t>Models appear in budgeting, M&amp;A, LBO, project finance, and equity research.</a:t>
+            </a:r>
+            <a:endParaRPr lang="en-US" sz="1500" dirty="0"/>
+          </a:p>
+          <a:p>
+            <a:pPr marL="152400" indent="-152400">
+              <a:spcAft>
+                <a:spcPts val="800"/>
+              </a:spcAft>
+              <a:buSzPct val="100000"/>
+              <a:buChar char="•"/>
+            </a:pPr>
+            <a:r>
+              <a:rPr lang="en-US" sz="1500" dirty="0">
+                <a:solidFill>
+                  <a:srgbClr val="1C1917"/>
+                </a:solidFill>
+                <a:latin typeface="Arial" pitchFamily="34" charset="0"/>
+                <a:ea typeface="Arial" pitchFamily="34" charset="-122"/>
+                <a:cs typeface="Arial" pitchFamily="34" charset="-120"/>
+              </a:rPr>
+              <a:t>They translate historical financial statements into forward-looking projections.</a:t>
+            </a:r>
+            <a:endParaRPr lang="en-US" sz="1500" dirty="0"/>
+          </a:p>
+          <a:p>
+            <a:pPr marL="152400" indent="-152400">
+              <a:spcAft>
+                <a:spcPts val="800"/>
+              </a:spcAft>
+              <a:buSzPct val="100000"/>
+              <a:buChar char="•"/>
+            </a:pPr>
+            <a:r>
+              <a:rPr lang="en-US" sz="1500" dirty="0">
+                <a:solidFill>
+                  <a:srgbClr val="1C1917"/>
+                </a:solidFill>
+                <a:latin typeface="Arial" pitchFamily="34" charset="0"/>
+                <a:ea typeface="Arial" pitchFamily="34" charset="-122"/>
+                <a:cs typeface="Arial" pitchFamily="34" charset="-120"/>
+              </a:rPr>
+              <a:t>Financial statements must be understandable, relevant, reliable, and comparable.</a:t>
+            </a:r>
+            <a:endParaRPr lang="en-US" sz="1500" dirty="0"/>
+          </a:p>
+          <a:p>
+            <a:pPr marL="152400" indent="-152400">
+              <a:spcAft>
+                <a:spcPts val="800"/>
+              </a:spcAft>
+              <a:buSzPct val="100000"/>
+              <a:buChar char="•"/>
+            </a:pPr>
+            <a:r>
+              <a:rPr lang="en-US" sz="1500" dirty="0">
+                <a:solidFill>
+                  <a:srgbClr val="1C1917"/>
+                </a:solidFill>
+                <a:latin typeface="Arial" pitchFamily="34" charset="0"/>
+                <a:ea typeface="Arial" pitchFamily="34" charset="-122"/>
+                <a:cs typeface="Arial" pitchFamily="34" charset="-120"/>
+              </a:rPr>
+              <a:t>Well-built models preserve those statement qualities in every output.</a:t>
+            </a:r>
+            <a:endParaRPr lang="en-US" sz="1500" dirty="0"/>
+          </a:p>
+        </p:txBody>
+      </p:sp>
+      <p:sp>
+        <p:nvSpPr>
+          <p:cNvPr id="7" name="Shape 5"/>
+          <p:cNvSpPr/>
+          <p:nvPr/>
+        </p:nvSpPr>
+        <p:spPr>
+          <a:xfrm>
+            <a:off x="731520" y="4041648"/>
+            <a:ext cx="7680960" cy="566928"/>
+          </a:xfrm>
+          <a:prstGeom prst="roundRect">
+            <a:avLst>
+              <a:gd name="adj" fmla="val 12903"/>
+            </a:avLst>
+          </a:prstGeom>
+          <a:solidFill>
+            <a:srgbClr val="B45309">
+              <a:alpha val="12000"/>
+            </a:srgbClr>
+          </a:solidFill>
+          <a:ln w="12700">
+            <a:solidFill>
+              <a:srgbClr val="B45309"/>
+            </a:solidFill>
+            <a:prstDash val="solid"/>
+          </a:ln>
+        </p:spPr>
+      </p:sp>
+      <p:sp>
+        <p:nvSpPr>
+          <p:cNvPr id="8" name="Text 6"/>
+          <p:cNvSpPr/>
+          <p:nvPr/>
+        </p:nvSpPr>
+        <p:spPr>
+          <a:xfrm>
+            <a:off x="868680" y="4087368"/>
+            <a:ext cx="7406640" cy="475488"/>
           </a:xfrm>
           <a:prstGeom prst="rect">
             <a:avLst/>
@@ -3593,14 +7913,2241 @@
               <a:buNone/>
             </a:pPr>
             <a:r>
-              <a:rPr lang="en-US" sz="800" dirty="0">
+              <a:rPr lang="en-US" sz="1100" b="1" dirty="0">
+                <a:solidFill>
+                  <a:srgbClr val="B45309"/>
+                </a:solidFill>
+                <a:latin typeface="Arial" pitchFamily="34" charset="0"/>
+                <a:ea typeface="Arial" pitchFamily="34" charset="-122"/>
+                <a:cs typeface="Arial" pitchFamily="34" charset="-120"/>
+              </a:rPr>
+              <a:t>Takeaway  </a:t>
+            </a:r>
+            <a:pPr indent="0" marL="0">
+              <a:buNone/>
+            </a:pPr>
+            <a:r>
+              <a:rPr lang="en-US" sz="1150" dirty="0">
+                <a:solidFill>
+                  <a:srgbClr val="1C1917"/>
+                </a:solidFill>
+                <a:latin typeface="Arial" pitchFamily="34" charset="0"/>
+                <a:ea typeface="Arial" pitchFamily="34" charset="-122"/>
+                <a:cs typeface="Arial" pitchFamily="34" charset="-120"/>
+              </a:rPr>
+              <a:t>Financial models bridge historical reporting and forward-looking economic decisions across all finance disciplines.</a:t>
+            </a:r>
+            <a:endParaRPr lang="en-US" sz="1100" dirty="0"/>
+          </a:p>
+        </p:txBody>
+      </p:sp>
+    </p:spTree>
+  </p:cSld>
+  <p:clrMapOvr>
+    <a:masterClrMapping/>
+  </p:clrMapOvr>
+</p:sld>
+</file>
+
+<file path=ppt/slides/slide6.xml><?xml version="1.0" encoding="utf-8"?>
+<p:sld xmlns:a="http://schemas.openxmlformats.org/drawingml/2006/main" xmlns:r="http://schemas.openxmlformats.org/officeDocument/2006/relationships" xmlns:p="http://schemas.openxmlformats.org/presentationml/2006/main">
+  <p:cSld name="Slide 6">
+    <p:bg>
+      <p:bgPr>
+        <a:solidFill>
+          <a:srgbClr val="FFFFFF"/>
+        </a:solidFill>
+      </p:bgPr>
+    </p:bg>
+    <p:spTree>
+      <p:nvGrpSpPr>
+        <p:cNvPr id="1" name=""/>
+        <p:cNvGrpSpPr/>
+        <p:nvPr/>
+      </p:nvGrpSpPr>
+      <p:grpSpPr>
+        <a:xfrm>
+          <a:off x="0" y="0"/>
+          <a:ext cx="0" cy="0"/>
+          <a:chOff x="0" y="0"/>
+          <a:chExt cx="0" cy="0"/>
+        </a:xfrm>
+      </p:grpSpPr>
+      <p:sp>
+        <p:nvSpPr>
+          <p:cNvPr id="2" name="Shape 0"/>
+          <p:cNvSpPr/>
+          <p:nvPr/>
+        </p:nvSpPr>
+        <p:spPr>
+          <a:xfrm>
+            <a:off x="411480" y="402336"/>
+            <a:ext cx="82296" cy="329184"/>
+          </a:xfrm>
+          <a:prstGeom prst="rect">
+            <a:avLst/>
+          </a:prstGeom>
+          <a:solidFill>
+            <a:srgbClr val="B45309"/>
+          </a:solidFill>
+          <a:ln/>
+        </p:spPr>
+      </p:sp>
+      <p:sp>
+        <p:nvSpPr>
+          <p:cNvPr id="3" name="Text 1"/>
+          <p:cNvSpPr/>
+          <p:nvPr/>
+        </p:nvSpPr>
+        <p:spPr>
+          <a:xfrm>
+            <a:off x="566928" y="292608"/>
+            <a:ext cx="8138160" cy="548640"/>
+          </a:xfrm>
+          <a:prstGeom prst="rect">
+            <a:avLst/>
+          </a:prstGeom>
+          <a:noFill/>
+          <a:ln/>
+        </p:spPr>
+        <p:txBody>
+          <a:bodyPr wrap="square" rtlCol="0" anchor="ctr"/>
+          <a:lstStyle/>
+          <a:p>
+            <a:pPr indent="0" marL="0">
+              <a:buNone/>
+            </a:pPr>
+            <a:r>
+              <a:rPr lang="en-US" sz="2100" b="1" dirty="0">
+                <a:solidFill>
+                  <a:srgbClr val="1C1917"/>
+                </a:solidFill>
+                <a:latin typeface="Arial" pitchFamily="34" charset="0"/>
+                <a:ea typeface="Arial" pitchFamily="34" charset="-122"/>
+                <a:cs typeface="Arial" pitchFamily="34" charset="-120"/>
+              </a:rPr>
+              <a:t>Notation Conventions</a:t>
+            </a:r>
+            <a:endParaRPr lang="en-US" sz="2100" dirty="0"/>
+          </a:p>
+        </p:txBody>
+      </p:sp>
+      <p:sp>
+        <p:nvSpPr>
+          <p:cNvPr id="4" name="Shape 2"/>
+          <p:cNvSpPr/>
+          <p:nvPr/>
+        </p:nvSpPr>
+        <p:spPr>
+          <a:xfrm>
+            <a:off x="411480" y="960120"/>
+            <a:ext cx="8321040" cy="0"/>
+          </a:xfrm>
+          <a:prstGeom prst="line">
+            <a:avLst/>
+          </a:prstGeom>
+          <a:noFill/>
+          <a:ln w="12700">
+            <a:solidFill>
+              <a:srgbClr val="E7E5E4"/>
+            </a:solidFill>
+            <a:prstDash val="solid"/>
+          </a:ln>
+        </p:spPr>
+      </p:sp>
+      <p:sp>
+        <p:nvSpPr>
+          <p:cNvPr id="5" name="Text 3"/>
+          <p:cNvSpPr/>
+          <p:nvPr/>
+        </p:nvSpPr>
+        <p:spPr>
+          <a:xfrm>
+            <a:off x="411480" y="4864608"/>
+            <a:ext cx="8321040" cy="237744"/>
+          </a:xfrm>
+          <a:prstGeom prst="rect">
+            <a:avLst/>
+          </a:prstGeom>
+          <a:noFill/>
+          <a:ln/>
+        </p:spPr>
+        <p:txBody>
+          <a:bodyPr wrap="square" rtlCol="0" anchor="ctr"/>
+          <a:lstStyle/>
+          <a:p>
+            <a:pPr indent="0" marL="0">
+              <a:buNone/>
+            </a:pPr>
+            <a:r>
+              <a:rPr lang="en-US" sz="750" dirty="0">
                 <a:solidFill>
                   <a:srgbClr val="AAAAAA"/>
                 </a:solidFill>
+                <a:latin typeface="Arial" pitchFamily="34" charset="0"/>
+                <a:ea typeface="Arial" pitchFamily="34" charset="-122"/>
+                <a:cs typeface="Arial" pitchFamily="34" charset="-120"/>
               </a:rPr>
               <a:t>Lesson Forge Pro (owner) — This content is educational material only and does not constitute financial, investment, or trading advice.</a:t>
             </a:r>
-            <a:endParaRPr lang="en-US" sz="800" dirty="0"/>
+            <a:endParaRPr lang="en-US" sz="750" dirty="0"/>
+          </a:p>
+        </p:txBody>
+      </p:sp>
+      <p:sp>
+        <p:nvSpPr>
+          <p:cNvPr id="6" name="Text 4"/>
+          <p:cNvSpPr/>
+          <p:nvPr/>
+        </p:nvSpPr>
+        <p:spPr>
+          <a:xfrm>
+            <a:off x="731520" y="1188720"/>
+            <a:ext cx="7680960" cy="2743200"/>
+          </a:xfrm>
+          <a:prstGeom prst="rect">
+            <a:avLst/>
+          </a:prstGeom>
+          <a:noFill/>
+          <a:ln/>
+        </p:spPr>
+        <p:txBody>
+          <a:bodyPr wrap="square" rtlCol="0" anchor="t"/>
+          <a:lstStyle/>
+          <a:p>
+            <a:pPr marL="152400" indent="-152400">
+              <a:spcAft>
+                <a:spcPts val="800"/>
+              </a:spcAft>
+              <a:buSzPct val="100000"/>
+              <a:buChar char="•"/>
+            </a:pPr>
+            <a:r>
+              <a:rPr lang="en-US" sz="1500" dirty="0">
+                <a:solidFill>
+                  <a:srgbClr val="1C1917"/>
+                </a:solidFill>
+                <a:latin typeface="Arial" pitchFamily="34" charset="0"/>
+                <a:ea typeface="Arial" pitchFamily="34" charset="-122"/>
+                <a:cs typeface="Arial" pitchFamily="34" charset="-120"/>
+              </a:rPr>
+              <a:t>Blue font marks hardcoded inputs; black font marks formula-driven cells.</a:t>
+            </a:r>
+            <a:endParaRPr lang="en-US" sz="1500" dirty="0"/>
+          </a:p>
+          <a:p>
+            <a:pPr marL="152400" indent="-152400">
+              <a:spcAft>
+                <a:spcPts val="800"/>
+              </a:spcAft>
+              <a:buSzPct val="100000"/>
+              <a:buChar char="•"/>
+            </a:pPr>
+            <a:r>
+              <a:rPr lang="en-US" sz="1500" dirty="0">
+                <a:solidFill>
+                  <a:srgbClr val="1C1917"/>
+                </a:solidFill>
+                <a:latin typeface="Arial" pitchFamily="34" charset="0"/>
+                <a:ea typeface="Arial" pitchFamily="34" charset="-122"/>
+                <a:cs typeface="Arial" pitchFamily="34" charset="-120"/>
+              </a:rPr>
+              <a:t>Green font signals a link to another worksheet or external file.</a:t>
+            </a:r>
+            <a:endParaRPr lang="en-US" sz="1500" dirty="0"/>
+          </a:p>
+          <a:p>
+            <a:pPr marL="152400" indent="-152400">
+              <a:spcAft>
+                <a:spcPts val="800"/>
+              </a:spcAft>
+              <a:buSzPct val="100000"/>
+              <a:buChar char="•"/>
+            </a:pPr>
+            <a:r>
+              <a:rPr lang="en-US" sz="1500" dirty="0">
+                <a:solidFill>
+                  <a:srgbClr val="1C1917"/>
+                </a:solidFill>
+                <a:latin typeface="Arial" pitchFamily="34" charset="0"/>
+                <a:ea typeface="Arial" pitchFamily="34" charset="-122"/>
+                <a:cs typeface="Arial" pitchFamily="34" charset="-120"/>
+              </a:rPr>
+              <a:t>t indexes time periods; r is the discount rate; g is the growth rate.</a:t>
+            </a:r>
+            <a:endParaRPr lang="en-US" sz="1500" dirty="0"/>
+          </a:p>
+          <a:p>
+            <a:pPr marL="152400" indent="-152400">
+              <a:spcAft>
+                <a:spcPts val="800"/>
+              </a:spcAft>
+              <a:buSzPct val="100000"/>
+              <a:buChar char="•"/>
+            </a:pPr>
+            <a:r>
+              <a:rPr lang="en-US" sz="1500" dirty="0">
+                <a:solidFill>
+                  <a:srgbClr val="1C1917"/>
+                </a:solidFill>
+                <a:latin typeface="Arial" pitchFamily="34" charset="0"/>
+                <a:ea typeface="Arial" pitchFamily="34" charset="-122"/>
+                <a:cs typeface="Arial" pitchFamily="34" charset="-120"/>
+              </a:rPr>
+              <a:t>Present value is expressed as PV = CF_t ÷ (1 + r)^t.</a:t>
+            </a:r>
+            <a:endParaRPr lang="en-US" sz="1500" dirty="0"/>
+          </a:p>
+          <a:p>
+            <a:pPr marL="152400" indent="-152400">
+              <a:spcAft>
+                <a:spcPts val="800"/>
+              </a:spcAft>
+              <a:buSzPct val="100000"/>
+              <a:buChar char="•"/>
+            </a:pPr>
+            <a:r>
+              <a:rPr lang="en-US" sz="1500" dirty="0">
+                <a:solidFill>
+                  <a:srgbClr val="1C1917"/>
+                </a:solidFill>
+                <a:latin typeface="Arial" pitchFamily="34" charset="0"/>
+                <a:ea typeface="Arial" pitchFamily="34" charset="-122"/>
+                <a:cs typeface="Arial" pitchFamily="34" charset="-120"/>
+              </a:rPr>
+              <a:t>Consistent notation prevents errors and accelerates model review.</a:t>
+            </a:r>
+            <a:endParaRPr lang="en-US" sz="1500" dirty="0"/>
+          </a:p>
+        </p:txBody>
+      </p:sp>
+      <p:sp>
+        <p:nvSpPr>
+          <p:cNvPr id="7" name="Shape 5"/>
+          <p:cNvSpPr/>
+          <p:nvPr/>
+        </p:nvSpPr>
+        <p:spPr>
+          <a:xfrm>
+            <a:off x="731520" y="4041648"/>
+            <a:ext cx="7680960" cy="566928"/>
+          </a:xfrm>
+          <a:prstGeom prst="roundRect">
+            <a:avLst>
+              <a:gd name="adj" fmla="val 12903"/>
+            </a:avLst>
+          </a:prstGeom>
+          <a:solidFill>
+            <a:srgbClr val="B45309">
+              <a:alpha val="12000"/>
+            </a:srgbClr>
+          </a:solidFill>
+          <a:ln w="12700">
+            <a:solidFill>
+              <a:srgbClr val="B45309"/>
+            </a:solidFill>
+            <a:prstDash val="solid"/>
+          </a:ln>
+        </p:spPr>
+      </p:sp>
+      <p:sp>
+        <p:nvSpPr>
+          <p:cNvPr id="8" name="Text 6"/>
+          <p:cNvSpPr/>
+          <p:nvPr/>
+        </p:nvSpPr>
+        <p:spPr>
+          <a:xfrm>
+            <a:off x="868680" y="4087368"/>
+            <a:ext cx="7406640" cy="475488"/>
+          </a:xfrm>
+          <a:prstGeom prst="rect">
+            <a:avLst/>
+          </a:prstGeom>
+          <a:noFill/>
+          <a:ln/>
+        </p:spPr>
+        <p:txBody>
+          <a:bodyPr wrap="square" rtlCol="0" anchor="ctr"/>
+          <a:lstStyle/>
+          <a:p>
+            <a:pPr indent="0" marL="0">
+              <a:buNone/>
+            </a:pPr>
+            <a:r>
+              <a:rPr lang="en-US" sz="1100" b="1" dirty="0">
+                <a:solidFill>
+                  <a:srgbClr val="B45309"/>
+                </a:solidFill>
+                <a:latin typeface="Arial" pitchFamily="34" charset="0"/>
+                <a:ea typeface="Arial" pitchFamily="34" charset="-122"/>
+                <a:cs typeface="Arial" pitchFamily="34" charset="-120"/>
+              </a:rPr>
+              <a:t>Takeaway  </a:t>
+            </a:r>
+            <a:pPr indent="0" marL="0">
+              <a:buNone/>
+            </a:pPr>
+            <a:r>
+              <a:rPr lang="en-US" sz="1150" dirty="0">
+                <a:solidFill>
+                  <a:srgbClr val="1C1917"/>
+                </a:solidFill>
+                <a:latin typeface="Arial" pitchFamily="34" charset="0"/>
+                <a:ea typeface="Arial" pitchFamily="34" charset="-122"/>
+                <a:cs typeface="Arial" pitchFamily="34" charset="-120"/>
+              </a:rPr>
+              <a:t>Adopting standard notation from day one dramatically reduces errors and review time.</a:t>
+            </a:r>
+            <a:endParaRPr lang="en-US" sz="1100" dirty="0"/>
+          </a:p>
+        </p:txBody>
+      </p:sp>
+    </p:spTree>
+  </p:cSld>
+  <p:clrMapOvr>
+    <a:masterClrMapping/>
+  </p:clrMapOvr>
+</p:sld>
+</file>
+
+<file path=ppt/slides/slide7.xml><?xml version="1.0" encoding="utf-8"?>
+<p:sld xmlns:a="http://schemas.openxmlformats.org/drawingml/2006/main" xmlns:r="http://schemas.openxmlformats.org/officeDocument/2006/relationships" xmlns:p="http://schemas.openxmlformats.org/presentationml/2006/main">
+  <p:cSld name="Slide 7">
+    <p:bg>
+      <p:bgPr>
+        <a:solidFill>
+          <a:srgbClr val="FFFFFF"/>
+        </a:solidFill>
+      </p:bgPr>
+    </p:bg>
+    <p:spTree>
+      <p:nvGrpSpPr>
+        <p:cNvPr id="1" name=""/>
+        <p:cNvGrpSpPr/>
+        <p:nvPr/>
+      </p:nvGrpSpPr>
+      <p:grpSpPr>
+        <a:xfrm>
+          <a:off x="0" y="0"/>
+          <a:ext cx="0" cy="0"/>
+          <a:chOff x="0" y="0"/>
+          <a:chExt cx="0" cy="0"/>
+        </a:xfrm>
+      </p:grpSpPr>
+      <p:sp>
+        <p:nvSpPr>
+          <p:cNvPr id="2" name="Shape 0"/>
+          <p:cNvSpPr/>
+          <p:nvPr/>
+        </p:nvSpPr>
+        <p:spPr>
+          <a:xfrm>
+            <a:off x="411480" y="384048"/>
+            <a:ext cx="82296" cy="310896"/>
+          </a:xfrm>
+          <a:prstGeom prst="rect">
+            <a:avLst/>
+          </a:prstGeom>
+          <a:solidFill>
+            <a:srgbClr val="B45309"/>
+          </a:solidFill>
+          <a:ln/>
+        </p:spPr>
+      </p:sp>
+      <p:sp>
+        <p:nvSpPr>
+          <p:cNvPr id="3" name="Text 1"/>
+          <p:cNvSpPr/>
+          <p:nvPr/>
+        </p:nvSpPr>
+        <p:spPr>
+          <a:xfrm>
+            <a:off x="566928" y="292608"/>
+            <a:ext cx="8138160" cy="502920"/>
+          </a:xfrm>
+          <a:prstGeom prst="rect">
+            <a:avLst/>
+          </a:prstGeom>
+          <a:noFill/>
+          <a:ln/>
+        </p:spPr>
+        <p:txBody>
+          <a:bodyPr wrap="square" rtlCol="0" anchor="ctr"/>
+          <a:lstStyle/>
+          <a:p>
+            <a:pPr indent="0" marL="0">
+              <a:buNone/>
+            </a:pPr>
+            <a:r>
+              <a:rPr lang="en-US" sz="2000" b="1" dirty="0">
+                <a:solidFill>
+                  <a:srgbClr val="1C1917"/>
+                </a:solidFill>
+                <a:latin typeface="Arial" pitchFamily="34" charset="0"/>
+                <a:ea typeface="Arial" pitchFamily="34" charset="-122"/>
+                <a:cs typeface="Arial" pitchFamily="34" charset="-120"/>
+              </a:rPr>
+              <a:t>Standard Financial Modeling Procedure</a:t>
+            </a:r>
+            <a:endParaRPr lang="en-US" sz="2000" dirty="0"/>
+          </a:p>
+        </p:txBody>
+      </p:sp>
+      <p:sp>
+        <p:nvSpPr>
+          <p:cNvPr id="4" name="Text 2"/>
+          <p:cNvSpPr/>
+          <p:nvPr/>
+        </p:nvSpPr>
+        <p:spPr>
+          <a:xfrm>
+            <a:off x="566928" y="4681728"/>
+            <a:ext cx="8138160" cy="320040"/>
+          </a:xfrm>
+          <a:prstGeom prst="rect">
+            <a:avLst/>
+          </a:prstGeom>
+          <a:noFill/>
+          <a:ln/>
+        </p:spPr>
+        <p:txBody>
+          <a:bodyPr wrap="square" rtlCol="0" anchor="ctr"/>
+          <a:lstStyle/>
+          <a:p>
+            <a:pPr indent="0" marL="0">
+              <a:buNone/>
+            </a:pPr>
+            <a:r>
+              <a:rPr lang="en-US" sz="1000" i="1" dirty="0">
+                <a:solidFill>
+                  <a:srgbClr val="78716C"/>
+                </a:solidFill>
+                <a:latin typeface="Arial" pitchFamily="34" charset="0"/>
+                <a:ea typeface="Arial" pitchFamily="34" charset="-122"/>
+                <a:cs typeface="Arial" pitchFamily="34" charset="-120"/>
+              </a:rPr>
+              <a:t>Fixed sequence transforms raw assumptions into actionable financial insights</a:t>
+            </a:r>
+            <a:endParaRPr lang="en-US" sz="1000" dirty="0"/>
+          </a:p>
+        </p:txBody>
+      </p:sp>
+      <p:sp>
+        <p:nvSpPr>
+          <p:cNvPr id="5" name="Text 3"/>
+          <p:cNvSpPr/>
+          <p:nvPr/>
+        </p:nvSpPr>
+        <p:spPr>
+          <a:xfrm>
+            <a:off x="411480" y="4919472"/>
+            <a:ext cx="8321040" cy="219456"/>
+          </a:xfrm>
+          <a:prstGeom prst="rect">
+            <a:avLst/>
+          </a:prstGeom>
+          <a:noFill/>
+          <a:ln/>
+        </p:spPr>
+        <p:txBody>
+          <a:bodyPr wrap="square" rtlCol="0" anchor="ctr"/>
+          <a:lstStyle/>
+          <a:p>
+            <a:pPr indent="0" marL="0">
+              <a:buNone/>
+            </a:pPr>
+            <a:r>
+              <a:rPr lang="en-US" sz="750" dirty="0">
+                <a:solidFill>
+                  <a:srgbClr val="AAAAAA"/>
+                </a:solidFill>
+                <a:latin typeface="Arial" pitchFamily="34" charset="0"/>
+                <a:ea typeface="Arial" pitchFamily="34" charset="-122"/>
+                <a:cs typeface="Arial" pitchFamily="34" charset="-120"/>
+              </a:rPr>
+              <a:t>Lesson Forge Pro (owner) — This content is educational material only and does not constitute financial, investment, or trading advice.</a:t>
+            </a:r>
+            <a:endParaRPr lang="en-US" sz="750" dirty="0"/>
+          </a:p>
+        </p:txBody>
+      </p:sp>
+      <p:sp>
+        <p:nvSpPr>
+          <p:cNvPr id="6" name="Shape 4"/>
+          <p:cNvSpPr/>
+          <p:nvPr/>
+        </p:nvSpPr>
+        <p:spPr>
+          <a:xfrm>
+            <a:off x="411480" y="1463040"/>
+            <a:ext cx="2011680" cy="960120"/>
+          </a:xfrm>
+          <a:prstGeom prst="roundRect">
+            <a:avLst>
+              <a:gd name="adj" fmla="val 7619"/>
+            </a:avLst>
+          </a:prstGeom>
+          <a:solidFill>
+            <a:srgbClr val="F5F5F4"/>
+          </a:solidFill>
+          <a:ln w="15240">
+            <a:solidFill>
+              <a:srgbClr val="B45309"/>
+            </a:solidFill>
+            <a:prstDash val="solid"/>
+          </a:ln>
+        </p:spPr>
+      </p:sp>
+      <p:sp>
+        <p:nvSpPr>
+          <p:cNvPr id="7" name="Text 5"/>
+          <p:cNvSpPr/>
+          <p:nvPr/>
+        </p:nvSpPr>
+        <p:spPr>
+          <a:xfrm>
+            <a:off x="484632" y="1536192"/>
+            <a:ext cx="310896" cy="274320"/>
+          </a:xfrm>
+          <a:prstGeom prst="rect">
+            <a:avLst/>
+          </a:prstGeom>
+          <a:solidFill>
+            <a:srgbClr val="B45309"/>
+          </a:solidFill>
+          <a:ln/>
+        </p:spPr>
+        <p:txBody>
+          <a:bodyPr wrap="square" rtlCol="0" anchor="ctr"/>
+          <a:lstStyle/>
+          <a:p>
+            <a:pPr algn="ctr" indent="0" marL="0">
+              <a:buNone/>
+            </a:pPr>
+            <a:r>
+              <a:rPr lang="en-US" sz="1000" b="1" dirty="0">
+                <a:solidFill>
+                  <a:srgbClr val="FFFFFF"/>
+                </a:solidFill>
+                <a:latin typeface="Arial" pitchFamily="34" charset="0"/>
+                <a:ea typeface="Arial" pitchFamily="34" charset="-122"/>
+                <a:cs typeface="Arial" pitchFamily="34" charset="-120"/>
+              </a:rPr>
+              <a:t>1</a:t>
+            </a:r>
+            <a:endParaRPr lang="en-US" sz="1000" dirty="0"/>
+          </a:p>
+        </p:txBody>
+      </p:sp>
+      <p:sp>
+        <p:nvSpPr>
+          <p:cNvPr id="8" name="Text 6"/>
+          <p:cNvSpPr/>
+          <p:nvPr/>
+        </p:nvSpPr>
+        <p:spPr>
+          <a:xfrm>
+            <a:off x="411480" y="1737360"/>
+            <a:ext cx="2011680" cy="384048"/>
+          </a:xfrm>
+          <a:prstGeom prst="rect">
+            <a:avLst/>
+          </a:prstGeom>
+          <a:noFill/>
+          <a:ln/>
+        </p:spPr>
+        <p:txBody>
+          <a:bodyPr wrap="square" rtlCol="0" anchor="ctr"/>
+          <a:lstStyle/>
+          <a:p>
+            <a:pPr algn="ctr" indent="0" marL="0">
+              <a:buNone/>
+            </a:pPr>
+            <a:r>
+              <a:rPr lang="en-US" sz="1200" b="1" dirty="0">
+                <a:solidFill>
+                  <a:srgbClr val="1C1917"/>
+                </a:solidFill>
+                <a:latin typeface="Arial" pitchFamily="34" charset="0"/>
+                <a:ea typeface="Arial" pitchFamily="34" charset="-122"/>
+                <a:cs typeface="Arial" pitchFamily="34" charset="-120"/>
+              </a:rPr>
+              <a:t>Define Scope</a:t>
+            </a:r>
+            <a:endParaRPr lang="en-US" sz="1200" dirty="0"/>
+          </a:p>
+        </p:txBody>
+      </p:sp>
+      <p:sp>
+        <p:nvSpPr>
+          <p:cNvPr id="9" name="Text 7"/>
+          <p:cNvSpPr/>
+          <p:nvPr/>
+        </p:nvSpPr>
+        <p:spPr>
+          <a:xfrm>
+            <a:off x="411480" y="2084832"/>
+            <a:ext cx="2011680" cy="310896"/>
+          </a:xfrm>
+          <a:prstGeom prst="rect">
+            <a:avLst/>
+          </a:prstGeom>
+          <a:noFill/>
+          <a:ln/>
+        </p:spPr>
+        <p:txBody>
+          <a:bodyPr wrap="square" rtlCol="0" anchor="ctr"/>
+          <a:lstStyle/>
+          <a:p>
+            <a:pPr algn="ctr" indent="0" marL="0">
+              <a:buNone/>
+            </a:pPr>
+            <a:r>
+              <a:rPr lang="en-US" sz="900" dirty="0">
+                <a:solidFill>
+                  <a:srgbClr val="78716C"/>
+                </a:solidFill>
+                <a:latin typeface="Arial" pitchFamily="34" charset="0"/>
+                <a:ea typeface="Arial" pitchFamily="34" charset="-122"/>
+                <a:cs typeface="Arial" pitchFamily="34" charset="-120"/>
+              </a:rPr>
+              <a:t>Set time horizon and period frequency</a:t>
+            </a:r>
+            <a:endParaRPr lang="en-US" sz="900" dirty="0"/>
+          </a:p>
+        </p:txBody>
+      </p:sp>
+      <p:sp>
+        <p:nvSpPr>
+          <p:cNvPr id="10" name="Shape 8"/>
+          <p:cNvSpPr/>
+          <p:nvPr/>
+        </p:nvSpPr>
+        <p:spPr>
+          <a:xfrm>
+            <a:off x="2478024" y="1842516"/>
+            <a:ext cx="301752" cy="201168"/>
+          </a:xfrm>
+          <a:prstGeom prst="rightArrow">
+            <a:avLst/>
+          </a:prstGeom>
+          <a:solidFill>
+            <a:srgbClr val="B45309"/>
+          </a:solidFill>
+          <a:ln/>
+        </p:spPr>
+      </p:sp>
+      <p:sp>
+        <p:nvSpPr>
+          <p:cNvPr id="11" name="Shape 9"/>
+          <p:cNvSpPr/>
+          <p:nvPr/>
+        </p:nvSpPr>
+        <p:spPr>
+          <a:xfrm>
+            <a:off x="2834640" y="1463040"/>
+            <a:ext cx="2011680" cy="960120"/>
+          </a:xfrm>
+          <a:prstGeom prst="roundRect">
+            <a:avLst>
+              <a:gd name="adj" fmla="val 7619"/>
+            </a:avLst>
+          </a:prstGeom>
+          <a:solidFill>
+            <a:srgbClr val="F5F5F4"/>
+          </a:solidFill>
+          <a:ln w="15240">
+            <a:solidFill>
+              <a:srgbClr val="B45309"/>
+            </a:solidFill>
+            <a:prstDash val="solid"/>
+          </a:ln>
+        </p:spPr>
+      </p:sp>
+      <p:sp>
+        <p:nvSpPr>
+          <p:cNvPr id="12" name="Text 10"/>
+          <p:cNvSpPr/>
+          <p:nvPr/>
+        </p:nvSpPr>
+        <p:spPr>
+          <a:xfrm>
+            <a:off x="2907792" y="1536192"/>
+            <a:ext cx="310896" cy="274320"/>
+          </a:xfrm>
+          <a:prstGeom prst="rect">
+            <a:avLst/>
+          </a:prstGeom>
+          <a:solidFill>
+            <a:srgbClr val="B45309"/>
+          </a:solidFill>
+          <a:ln/>
+        </p:spPr>
+        <p:txBody>
+          <a:bodyPr wrap="square" rtlCol="0" anchor="ctr"/>
+          <a:lstStyle/>
+          <a:p>
+            <a:pPr algn="ctr" indent="0" marL="0">
+              <a:buNone/>
+            </a:pPr>
+            <a:r>
+              <a:rPr lang="en-US" sz="1000" b="1" dirty="0">
+                <a:solidFill>
+                  <a:srgbClr val="FFFFFF"/>
+                </a:solidFill>
+                <a:latin typeface="Arial" pitchFamily="34" charset="0"/>
+                <a:ea typeface="Arial" pitchFamily="34" charset="-122"/>
+                <a:cs typeface="Arial" pitchFamily="34" charset="-120"/>
+              </a:rPr>
+              <a:t>2</a:t>
+            </a:r>
+            <a:endParaRPr lang="en-US" sz="1000" dirty="0"/>
+          </a:p>
+        </p:txBody>
+      </p:sp>
+      <p:sp>
+        <p:nvSpPr>
+          <p:cNvPr id="13" name="Text 11"/>
+          <p:cNvSpPr/>
+          <p:nvPr/>
+        </p:nvSpPr>
+        <p:spPr>
+          <a:xfrm>
+            <a:off x="2834640" y="1737360"/>
+            <a:ext cx="2011680" cy="384048"/>
+          </a:xfrm>
+          <a:prstGeom prst="rect">
+            <a:avLst/>
+          </a:prstGeom>
+          <a:noFill/>
+          <a:ln/>
+        </p:spPr>
+        <p:txBody>
+          <a:bodyPr wrap="square" rtlCol="0" anchor="ctr"/>
+          <a:lstStyle/>
+          <a:p>
+            <a:pPr algn="ctr" indent="0" marL="0">
+              <a:buNone/>
+            </a:pPr>
+            <a:r>
+              <a:rPr lang="en-US" sz="1200" b="1" dirty="0">
+                <a:solidFill>
+                  <a:srgbClr val="1C1917"/>
+                </a:solidFill>
+                <a:latin typeface="Arial" pitchFamily="34" charset="0"/>
+                <a:ea typeface="Arial" pitchFamily="34" charset="-122"/>
+                <a:cs typeface="Arial" pitchFamily="34" charset="-120"/>
+              </a:rPr>
+              <a:t>Build Income Statement</a:t>
+            </a:r>
+            <a:endParaRPr lang="en-US" sz="1200" dirty="0"/>
+          </a:p>
+        </p:txBody>
+      </p:sp>
+      <p:sp>
+        <p:nvSpPr>
+          <p:cNvPr id="14" name="Text 12"/>
+          <p:cNvSpPr/>
+          <p:nvPr/>
+        </p:nvSpPr>
+        <p:spPr>
+          <a:xfrm>
+            <a:off x="2834640" y="2084832"/>
+            <a:ext cx="2011680" cy="310896"/>
+          </a:xfrm>
+          <a:prstGeom prst="rect">
+            <a:avLst/>
+          </a:prstGeom>
+          <a:noFill/>
+          <a:ln/>
+        </p:spPr>
+        <p:txBody>
+          <a:bodyPr wrap="square" rtlCol="0" anchor="ctr"/>
+          <a:lstStyle/>
+          <a:p>
+            <a:pPr algn="ctr" indent="0" marL="0">
+              <a:buNone/>
+            </a:pPr>
+            <a:r>
+              <a:rPr lang="en-US" sz="900" dirty="0">
+                <a:solidFill>
+                  <a:srgbClr val="78716C"/>
+                </a:solidFill>
+                <a:latin typeface="Arial" pitchFamily="34" charset="0"/>
+                <a:ea typeface="Arial" pitchFamily="34" charset="-122"/>
+                <a:cs typeface="Arial" pitchFamily="34" charset="-120"/>
+              </a:rPr>
+              <a:t>Revenue to net income via growth rates</a:t>
+            </a:r>
+            <a:endParaRPr lang="en-US" sz="900" dirty="0"/>
+          </a:p>
+        </p:txBody>
+      </p:sp>
+      <p:sp>
+        <p:nvSpPr>
+          <p:cNvPr id="15" name="Shape 13"/>
+          <p:cNvSpPr/>
+          <p:nvPr/>
+        </p:nvSpPr>
+        <p:spPr>
+          <a:xfrm>
+            <a:off x="4901184" y="1842516"/>
+            <a:ext cx="301752" cy="201168"/>
+          </a:xfrm>
+          <a:prstGeom prst="rightArrow">
+            <a:avLst/>
+          </a:prstGeom>
+          <a:solidFill>
+            <a:srgbClr val="B45309"/>
+          </a:solidFill>
+          <a:ln/>
+        </p:spPr>
+      </p:sp>
+      <p:sp>
+        <p:nvSpPr>
+          <p:cNvPr id="16" name="Shape 14"/>
+          <p:cNvSpPr/>
+          <p:nvPr/>
+        </p:nvSpPr>
+        <p:spPr>
+          <a:xfrm>
+            <a:off x="5257800" y="1463040"/>
+            <a:ext cx="2011680" cy="960120"/>
+          </a:xfrm>
+          <a:prstGeom prst="roundRect">
+            <a:avLst>
+              <a:gd name="adj" fmla="val 7619"/>
+            </a:avLst>
+          </a:prstGeom>
+          <a:solidFill>
+            <a:srgbClr val="F5F5F4"/>
+          </a:solidFill>
+          <a:ln w="15240">
+            <a:solidFill>
+              <a:srgbClr val="B45309"/>
+            </a:solidFill>
+            <a:prstDash val="solid"/>
+          </a:ln>
+        </p:spPr>
+      </p:sp>
+      <p:sp>
+        <p:nvSpPr>
+          <p:cNvPr id="17" name="Text 15"/>
+          <p:cNvSpPr/>
+          <p:nvPr/>
+        </p:nvSpPr>
+        <p:spPr>
+          <a:xfrm>
+            <a:off x="5330952" y="1536192"/>
+            <a:ext cx="310896" cy="274320"/>
+          </a:xfrm>
+          <a:prstGeom prst="rect">
+            <a:avLst/>
+          </a:prstGeom>
+          <a:solidFill>
+            <a:srgbClr val="B45309"/>
+          </a:solidFill>
+          <a:ln/>
+        </p:spPr>
+        <p:txBody>
+          <a:bodyPr wrap="square" rtlCol="0" anchor="ctr"/>
+          <a:lstStyle/>
+          <a:p>
+            <a:pPr algn="ctr" indent="0" marL="0">
+              <a:buNone/>
+            </a:pPr>
+            <a:r>
+              <a:rPr lang="en-US" sz="1000" b="1" dirty="0">
+                <a:solidFill>
+                  <a:srgbClr val="FFFFFF"/>
+                </a:solidFill>
+                <a:latin typeface="Arial" pitchFamily="34" charset="0"/>
+                <a:ea typeface="Arial" pitchFamily="34" charset="-122"/>
+                <a:cs typeface="Arial" pitchFamily="34" charset="-120"/>
+              </a:rPr>
+              <a:t>3</a:t>
+            </a:r>
+            <a:endParaRPr lang="en-US" sz="1000" dirty="0"/>
+          </a:p>
+        </p:txBody>
+      </p:sp>
+      <p:sp>
+        <p:nvSpPr>
+          <p:cNvPr id="18" name="Text 16"/>
+          <p:cNvSpPr/>
+          <p:nvPr/>
+        </p:nvSpPr>
+        <p:spPr>
+          <a:xfrm>
+            <a:off x="5257800" y="1737360"/>
+            <a:ext cx="2011680" cy="384048"/>
+          </a:xfrm>
+          <a:prstGeom prst="rect">
+            <a:avLst/>
+          </a:prstGeom>
+          <a:noFill/>
+          <a:ln/>
+        </p:spPr>
+        <p:txBody>
+          <a:bodyPr wrap="square" rtlCol="0" anchor="ctr"/>
+          <a:lstStyle/>
+          <a:p>
+            <a:pPr algn="ctr" indent="0" marL="0">
+              <a:buNone/>
+            </a:pPr>
+            <a:r>
+              <a:rPr lang="en-US" sz="1200" b="1" dirty="0">
+                <a:solidFill>
+                  <a:srgbClr val="1C1917"/>
+                </a:solidFill>
+                <a:latin typeface="Arial" pitchFamily="34" charset="0"/>
+                <a:ea typeface="Arial" pitchFamily="34" charset="-122"/>
+                <a:cs typeface="Arial" pitchFamily="34" charset="-120"/>
+              </a:rPr>
+              <a:t>Build Balance Sheet</a:t>
+            </a:r>
+            <a:endParaRPr lang="en-US" sz="1200" dirty="0"/>
+          </a:p>
+        </p:txBody>
+      </p:sp>
+      <p:sp>
+        <p:nvSpPr>
+          <p:cNvPr id="19" name="Text 17"/>
+          <p:cNvSpPr/>
+          <p:nvPr/>
+        </p:nvSpPr>
+        <p:spPr>
+          <a:xfrm>
+            <a:off x="5257800" y="2084832"/>
+            <a:ext cx="2011680" cy="310896"/>
+          </a:xfrm>
+          <a:prstGeom prst="rect">
+            <a:avLst/>
+          </a:prstGeom>
+          <a:noFill/>
+          <a:ln/>
+        </p:spPr>
+        <p:txBody>
+          <a:bodyPr wrap="square" rtlCol="0" anchor="ctr"/>
+          <a:lstStyle/>
+          <a:p>
+            <a:pPr algn="ctr" indent="0" marL="0">
+              <a:buNone/>
+            </a:pPr>
+            <a:r>
+              <a:rPr lang="en-US" sz="900" dirty="0">
+                <a:solidFill>
+                  <a:srgbClr val="78716C"/>
+                </a:solidFill>
+                <a:latin typeface="Arial" pitchFamily="34" charset="0"/>
+                <a:ea typeface="Arial" pitchFamily="34" charset="-122"/>
+                <a:cs typeface="Arial" pitchFamily="34" charset="-120"/>
+              </a:rPr>
+              <a:t>Project assets, liabilities, equity drivers</a:t>
+            </a:r>
+            <a:endParaRPr lang="en-US" sz="900" dirty="0"/>
+          </a:p>
+        </p:txBody>
+      </p:sp>
+      <p:sp>
+        <p:nvSpPr>
+          <p:cNvPr id="20" name="Shape 18"/>
+          <p:cNvSpPr/>
+          <p:nvPr/>
+        </p:nvSpPr>
+        <p:spPr>
+          <a:xfrm>
+            <a:off x="6163056" y="2496312"/>
+            <a:ext cx="201168" cy="548640"/>
+          </a:xfrm>
+          <a:prstGeom prst="downArrow">
+            <a:avLst/>
+          </a:prstGeom>
+          <a:solidFill>
+            <a:srgbClr val="B45309"/>
+          </a:solidFill>
+          <a:ln/>
+        </p:spPr>
+      </p:sp>
+      <p:sp>
+        <p:nvSpPr>
+          <p:cNvPr id="21" name="Shape 19"/>
+          <p:cNvSpPr/>
+          <p:nvPr/>
+        </p:nvSpPr>
+        <p:spPr>
+          <a:xfrm>
+            <a:off x="5257800" y="3108960"/>
+            <a:ext cx="2011680" cy="960120"/>
+          </a:xfrm>
+          <a:prstGeom prst="roundRect">
+            <a:avLst>
+              <a:gd name="adj" fmla="val 7619"/>
+            </a:avLst>
+          </a:prstGeom>
+          <a:solidFill>
+            <a:srgbClr val="F5F5F4"/>
+          </a:solidFill>
+          <a:ln w="15240">
+            <a:solidFill>
+              <a:srgbClr val="B45309"/>
+            </a:solidFill>
+            <a:prstDash val="solid"/>
+          </a:ln>
+        </p:spPr>
+      </p:sp>
+      <p:sp>
+        <p:nvSpPr>
+          <p:cNvPr id="22" name="Text 20"/>
+          <p:cNvSpPr/>
+          <p:nvPr/>
+        </p:nvSpPr>
+        <p:spPr>
+          <a:xfrm>
+            <a:off x="5330952" y="3182112"/>
+            <a:ext cx="310896" cy="274320"/>
+          </a:xfrm>
+          <a:prstGeom prst="rect">
+            <a:avLst/>
+          </a:prstGeom>
+          <a:solidFill>
+            <a:srgbClr val="B45309"/>
+          </a:solidFill>
+          <a:ln/>
+        </p:spPr>
+        <p:txBody>
+          <a:bodyPr wrap="square" rtlCol="0" anchor="ctr"/>
+          <a:lstStyle/>
+          <a:p>
+            <a:pPr algn="ctr" indent="0" marL="0">
+              <a:buNone/>
+            </a:pPr>
+            <a:r>
+              <a:rPr lang="en-US" sz="1000" b="1" dirty="0">
+                <a:solidFill>
+                  <a:srgbClr val="FFFFFF"/>
+                </a:solidFill>
+                <a:latin typeface="Arial" pitchFamily="34" charset="0"/>
+                <a:ea typeface="Arial" pitchFamily="34" charset="-122"/>
+                <a:cs typeface="Arial" pitchFamily="34" charset="-120"/>
+              </a:rPr>
+              <a:t>4</a:t>
+            </a:r>
+            <a:endParaRPr lang="en-US" sz="1000" dirty="0"/>
+          </a:p>
+        </p:txBody>
+      </p:sp>
+      <p:sp>
+        <p:nvSpPr>
+          <p:cNvPr id="23" name="Text 21"/>
+          <p:cNvSpPr/>
+          <p:nvPr/>
+        </p:nvSpPr>
+        <p:spPr>
+          <a:xfrm>
+            <a:off x="5257800" y="3383280"/>
+            <a:ext cx="2011680" cy="384048"/>
+          </a:xfrm>
+          <a:prstGeom prst="rect">
+            <a:avLst/>
+          </a:prstGeom>
+          <a:noFill/>
+          <a:ln/>
+        </p:spPr>
+        <p:txBody>
+          <a:bodyPr wrap="square" rtlCol="0" anchor="ctr"/>
+          <a:lstStyle/>
+          <a:p>
+            <a:pPr algn="ctr" indent="0" marL="0">
+              <a:buNone/>
+            </a:pPr>
+            <a:r>
+              <a:rPr lang="en-US" sz="1200" b="1" dirty="0">
+                <a:solidFill>
+                  <a:srgbClr val="1C1917"/>
+                </a:solidFill>
+                <a:latin typeface="Arial" pitchFamily="34" charset="0"/>
+                <a:ea typeface="Arial" pitchFamily="34" charset="-122"/>
+                <a:cs typeface="Arial" pitchFamily="34" charset="-120"/>
+              </a:rPr>
+              <a:t>Build Cash Flow Statement</a:t>
+            </a:r>
+            <a:endParaRPr lang="en-US" sz="1200" dirty="0"/>
+          </a:p>
+        </p:txBody>
+      </p:sp>
+      <p:sp>
+        <p:nvSpPr>
+          <p:cNvPr id="24" name="Text 22"/>
+          <p:cNvSpPr/>
+          <p:nvPr/>
+        </p:nvSpPr>
+        <p:spPr>
+          <a:xfrm>
+            <a:off x="5257800" y="3730752"/>
+            <a:ext cx="2011680" cy="310896"/>
+          </a:xfrm>
+          <a:prstGeom prst="rect">
+            <a:avLst/>
+          </a:prstGeom>
+          <a:noFill/>
+          <a:ln/>
+        </p:spPr>
+        <p:txBody>
+          <a:bodyPr wrap="square" rtlCol="0" anchor="ctr"/>
+          <a:lstStyle/>
+          <a:p>
+            <a:pPr algn="ctr" indent="0" marL="0">
+              <a:buNone/>
+            </a:pPr>
+            <a:r>
+              <a:rPr lang="en-US" sz="900" dirty="0">
+                <a:solidFill>
+                  <a:srgbClr val="78716C"/>
+                </a:solidFill>
+                <a:latin typeface="Arial" pitchFamily="34" charset="0"/>
+                <a:ea typeface="Arial" pitchFamily="34" charset="-122"/>
+                <a:cs typeface="Arial" pitchFamily="34" charset="-120"/>
+              </a:rPr>
+              <a:t>Link operating, investing, financing flows</a:t>
+            </a:r>
+            <a:endParaRPr lang="en-US" sz="900" dirty="0"/>
+          </a:p>
+        </p:txBody>
+      </p:sp>
+      <p:sp>
+        <p:nvSpPr>
+          <p:cNvPr id="25" name="Shape 23"/>
+          <p:cNvSpPr/>
+          <p:nvPr/>
+        </p:nvSpPr>
+        <p:spPr>
+          <a:xfrm>
+            <a:off x="4901184" y="3488436"/>
+            <a:ext cx="301752" cy="201168"/>
+          </a:xfrm>
+          <a:prstGeom prst="leftArrow">
+            <a:avLst/>
+          </a:prstGeom>
+          <a:solidFill>
+            <a:srgbClr val="B45309"/>
+          </a:solidFill>
+          <a:ln/>
+        </p:spPr>
+      </p:sp>
+      <p:sp>
+        <p:nvSpPr>
+          <p:cNvPr id="26" name="Shape 24"/>
+          <p:cNvSpPr/>
+          <p:nvPr/>
+        </p:nvSpPr>
+        <p:spPr>
+          <a:xfrm>
+            <a:off x="2834640" y="3108960"/>
+            <a:ext cx="2011680" cy="960120"/>
+          </a:xfrm>
+          <a:prstGeom prst="roundRect">
+            <a:avLst>
+              <a:gd name="adj" fmla="val 7619"/>
+            </a:avLst>
+          </a:prstGeom>
+          <a:solidFill>
+            <a:srgbClr val="F5F5F4"/>
+          </a:solidFill>
+          <a:ln w="15240">
+            <a:solidFill>
+              <a:srgbClr val="B45309"/>
+            </a:solidFill>
+            <a:prstDash val="solid"/>
+          </a:ln>
+        </p:spPr>
+      </p:sp>
+      <p:sp>
+        <p:nvSpPr>
+          <p:cNvPr id="27" name="Text 25"/>
+          <p:cNvSpPr/>
+          <p:nvPr/>
+        </p:nvSpPr>
+        <p:spPr>
+          <a:xfrm>
+            <a:off x="2907792" y="3182112"/>
+            <a:ext cx="310896" cy="274320"/>
+          </a:xfrm>
+          <a:prstGeom prst="rect">
+            <a:avLst/>
+          </a:prstGeom>
+          <a:solidFill>
+            <a:srgbClr val="B45309"/>
+          </a:solidFill>
+          <a:ln/>
+        </p:spPr>
+        <p:txBody>
+          <a:bodyPr wrap="square" rtlCol="0" anchor="ctr"/>
+          <a:lstStyle/>
+          <a:p>
+            <a:pPr algn="ctr" indent="0" marL="0">
+              <a:buNone/>
+            </a:pPr>
+            <a:r>
+              <a:rPr lang="en-US" sz="1000" b="1" dirty="0">
+                <a:solidFill>
+                  <a:srgbClr val="FFFFFF"/>
+                </a:solidFill>
+                <a:latin typeface="Arial" pitchFamily="34" charset="0"/>
+                <a:ea typeface="Arial" pitchFamily="34" charset="-122"/>
+                <a:cs typeface="Arial" pitchFamily="34" charset="-120"/>
+              </a:rPr>
+              <a:t>5</a:t>
+            </a:r>
+            <a:endParaRPr lang="en-US" sz="1000" dirty="0"/>
+          </a:p>
+        </p:txBody>
+      </p:sp>
+      <p:sp>
+        <p:nvSpPr>
+          <p:cNvPr id="28" name="Text 26"/>
+          <p:cNvSpPr/>
+          <p:nvPr/>
+        </p:nvSpPr>
+        <p:spPr>
+          <a:xfrm>
+            <a:off x="2834640" y="3383280"/>
+            <a:ext cx="2011680" cy="384048"/>
+          </a:xfrm>
+          <a:prstGeom prst="rect">
+            <a:avLst/>
+          </a:prstGeom>
+          <a:noFill/>
+          <a:ln/>
+        </p:spPr>
+        <p:txBody>
+          <a:bodyPr wrap="square" rtlCol="0" anchor="ctr"/>
+          <a:lstStyle/>
+          <a:p>
+            <a:pPr algn="ctr" indent="0" marL="0">
+              <a:buNone/>
+            </a:pPr>
+            <a:r>
+              <a:rPr lang="en-US" sz="1200" b="1" dirty="0">
+                <a:solidFill>
+                  <a:srgbClr val="1C1917"/>
+                </a:solidFill>
+                <a:latin typeface="Arial" pitchFamily="34" charset="0"/>
+                <a:ea typeface="Arial" pitchFamily="34" charset="-122"/>
+                <a:cs typeface="Arial" pitchFamily="34" charset="-120"/>
+              </a:rPr>
+              <a:t>Apply Valuation Layer</a:t>
+            </a:r>
+            <a:endParaRPr lang="en-US" sz="1200" dirty="0"/>
+          </a:p>
+        </p:txBody>
+      </p:sp>
+      <p:sp>
+        <p:nvSpPr>
+          <p:cNvPr id="29" name="Text 27"/>
+          <p:cNvSpPr/>
+          <p:nvPr/>
+        </p:nvSpPr>
+        <p:spPr>
+          <a:xfrm>
+            <a:off x="2834640" y="3730752"/>
+            <a:ext cx="2011680" cy="310896"/>
+          </a:xfrm>
+          <a:prstGeom prst="rect">
+            <a:avLst/>
+          </a:prstGeom>
+          <a:noFill/>
+          <a:ln/>
+        </p:spPr>
+        <p:txBody>
+          <a:bodyPr wrap="square" rtlCol="0" anchor="ctr"/>
+          <a:lstStyle/>
+          <a:p>
+            <a:pPr algn="ctr" indent="0" marL="0">
+              <a:buNone/>
+            </a:pPr>
+            <a:r>
+              <a:rPr lang="en-US" sz="900" dirty="0">
+                <a:solidFill>
+                  <a:srgbClr val="78716C"/>
+                </a:solidFill>
+                <a:latin typeface="Arial" pitchFamily="34" charset="0"/>
+                <a:ea typeface="Arial" pitchFamily="34" charset="-122"/>
+                <a:cs typeface="Arial" pitchFamily="34" charset="-120"/>
+              </a:rPr>
+              <a:t>DCF, debt coverage, or scenario comparison</a:t>
+            </a:r>
+            <a:endParaRPr lang="en-US" sz="900" dirty="0"/>
+          </a:p>
+        </p:txBody>
+      </p:sp>
+      <p:sp>
+        <p:nvSpPr>
+          <p:cNvPr id="30" name="Shape 28"/>
+          <p:cNvSpPr/>
+          <p:nvPr/>
+        </p:nvSpPr>
+        <p:spPr>
+          <a:xfrm>
+            <a:off x="2478024" y="3488436"/>
+            <a:ext cx="301752" cy="201168"/>
+          </a:xfrm>
+          <a:prstGeom prst="leftArrow">
+            <a:avLst/>
+          </a:prstGeom>
+          <a:solidFill>
+            <a:srgbClr val="B45309"/>
+          </a:solidFill>
+          <a:ln/>
+        </p:spPr>
+      </p:sp>
+      <p:sp>
+        <p:nvSpPr>
+          <p:cNvPr id="31" name="Shape 29"/>
+          <p:cNvSpPr/>
+          <p:nvPr/>
+        </p:nvSpPr>
+        <p:spPr>
+          <a:xfrm>
+            <a:off x="411480" y="3108960"/>
+            <a:ext cx="2011680" cy="960120"/>
+          </a:xfrm>
+          <a:prstGeom prst="roundRect">
+            <a:avLst>
+              <a:gd name="adj" fmla="val 7619"/>
+            </a:avLst>
+          </a:prstGeom>
+          <a:solidFill>
+            <a:srgbClr val="F5F5F4"/>
+          </a:solidFill>
+          <a:ln w="15240">
+            <a:solidFill>
+              <a:srgbClr val="B45309"/>
+            </a:solidFill>
+            <a:prstDash val="solid"/>
+          </a:ln>
+        </p:spPr>
+      </p:sp>
+      <p:sp>
+        <p:nvSpPr>
+          <p:cNvPr id="32" name="Text 30"/>
+          <p:cNvSpPr/>
+          <p:nvPr/>
+        </p:nvSpPr>
+        <p:spPr>
+          <a:xfrm>
+            <a:off x="484632" y="3182112"/>
+            <a:ext cx="310896" cy="274320"/>
+          </a:xfrm>
+          <a:prstGeom prst="rect">
+            <a:avLst/>
+          </a:prstGeom>
+          <a:solidFill>
+            <a:srgbClr val="B45309"/>
+          </a:solidFill>
+          <a:ln/>
+        </p:spPr>
+        <p:txBody>
+          <a:bodyPr wrap="square" rtlCol="0" anchor="ctr"/>
+          <a:lstStyle/>
+          <a:p>
+            <a:pPr algn="ctr" indent="0" marL="0">
+              <a:buNone/>
+            </a:pPr>
+            <a:r>
+              <a:rPr lang="en-US" sz="1000" b="1" dirty="0">
+                <a:solidFill>
+                  <a:srgbClr val="FFFFFF"/>
+                </a:solidFill>
+                <a:latin typeface="Arial" pitchFamily="34" charset="0"/>
+                <a:ea typeface="Arial" pitchFamily="34" charset="-122"/>
+                <a:cs typeface="Arial" pitchFamily="34" charset="-120"/>
+              </a:rPr>
+              <a:t>6</a:t>
+            </a:r>
+            <a:endParaRPr lang="en-US" sz="1000" dirty="0"/>
+          </a:p>
+        </p:txBody>
+      </p:sp>
+      <p:sp>
+        <p:nvSpPr>
+          <p:cNvPr id="33" name="Text 31"/>
+          <p:cNvSpPr/>
+          <p:nvPr/>
+        </p:nvSpPr>
+        <p:spPr>
+          <a:xfrm>
+            <a:off x="411480" y="3383280"/>
+            <a:ext cx="2011680" cy="384048"/>
+          </a:xfrm>
+          <a:prstGeom prst="rect">
+            <a:avLst/>
+          </a:prstGeom>
+          <a:noFill/>
+          <a:ln/>
+        </p:spPr>
+        <p:txBody>
+          <a:bodyPr wrap="square" rtlCol="0" anchor="ctr"/>
+          <a:lstStyle/>
+          <a:p>
+            <a:pPr algn="ctr" indent="0" marL="0">
+              <a:buNone/>
+            </a:pPr>
+            <a:r>
+              <a:rPr lang="en-US" sz="1200" b="1" dirty="0">
+                <a:solidFill>
+                  <a:srgbClr val="1C1917"/>
+                </a:solidFill>
+                <a:latin typeface="Arial" pitchFamily="34" charset="0"/>
+                <a:ea typeface="Arial" pitchFamily="34" charset="-122"/>
+                <a:cs typeface="Arial" pitchFamily="34" charset="-120"/>
+              </a:rPr>
+              <a:t>Run Sensitivities</a:t>
+            </a:r>
+            <a:endParaRPr lang="en-US" sz="1200" dirty="0"/>
+          </a:p>
+        </p:txBody>
+      </p:sp>
+      <p:sp>
+        <p:nvSpPr>
+          <p:cNvPr id="34" name="Text 32"/>
+          <p:cNvSpPr/>
+          <p:nvPr/>
+        </p:nvSpPr>
+        <p:spPr>
+          <a:xfrm>
+            <a:off x="411480" y="3730752"/>
+            <a:ext cx="2011680" cy="310896"/>
+          </a:xfrm>
+          <a:prstGeom prst="rect">
+            <a:avLst/>
+          </a:prstGeom>
+          <a:noFill/>
+          <a:ln/>
+        </p:spPr>
+        <p:txBody>
+          <a:bodyPr wrap="square" rtlCol="0" anchor="ctr"/>
+          <a:lstStyle/>
+          <a:p>
+            <a:pPr algn="ctr" indent="0" marL="0">
+              <a:buNone/>
+            </a:pPr>
+            <a:r>
+              <a:rPr lang="en-US" sz="900" dirty="0">
+                <a:solidFill>
+                  <a:srgbClr val="78716C"/>
+                </a:solidFill>
+                <a:latin typeface="Arial" pitchFamily="34" charset="0"/>
+                <a:ea typeface="Arial" pitchFamily="34" charset="-122"/>
+                <a:cs typeface="Arial" pitchFamily="34" charset="-120"/>
+              </a:rPr>
+              <a:t>Vary key drivers to quantify output ranges</a:t>
+            </a:r>
+            <a:endParaRPr lang="en-US" sz="900" dirty="0"/>
+          </a:p>
+        </p:txBody>
+      </p:sp>
+    </p:spTree>
+  </p:cSld>
+  <p:clrMapOvr>
+    <a:masterClrMapping/>
+  </p:clrMapOvr>
+</p:sld>
+</file>
+
+<file path=ppt/slides/slide8.xml><?xml version="1.0" encoding="utf-8"?>
+<p:sld xmlns:a="http://schemas.openxmlformats.org/drawingml/2006/main" xmlns:r="http://schemas.openxmlformats.org/officeDocument/2006/relationships" xmlns:p="http://schemas.openxmlformats.org/presentationml/2006/main">
+  <p:cSld name="Slide 8">
+    <p:bg>
+      <p:bgPr>
+        <a:solidFill>
+          <a:srgbClr val="FFFFFF"/>
+        </a:solidFill>
+      </p:bgPr>
+    </p:bg>
+    <p:spTree>
+      <p:nvGrpSpPr>
+        <p:cNvPr id="1" name=""/>
+        <p:cNvGrpSpPr/>
+        <p:nvPr/>
+      </p:nvGrpSpPr>
+      <p:grpSpPr>
+        <a:xfrm>
+          <a:off x="0" y="0"/>
+          <a:ext cx="0" cy="0"/>
+          <a:chOff x="0" y="0"/>
+          <a:chExt cx="0" cy="0"/>
+        </a:xfrm>
+      </p:grpSpPr>
+      <p:sp>
+        <p:nvSpPr>
+          <p:cNvPr id="2" name="Shape 0"/>
+          <p:cNvSpPr/>
+          <p:nvPr/>
+        </p:nvSpPr>
+        <p:spPr>
+          <a:xfrm>
+            <a:off x="411480" y="402336"/>
+            <a:ext cx="82296" cy="329184"/>
+          </a:xfrm>
+          <a:prstGeom prst="rect">
+            <a:avLst/>
+          </a:prstGeom>
+          <a:solidFill>
+            <a:srgbClr val="B45309"/>
+          </a:solidFill>
+          <a:ln/>
+        </p:spPr>
+      </p:sp>
+      <p:sp>
+        <p:nvSpPr>
+          <p:cNvPr id="3" name="Text 1"/>
+          <p:cNvSpPr/>
+          <p:nvPr/>
+        </p:nvSpPr>
+        <p:spPr>
+          <a:xfrm>
+            <a:off x="566928" y="292608"/>
+            <a:ext cx="8138160" cy="548640"/>
+          </a:xfrm>
+          <a:prstGeom prst="rect">
+            <a:avLst/>
+          </a:prstGeom>
+          <a:noFill/>
+          <a:ln/>
+        </p:spPr>
+        <p:txBody>
+          <a:bodyPr wrap="square" rtlCol="0" anchor="ctr"/>
+          <a:lstStyle/>
+          <a:p>
+            <a:pPr indent="0" marL="0">
+              <a:buNone/>
+            </a:pPr>
+            <a:r>
+              <a:rPr lang="en-US" sz="2100" b="1" dirty="0">
+                <a:solidFill>
+                  <a:srgbClr val="1C1917"/>
+                </a:solidFill>
+                <a:latin typeface="Arial" pitchFamily="34" charset="0"/>
+                <a:ea typeface="Arial" pitchFamily="34" charset="-122"/>
+                <a:cs typeface="Arial" pitchFamily="34" charset="-120"/>
+              </a:rPr>
+              <a:t>Mapping Vocabulary to a New Model</a:t>
+            </a:r>
+            <a:endParaRPr lang="en-US" sz="2100" dirty="0"/>
+          </a:p>
+        </p:txBody>
+      </p:sp>
+      <p:sp>
+        <p:nvSpPr>
+          <p:cNvPr id="4" name="Shape 2"/>
+          <p:cNvSpPr/>
+          <p:nvPr/>
+        </p:nvSpPr>
+        <p:spPr>
+          <a:xfrm>
+            <a:off x="411480" y="960120"/>
+            <a:ext cx="8321040" cy="0"/>
+          </a:xfrm>
+          <a:prstGeom prst="line">
+            <a:avLst/>
+          </a:prstGeom>
+          <a:noFill/>
+          <a:ln w="12700">
+            <a:solidFill>
+              <a:srgbClr val="E7E5E4"/>
+            </a:solidFill>
+            <a:prstDash val="solid"/>
+          </a:ln>
+        </p:spPr>
+      </p:sp>
+      <p:sp>
+        <p:nvSpPr>
+          <p:cNvPr id="5" name="Text 3"/>
+          <p:cNvSpPr/>
+          <p:nvPr/>
+        </p:nvSpPr>
+        <p:spPr>
+          <a:xfrm>
+            <a:off x="411480" y="4864608"/>
+            <a:ext cx="8321040" cy="237744"/>
+          </a:xfrm>
+          <a:prstGeom prst="rect">
+            <a:avLst/>
+          </a:prstGeom>
+          <a:noFill/>
+          <a:ln/>
+        </p:spPr>
+        <p:txBody>
+          <a:bodyPr wrap="square" rtlCol="0" anchor="ctr"/>
+          <a:lstStyle/>
+          <a:p>
+            <a:pPr indent="0" marL="0">
+              <a:buNone/>
+            </a:pPr>
+            <a:r>
+              <a:rPr lang="en-US" sz="750" dirty="0">
+                <a:solidFill>
+                  <a:srgbClr val="AAAAAA"/>
+                </a:solidFill>
+                <a:latin typeface="Arial" pitchFamily="34" charset="0"/>
+                <a:ea typeface="Arial" pitchFamily="34" charset="-122"/>
+                <a:cs typeface="Arial" pitchFamily="34" charset="-120"/>
+              </a:rPr>
+              <a:t>Lesson Forge Pro (owner) — This content is educational material only and does not constitute financial, investment, or trading advice.</a:t>
+            </a:r>
+            <a:endParaRPr lang="en-US" sz="750" dirty="0"/>
+          </a:p>
+        </p:txBody>
+      </p:sp>
+      <p:sp>
+        <p:nvSpPr>
+          <p:cNvPr id="6" name="Text 4"/>
+          <p:cNvSpPr/>
+          <p:nvPr/>
+        </p:nvSpPr>
+        <p:spPr>
+          <a:xfrm>
+            <a:off x="731520" y="1188720"/>
+            <a:ext cx="7680960" cy="2743200"/>
+          </a:xfrm>
+          <a:prstGeom prst="rect">
+            <a:avLst/>
+          </a:prstGeom>
+          <a:noFill/>
+          <a:ln/>
+        </p:spPr>
+        <p:txBody>
+          <a:bodyPr wrap="square" rtlCol="0" anchor="t"/>
+          <a:lstStyle/>
+          <a:p>
+            <a:pPr marL="152400" indent="-152400">
+              <a:spcAft>
+                <a:spcPts val="800"/>
+              </a:spcAft>
+              <a:buSzPct val="100000"/>
+              <a:buChar char="•"/>
+            </a:pPr>
+            <a:r>
+              <a:rPr lang="en-US" sz="1500" dirty="0">
+                <a:solidFill>
+                  <a:srgbClr val="1C1917"/>
+                </a:solidFill>
+                <a:latin typeface="Arial" pitchFamily="34" charset="0"/>
+                <a:ea typeface="Arial" pitchFamily="34" charset="-122"/>
+                <a:cs typeface="Arial" pitchFamily="34" charset="-120"/>
+              </a:rPr>
+              <a:t>Start by identifying the specific decision the model must support.</a:t>
+            </a:r>
+            <a:endParaRPr lang="en-US" sz="1500" dirty="0"/>
+          </a:p>
+          <a:p>
+            <a:pPr marL="152400" indent="-152400">
+              <a:spcAft>
+                <a:spcPts val="800"/>
+              </a:spcAft>
+              <a:buSzPct val="100000"/>
+              <a:buChar char="•"/>
+            </a:pPr>
+            <a:r>
+              <a:rPr lang="en-US" sz="1500" dirty="0">
+                <a:solidFill>
+                  <a:srgbClr val="1C1917"/>
+                </a:solidFill>
+                <a:latin typeface="Arial" pitchFamily="34" charset="0"/>
+                <a:ea typeface="Arial" pitchFamily="34" charset="-122"/>
+                <a:cs typeface="Arial" pitchFamily="34" charset="-120"/>
+              </a:rPr>
+              <a:t>Isolate all inputs in a dedicated assumption block at the model's top.</a:t>
+            </a:r>
+            <a:endParaRPr lang="en-US" sz="1500" dirty="0"/>
+          </a:p>
+          <a:p>
+            <a:pPr marL="152400" indent="-152400">
+              <a:spcAft>
+                <a:spcPts val="800"/>
+              </a:spcAft>
+              <a:buSzPct val="100000"/>
+              <a:buChar char="•"/>
+            </a:pPr>
+            <a:r>
+              <a:rPr lang="en-US" sz="1500" dirty="0">
+                <a:solidFill>
+                  <a:srgbClr val="1C1917"/>
+                </a:solidFill>
+                <a:latin typeface="Arial" pitchFamily="34" charset="0"/>
+                <a:ea typeface="Arial" pitchFamily="34" charset="-122"/>
+                <a:cs typeface="Arial" pitchFamily="34" charset="-120"/>
+              </a:rPr>
+              <a:t>Label the two or three drivers most likely to swing the output.</a:t>
+            </a:r>
+            <a:endParaRPr lang="en-US" sz="1500" dirty="0"/>
+          </a:p>
+          <a:p>
+            <a:pPr marL="152400" indent="-152400">
+              <a:spcAft>
+                <a:spcPts val="800"/>
+              </a:spcAft>
+              <a:buSzPct val="100000"/>
+              <a:buChar char="•"/>
+            </a:pPr>
+            <a:r>
+              <a:rPr lang="en-US" sz="1500" dirty="0">
+                <a:solidFill>
+                  <a:srgbClr val="1C1917"/>
+                </a:solidFill>
+                <a:latin typeface="Arial" pitchFamily="34" charset="0"/>
+                <a:ea typeface="Arial" pitchFamily="34" charset="-122"/>
+                <a:cs typeface="Arial" pitchFamily="34" charset="-120"/>
+              </a:rPr>
+              <a:t>Output formulas must reference the assumption block, never buried numbers.</a:t>
+            </a:r>
+            <a:endParaRPr lang="en-US" sz="1500" dirty="0"/>
+          </a:p>
+          <a:p>
+            <a:pPr marL="152400" indent="-152400">
+              <a:spcAft>
+                <a:spcPts val="800"/>
+              </a:spcAft>
+              <a:buSzPct val="100000"/>
+              <a:buChar char="•"/>
+            </a:pPr>
+            <a:r>
+              <a:rPr lang="en-US" sz="1500" dirty="0">
+                <a:solidFill>
+                  <a:srgbClr val="1C1917"/>
+                </a:solidFill>
+                <a:latin typeface="Arial" pitchFamily="34" charset="0"/>
+                <a:ea typeface="Arial" pitchFamily="34" charset="-122"/>
+                <a:cs typeface="Arial" pitchFamily="34" charset="-120"/>
+              </a:rPr>
+              <a:t>Define base, upside, and downside scenarios; run sensitivity on top drivers.</a:t>
+            </a:r>
+            <a:endParaRPr lang="en-US" sz="1500" dirty="0"/>
+          </a:p>
+        </p:txBody>
+      </p:sp>
+      <p:sp>
+        <p:nvSpPr>
+          <p:cNvPr id="7" name="Shape 5"/>
+          <p:cNvSpPr/>
+          <p:nvPr/>
+        </p:nvSpPr>
+        <p:spPr>
+          <a:xfrm>
+            <a:off x="731520" y="4041648"/>
+            <a:ext cx="7680960" cy="566928"/>
+          </a:xfrm>
+          <a:prstGeom prst="roundRect">
+            <a:avLst>
+              <a:gd name="adj" fmla="val 12903"/>
+            </a:avLst>
+          </a:prstGeom>
+          <a:solidFill>
+            <a:srgbClr val="B45309">
+              <a:alpha val="12000"/>
+            </a:srgbClr>
+          </a:solidFill>
+          <a:ln w="12700">
+            <a:solidFill>
+              <a:srgbClr val="B45309"/>
+            </a:solidFill>
+            <a:prstDash val="solid"/>
+          </a:ln>
+        </p:spPr>
+      </p:sp>
+      <p:sp>
+        <p:nvSpPr>
+          <p:cNvPr id="8" name="Text 6"/>
+          <p:cNvSpPr/>
+          <p:nvPr/>
+        </p:nvSpPr>
+        <p:spPr>
+          <a:xfrm>
+            <a:off x="868680" y="4087368"/>
+            <a:ext cx="7406640" cy="475488"/>
+          </a:xfrm>
+          <a:prstGeom prst="rect">
+            <a:avLst/>
+          </a:prstGeom>
+          <a:noFill/>
+          <a:ln/>
+        </p:spPr>
+        <p:txBody>
+          <a:bodyPr wrap="square" rtlCol="0" anchor="ctr"/>
+          <a:lstStyle/>
+          <a:p>
+            <a:pPr indent="0" marL="0">
+              <a:buNone/>
+            </a:pPr>
+            <a:r>
+              <a:rPr lang="en-US" sz="1100" b="1" dirty="0">
+                <a:solidFill>
+                  <a:srgbClr val="B45309"/>
+                </a:solidFill>
+                <a:latin typeface="Arial" pitchFamily="34" charset="0"/>
+                <a:ea typeface="Arial" pitchFamily="34" charset="-122"/>
+                <a:cs typeface="Arial" pitchFamily="34" charset="-120"/>
+              </a:rPr>
+              <a:t>Takeaway  </a:t>
+            </a:r>
+            <a:pPr indent="0" marL="0">
+              <a:buNone/>
+            </a:pPr>
+            <a:r>
+              <a:rPr lang="en-US" sz="1150" dirty="0">
+                <a:solidFill>
+                  <a:srgbClr val="1C1917"/>
+                </a:solidFill>
+                <a:latin typeface="Arial" pitchFamily="34" charset="0"/>
+                <a:ea typeface="Arial" pitchFamily="34" charset="-122"/>
+                <a:cs typeface="Arial" pitchFamily="34" charset="-120"/>
+              </a:rPr>
+              <a:t>Following a disciplined setup procedure ensures every assumption is visible and every output is traceable.</a:t>
+            </a:r>
+            <a:endParaRPr lang="en-US" sz="1100" dirty="0"/>
+          </a:p>
+        </p:txBody>
+      </p:sp>
+    </p:spTree>
+  </p:cSld>
+  <p:clrMapOvr>
+    <a:masterClrMapping/>
+  </p:clrMapOvr>
+</p:sld>
+</file>
+
+<file path=ppt/slides/slide9.xml><?xml version="1.0" encoding="utf-8"?>
+<p:sld xmlns:a="http://schemas.openxmlformats.org/drawingml/2006/main" xmlns:r="http://schemas.openxmlformats.org/officeDocument/2006/relationships" xmlns:p="http://schemas.openxmlformats.org/presentationml/2006/main">
+  <p:cSld name="Slide 9">
+    <p:bg>
+      <p:bgPr>
+        <a:solidFill>
+          <a:srgbClr val="FFFFFF"/>
+        </a:solidFill>
+      </p:bgPr>
+    </p:bg>
+    <p:spTree>
+      <p:nvGrpSpPr>
+        <p:cNvPr id="1" name=""/>
+        <p:cNvGrpSpPr/>
+        <p:nvPr/>
+      </p:nvGrpSpPr>
+      <p:grpSpPr>
+        <a:xfrm>
+          <a:off x="0" y="0"/>
+          <a:ext cx="0" cy="0"/>
+          <a:chOff x="0" y="0"/>
+          <a:chExt cx="0" cy="0"/>
+        </a:xfrm>
+      </p:grpSpPr>
+      <p:sp>
+        <p:nvSpPr>
+          <p:cNvPr id="2" name="Shape 0"/>
+          <p:cNvSpPr/>
+          <p:nvPr/>
+        </p:nvSpPr>
+        <p:spPr>
+          <a:xfrm>
+            <a:off x="411480" y="402336"/>
+            <a:ext cx="82296" cy="329184"/>
+          </a:xfrm>
+          <a:prstGeom prst="rect">
+            <a:avLst/>
+          </a:prstGeom>
+          <a:solidFill>
+            <a:srgbClr val="B45309"/>
+          </a:solidFill>
+          <a:ln/>
+        </p:spPr>
+      </p:sp>
+      <p:sp>
+        <p:nvSpPr>
+          <p:cNvPr id="3" name="Text 1"/>
+          <p:cNvSpPr/>
+          <p:nvPr/>
+        </p:nvSpPr>
+        <p:spPr>
+          <a:xfrm>
+            <a:off x="566928" y="292608"/>
+            <a:ext cx="8138160" cy="548640"/>
+          </a:xfrm>
+          <a:prstGeom prst="rect">
+            <a:avLst/>
+          </a:prstGeom>
+          <a:noFill/>
+          <a:ln/>
+        </p:spPr>
+        <p:txBody>
+          <a:bodyPr wrap="square" rtlCol="0" anchor="ctr"/>
+          <a:lstStyle/>
+          <a:p>
+            <a:pPr indent="0" marL="0">
+              <a:buNone/>
+            </a:pPr>
+            <a:r>
+              <a:rPr lang="en-US" sz="2100" b="1" dirty="0">
+                <a:solidFill>
+                  <a:srgbClr val="1C1917"/>
+                </a:solidFill>
+                <a:latin typeface="Arial" pitchFamily="34" charset="0"/>
+                <a:ea typeface="Arial" pitchFamily="34" charset="-122"/>
+                <a:cs typeface="Arial" pitchFamily="34" charset="-120"/>
+              </a:rPr>
+              <a:t>Worked Example: Terminology in Action</a:t>
+            </a:r>
+            <a:endParaRPr lang="en-US" sz="2100" dirty="0"/>
+          </a:p>
+        </p:txBody>
+      </p:sp>
+      <p:sp>
+        <p:nvSpPr>
+          <p:cNvPr id="4" name="Shape 2"/>
+          <p:cNvSpPr/>
+          <p:nvPr/>
+        </p:nvSpPr>
+        <p:spPr>
+          <a:xfrm>
+            <a:off x="411480" y="960120"/>
+            <a:ext cx="8321040" cy="0"/>
+          </a:xfrm>
+          <a:prstGeom prst="line">
+            <a:avLst/>
+          </a:prstGeom>
+          <a:noFill/>
+          <a:ln w="12700">
+            <a:solidFill>
+              <a:srgbClr val="E7E5E4"/>
+            </a:solidFill>
+            <a:prstDash val="solid"/>
+          </a:ln>
+        </p:spPr>
+      </p:sp>
+      <p:sp>
+        <p:nvSpPr>
+          <p:cNvPr id="5" name="Text 3"/>
+          <p:cNvSpPr/>
+          <p:nvPr/>
+        </p:nvSpPr>
+        <p:spPr>
+          <a:xfrm>
+            <a:off x="411480" y="4864608"/>
+            <a:ext cx="8321040" cy="237744"/>
+          </a:xfrm>
+          <a:prstGeom prst="rect">
+            <a:avLst/>
+          </a:prstGeom>
+          <a:noFill/>
+          <a:ln/>
+        </p:spPr>
+        <p:txBody>
+          <a:bodyPr wrap="square" rtlCol="0" anchor="ctr"/>
+          <a:lstStyle/>
+          <a:p>
+            <a:pPr indent="0" marL="0">
+              <a:buNone/>
+            </a:pPr>
+            <a:r>
+              <a:rPr lang="en-US" sz="750" dirty="0">
+                <a:solidFill>
+                  <a:srgbClr val="AAAAAA"/>
+                </a:solidFill>
+                <a:latin typeface="Arial" pitchFamily="34" charset="0"/>
+                <a:ea typeface="Arial" pitchFamily="34" charset="-122"/>
+                <a:cs typeface="Arial" pitchFamily="34" charset="-120"/>
+              </a:rPr>
+              <a:t>Lesson Forge Pro (owner) — This content is educational material only and does not constitute financial, investment, or trading advice.</a:t>
+            </a:r>
+            <a:endParaRPr lang="en-US" sz="750" dirty="0"/>
+          </a:p>
+        </p:txBody>
+      </p:sp>
+      <p:sp>
+        <p:nvSpPr>
+          <p:cNvPr id="6" name="Text 4"/>
+          <p:cNvSpPr/>
+          <p:nvPr/>
+        </p:nvSpPr>
+        <p:spPr>
+          <a:xfrm>
+            <a:off x="731520" y="1188720"/>
+            <a:ext cx="7680960" cy="2743200"/>
+          </a:xfrm>
+          <a:prstGeom prst="rect">
+            <a:avLst/>
+          </a:prstGeom>
+          <a:noFill/>
+          <a:ln/>
+        </p:spPr>
+        <p:txBody>
+          <a:bodyPr wrap="square" rtlCol="0" anchor="t"/>
+          <a:lstStyle/>
+          <a:p>
+            <a:pPr marL="152400" indent="-152400">
+              <a:spcAft>
+                <a:spcPts val="800"/>
+              </a:spcAft>
+              <a:buSzPct val="100000"/>
+              <a:buChar char="•"/>
+            </a:pPr>
+            <a:r>
+              <a:rPr lang="en-US" sz="1500" dirty="0">
+                <a:solidFill>
+                  <a:srgbClr val="1C1917"/>
+                </a:solidFill>
+                <a:latin typeface="Arial" pitchFamily="34" charset="0"/>
+                <a:ea typeface="Arial" pitchFamily="34" charset="-122"/>
+                <a:cs typeface="Arial" pitchFamily="34" charset="-120"/>
+              </a:rPr>
+              <a:t>Year 1 revenue of $500,000 growing at 8% is the input; growth rate is the driver.</a:t>
+            </a:r>
+            <a:endParaRPr lang="en-US" sz="1500" dirty="0"/>
+          </a:p>
+          <a:p>
+            <a:pPr marL="152400" indent="-152400">
+              <a:spcAft>
+                <a:spcPts val="800"/>
+              </a:spcAft>
+              <a:buSzPct val="100000"/>
+              <a:buChar char="•"/>
+            </a:pPr>
+            <a:r>
+              <a:rPr lang="en-US" sz="1500" dirty="0">
+                <a:solidFill>
+                  <a:srgbClr val="1C1917"/>
+                </a:solidFill>
+                <a:latin typeface="Arial" pitchFamily="34" charset="0"/>
+                <a:ea typeface="Arial" pitchFamily="34" charset="-122"/>
+                <a:cs typeface="Arial" pitchFamily="34" charset="-120"/>
+              </a:rPr>
+              <a:t>Formula: Revenue_t = Revenue_0 × (1 + g)^t yields $629,856 in Year 3.</a:t>
+            </a:r>
+            <a:endParaRPr lang="en-US" sz="1500" dirty="0"/>
+          </a:p>
+          <a:p>
+            <a:pPr marL="152400" indent="-152400">
+              <a:spcAft>
+                <a:spcPts val="800"/>
+              </a:spcAft>
+              <a:buSzPct val="100000"/>
+              <a:buChar char="•"/>
+            </a:pPr>
+            <a:r>
+              <a:rPr lang="en-US" sz="1500" dirty="0">
+                <a:solidFill>
+                  <a:srgbClr val="1C1917"/>
+                </a:solidFill>
+                <a:latin typeface="Arial" pitchFamily="34" charset="0"/>
+                <a:ea typeface="Arial" pitchFamily="34" charset="-122"/>
+                <a:cs typeface="Arial" pitchFamily="34" charset="-120"/>
+              </a:rPr>
+              <a:t>A ±2% growth rate swing produces a $70,000 spread in Year 3 revenue.</a:t>
+            </a:r>
+            <a:endParaRPr lang="en-US" sz="1500" dirty="0"/>
+          </a:p>
+          <a:p>
+            <a:pPr marL="152400" indent="-152400">
+              <a:spcAft>
+                <a:spcPts val="800"/>
+              </a:spcAft>
+              <a:buSzPct val="100000"/>
+              <a:buChar char="•"/>
+            </a:pPr>
+            <a:r>
+              <a:rPr lang="en-US" sz="1500" dirty="0">
+                <a:solidFill>
+                  <a:srgbClr val="1C1917"/>
+                </a:solidFill>
+                <a:latin typeface="Arial" pitchFamily="34" charset="0"/>
+                <a:ea typeface="Arial" pitchFamily="34" charset="-122"/>
+                <a:cs typeface="Arial" pitchFamily="34" charset="-120"/>
+              </a:rPr>
+              <a:t>Hardcoding 1.08 inside a formula—instead of referencing a cell—is a critical mistake.</a:t>
+            </a:r>
+            <a:endParaRPr lang="en-US" sz="1500" dirty="0"/>
+          </a:p>
+        </p:txBody>
+      </p:sp>
+      <p:sp>
+        <p:nvSpPr>
+          <p:cNvPr id="7" name="Shape 5"/>
+          <p:cNvSpPr/>
+          <p:nvPr/>
+        </p:nvSpPr>
+        <p:spPr>
+          <a:xfrm>
+            <a:off x="731520" y="4041648"/>
+            <a:ext cx="7680960" cy="566928"/>
+          </a:xfrm>
+          <a:prstGeom prst="roundRect">
+            <a:avLst>
+              <a:gd name="adj" fmla="val 12903"/>
+            </a:avLst>
+          </a:prstGeom>
+          <a:solidFill>
+            <a:srgbClr val="B45309">
+              <a:alpha val="12000"/>
+            </a:srgbClr>
+          </a:solidFill>
+          <a:ln w="12700">
+            <a:solidFill>
+              <a:srgbClr val="B45309"/>
+            </a:solidFill>
+            <a:prstDash val="solid"/>
+          </a:ln>
+        </p:spPr>
+      </p:sp>
+      <p:sp>
+        <p:nvSpPr>
+          <p:cNvPr id="8" name="Text 6"/>
+          <p:cNvSpPr/>
+          <p:nvPr/>
+        </p:nvSpPr>
+        <p:spPr>
+          <a:xfrm>
+            <a:off x="868680" y="4087368"/>
+            <a:ext cx="7406640" cy="475488"/>
+          </a:xfrm>
+          <a:prstGeom prst="rect">
+            <a:avLst/>
+          </a:prstGeom>
+          <a:noFill/>
+          <a:ln/>
+        </p:spPr>
+        <p:txBody>
+          <a:bodyPr wrap="square" rtlCol="0" anchor="ctr"/>
+          <a:lstStyle/>
+          <a:p>
+            <a:pPr indent="0" marL="0">
+              <a:buNone/>
+            </a:pPr>
+            <a:r>
+              <a:rPr lang="en-US" sz="1100" b="1" dirty="0">
+                <a:solidFill>
+                  <a:srgbClr val="B45309"/>
+                </a:solidFill>
+                <a:latin typeface="Arial" pitchFamily="34" charset="0"/>
+                <a:ea typeface="Arial" pitchFamily="34" charset="-122"/>
+                <a:cs typeface="Arial" pitchFamily="34" charset="-120"/>
+              </a:rPr>
+              <a:t>Takeaway  </a:t>
+            </a:r>
+            <a:pPr indent="0" marL="0">
+              <a:buNone/>
+            </a:pPr>
+            <a:r>
+              <a:rPr lang="en-US" sz="1150" dirty="0">
+                <a:solidFill>
+                  <a:srgbClr val="1C1917"/>
+                </a:solidFill>
+                <a:latin typeface="Arial" pitchFamily="34" charset="0"/>
+                <a:ea typeface="Arial" pitchFamily="34" charset="-122"/>
+                <a:cs typeface="Arial" pitchFamily="34" charset="-120"/>
+              </a:rPr>
+              <a:t>Even a simple three-year projection reveals why isolating the driver and referencing inputs correctly is essential.</a:t>
+            </a:r>
+            <a:endParaRPr lang="en-US" sz="1100" dirty="0"/>
           </a:p>
         </p:txBody>
       </p:sp>
